--- a/lectures/2025_GNET749_Lecture2.pptx
+++ b/lectures/2025_GNET749_Lecture2.pptx
@@ -5,40 +5,41 @@
     <p:sldMasterId id="2147483648" r:id="rId1"/>
   </p:sldMasterIdLst>
   <p:notesMasterIdLst>
-    <p:notesMasterId r:id="rId33"/>
+    <p:notesMasterId r:id="rId34"/>
   </p:notesMasterIdLst>
   <p:sldIdLst>
     <p:sldId id="301" r:id="rId2"/>
     <p:sldId id="284" r:id="rId3"/>
-    <p:sldId id="285" r:id="rId4"/>
-    <p:sldId id="315" r:id="rId5"/>
-    <p:sldId id="286" r:id="rId6"/>
-    <p:sldId id="287" r:id="rId7"/>
-    <p:sldId id="302" r:id="rId8"/>
-    <p:sldId id="308" r:id="rId9"/>
-    <p:sldId id="306" r:id="rId10"/>
-    <p:sldId id="307" r:id="rId11"/>
-    <p:sldId id="304" r:id="rId12"/>
-    <p:sldId id="305" r:id="rId13"/>
-    <p:sldId id="309" r:id="rId14"/>
-    <p:sldId id="288" r:id="rId15"/>
-    <p:sldId id="303" r:id="rId16"/>
-    <p:sldId id="289" r:id="rId17"/>
-    <p:sldId id="290" r:id="rId18"/>
-    <p:sldId id="291" r:id="rId19"/>
-    <p:sldId id="317" r:id="rId20"/>
-    <p:sldId id="310" r:id="rId21"/>
-    <p:sldId id="311" r:id="rId22"/>
-    <p:sldId id="312" r:id="rId23"/>
-    <p:sldId id="313" r:id="rId24"/>
-    <p:sldId id="314" r:id="rId25"/>
-    <p:sldId id="293" r:id="rId26"/>
-    <p:sldId id="294" r:id="rId27"/>
-    <p:sldId id="295" r:id="rId28"/>
-    <p:sldId id="297" r:id="rId29"/>
-    <p:sldId id="298" r:id="rId30"/>
-    <p:sldId id="299" r:id="rId31"/>
-    <p:sldId id="316" r:id="rId32"/>
+    <p:sldId id="318" r:id="rId4"/>
+    <p:sldId id="285" r:id="rId5"/>
+    <p:sldId id="315" r:id="rId6"/>
+    <p:sldId id="286" r:id="rId7"/>
+    <p:sldId id="287" r:id="rId8"/>
+    <p:sldId id="302" r:id="rId9"/>
+    <p:sldId id="308" r:id="rId10"/>
+    <p:sldId id="306" r:id="rId11"/>
+    <p:sldId id="307" r:id="rId12"/>
+    <p:sldId id="304" r:id="rId13"/>
+    <p:sldId id="305" r:id="rId14"/>
+    <p:sldId id="309" r:id="rId15"/>
+    <p:sldId id="288" r:id="rId16"/>
+    <p:sldId id="303" r:id="rId17"/>
+    <p:sldId id="289" r:id="rId18"/>
+    <p:sldId id="290" r:id="rId19"/>
+    <p:sldId id="291" r:id="rId20"/>
+    <p:sldId id="317" r:id="rId21"/>
+    <p:sldId id="310" r:id="rId22"/>
+    <p:sldId id="311" r:id="rId23"/>
+    <p:sldId id="312" r:id="rId24"/>
+    <p:sldId id="313" r:id="rId25"/>
+    <p:sldId id="314" r:id="rId26"/>
+    <p:sldId id="293" r:id="rId27"/>
+    <p:sldId id="294" r:id="rId28"/>
+    <p:sldId id="295" r:id="rId29"/>
+    <p:sldId id="297" r:id="rId30"/>
+    <p:sldId id="298" r:id="rId31"/>
+    <p:sldId id="299" r:id="rId32"/>
+    <p:sldId id="316" r:id="rId33"/>
   </p:sldIdLst>
   <p:sldSz cx="12192000" cy="6858000"/>
   <p:notesSz cx="6858000" cy="9144000"/>
@@ -227,7 +228,7 @@
           <a:p>
             <a:fld id="{DE4242AA-3937-624B-9BD8-F1C01C498458}" type="datetimeFigureOut">
               <a:rPr lang="en-US" smtClean="0"/>
-              <a:t>4/16/24</a:t>
+              <a:t>4/12/25</a:t>
             </a:fld>
             <a:endParaRPr lang="en-US"/>
           </a:p>
@@ -885,7 +886,7 @@
           <a:p>
             <a:fld id="{B56C126C-0D09-7346-9096-8E1075EB9758}" type="datetimeFigureOut">
               <a:rPr lang="en-US" smtClean="0"/>
-              <a:t>4/16/24</a:t>
+              <a:t>4/12/25</a:t>
             </a:fld>
             <a:endParaRPr lang="en-US"/>
           </a:p>
@@ -1083,7 +1084,7 @@
           <a:p>
             <a:fld id="{B56C126C-0D09-7346-9096-8E1075EB9758}" type="datetimeFigureOut">
               <a:rPr lang="en-US" smtClean="0"/>
-              <a:t>4/16/24</a:t>
+              <a:t>4/12/25</a:t>
             </a:fld>
             <a:endParaRPr lang="en-US"/>
           </a:p>
@@ -1291,7 +1292,7 @@
           <a:p>
             <a:fld id="{B56C126C-0D09-7346-9096-8E1075EB9758}" type="datetimeFigureOut">
               <a:rPr lang="en-US" smtClean="0"/>
-              <a:t>4/16/24</a:t>
+              <a:t>4/12/25</a:t>
             </a:fld>
             <a:endParaRPr lang="en-US"/>
           </a:p>
@@ -1489,7 +1490,7 @@
           <a:p>
             <a:fld id="{B56C126C-0D09-7346-9096-8E1075EB9758}" type="datetimeFigureOut">
               <a:rPr lang="en-US" smtClean="0"/>
-              <a:t>4/16/24</a:t>
+              <a:t>4/12/25</a:t>
             </a:fld>
             <a:endParaRPr lang="en-US"/>
           </a:p>
@@ -1764,7 +1765,7 @@
           <a:p>
             <a:fld id="{B56C126C-0D09-7346-9096-8E1075EB9758}" type="datetimeFigureOut">
               <a:rPr lang="en-US" smtClean="0"/>
-              <a:t>4/16/24</a:t>
+              <a:t>4/12/25</a:t>
             </a:fld>
             <a:endParaRPr lang="en-US"/>
           </a:p>
@@ -2029,7 +2030,7 @@
           <a:p>
             <a:fld id="{B56C126C-0D09-7346-9096-8E1075EB9758}" type="datetimeFigureOut">
               <a:rPr lang="en-US" smtClean="0"/>
-              <a:t>4/16/24</a:t>
+              <a:t>4/12/25</a:t>
             </a:fld>
             <a:endParaRPr lang="en-US"/>
           </a:p>
@@ -2441,7 +2442,7 @@
           <a:p>
             <a:fld id="{B56C126C-0D09-7346-9096-8E1075EB9758}" type="datetimeFigureOut">
               <a:rPr lang="en-US" smtClean="0"/>
-              <a:t>4/16/24</a:t>
+              <a:t>4/12/25</a:t>
             </a:fld>
             <a:endParaRPr lang="en-US"/>
           </a:p>
@@ -2582,7 +2583,7 @@
           <a:p>
             <a:fld id="{B56C126C-0D09-7346-9096-8E1075EB9758}" type="datetimeFigureOut">
               <a:rPr lang="en-US" smtClean="0"/>
-              <a:t>4/16/24</a:t>
+              <a:t>4/12/25</a:t>
             </a:fld>
             <a:endParaRPr lang="en-US"/>
           </a:p>
@@ -2695,7 +2696,7 @@
           <a:p>
             <a:fld id="{B56C126C-0D09-7346-9096-8E1075EB9758}" type="datetimeFigureOut">
               <a:rPr lang="en-US" smtClean="0"/>
-              <a:t>4/16/24</a:t>
+              <a:t>4/12/25</a:t>
             </a:fld>
             <a:endParaRPr lang="en-US"/>
           </a:p>
@@ -3006,7 +3007,7 @@
           <a:p>
             <a:fld id="{B56C126C-0D09-7346-9096-8E1075EB9758}" type="datetimeFigureOut">
               <a:rPr lang="en-US" smtClean="0"/>
-              <a:t>4/16/24</a:t>
+              <a:t>4/12/25</a:t>
             </a:fld>
             <a:endParaRPr lang="en-US"/>
           </a:p>
@@ -3294,7 +3295,7 @@
           <a:p>
             <a:fld id="{B56C126C-0D09-7346-9096-8E1075EB9758}" type="datetimeFigureOut">
               <a:rPr lang="en-US" smtClean="0"/>
-              <a:t>4/16/24</a:t>
+              <a:t>4/12/25</a:t>
             </a:fld>
             <a:endParaRPr lang="en-US"/>
           </a:p>
@@ -3535,7 +3536,7 @@
           <a:p>
             <a:fld id="{B56C126C-0D09-7346-9096-8E1075EB9758}" type="datetimeFigureOut">
               <a:rPr lang="en-US" smtClean="0"/>
-              <a:t>4/16/24</a:t>
+              <a:t>4/12/25</a:t>
             </a:fld>
             <a:endParaRPr lang="en-US"/>
           </a:p>
@@ -4054,6 +4055,378 @@
       </p:sp>
       <p:sp>
         <p:nvSpPr>
+          <p:cNvPr id="5" name="TextBox 4">
+            <a:extLst>
+              <a:ext uri="{FF2B5EF4-FFF2-40B4-BE49-F238E27FC236}">
+                <a16:creationId xmlns:a16="http://schemas.microsoft.com/office/drawing/2014/main" id="{B79559C3-A22F-1230-70F5-89B6E2C4E39A}"/>
+              </a:ext>
+            </a:extLst>
+          </p:cNvPr>
+          <p:cNvSpPr txBox="1"/>
+          <p:nvPr/>
+        </p:nvSpPr>
+        <p:spPr>
+          <a:xfrm>
+            <a:off x="753650" y="1054274"/>
+            <a:ext cx="1515928" cy="369332"/>
+          </a:xfrm>
+          <a:prstGeom prst="rect">
+            <a:avLst/>
+          </a:prstGeom>
+          <a:noFill/>
+        </p:spPr>
+        <p:txBody>
+          <a:bodyPr wrap="none" rtlCol="0">
+            <a:spAutoFit/>
+          </a:bodyPr>
+          <a:lstStyle/>
+          <a:p>
+            <a:r>
+              <a:rPr lang="en-US" dirty="0" err="1"/>
+              <a:t>pivot_longer</a:t>
+            </a:r>
+            <a:r>
+              <a:rPr lang="en-US" dirty="0"/>
+              <a:t>()</a:t>
+            </a:r>
+          </a:p>
+        </p:txBody>
+      </p:sp>
+      <p:sp>
+        <p:nvSpPr>
+          <p:cNvPr id="7" name="TextBox 6">
+            <a:extLst>
+              <a:ext uri="{FF2B5EF4-FFF2-40B4-BE49-F238E27FC236}">
+                <a16:creationId xmlns:a16="http://schemas.microsoft.com/office/drawing/2014/main" id="{D45D8B8A-91FB-510E-E86D-3BBB80461A55}"/>
+              </a:ext>
+            </a:extLst>
+          </p:cNvPr>
+          <p:cNvSpPr txBox="1"/>
+          <p:nvPr/>
+        </p:nvSpPr>
+        <p:spPr>
+          <a:xfrm>
+            <a:off x="7733257" y="6194306"/>
+            <a:ext cx="6097044" cy="369332"/>
+          </a:xfrm>
+          <a:prstGeom prst="rect">
+            <a:avLst/>
+          </a:prstGeom>
+          <a:noFill/>
+        </p:spPr>
+        <p:txBody>
+          <a:bodyPr wrap="square">
+            <a:spAutoFit/>
+          </a:bodyPr>
+          <a:lstStyle/>
+          <a:p>
+            <a:r>
+              <a:rPr lang="en-US" dirty="0"/>
+              <a:t>https://</a:t>
+            </a:r>
+            <a:r>
+              <a:rPr lang="en-US" dirty="0" err="1"/>
+              <a:t>tidyr.tidyverse.org</a:t>
+            </a:r>
+            <a:r>
+              <a:rPr lang="en-US" dirty="0"/>
+              <a:t>/articles/</a:t>
+            </a:r>
+            <a:r>
+              <a:rPr lang="en-US" dirty="0" err="1"/>
+              <a:t>pivot.html</a:t>
+            </a:r>
+            <a:endParaRPr lang="en-US" dirty="0"/>
+          </a:p>
+        </p:txBody>
+      </p:sp>
+      <p:pic>
+        <p:nvPicPr>
+          <p:cNvPr id="8" name="Picture 7">
+            <a:extLst>
+              <a:ext uri="{FF2B5EF4-FFF2-40B4-BE49-F238E27FC236}">
+                <a16:creationId xmlns:a16="http://schemas.microsoft.com/office/drawing/2014/main" id="{127BA8B8-06AE-6E6A-8720-78F1858E5025}"/>
+              </a:ext>
+            </a:extLst>
+          </p:cNvPr>
+          <p:cNvPicPr>
+            <a:picLocks noChangeAspect="1"/>
+          </p:cNvPicPr>
+          <p:nvPr/>
+        </p:nvPicPr>
+        <p:blipFill>
+          <a:blip r:embed="rId2"/>
+          <a:stretch>
+            <a:fillRect/>
+          </a:stretch>
+        </p:blipFill>
+        <p:spPr>
+          <a:xfrm>
+            <a:off x="2591844" y="1100513"/>
+            <a:ext cx="7772400" cy="276853"/>
+          </a:xfrm>
+          <a:prstGeom prst="rect">
+            <a:avLst/>
+          </a:prstGeom>
+        </p:spPr>
+      </p:pic>
+      <p:pic>
+        <p:nvPicPr>
+          <p:cNvPr id="9" name="Picture 8">
+            <a:extLst>
+              <a:ext uri="{FF2B5EF4-FFF2-40B4-BE49-F238E27FC236}">
+                <a16:creationId xmlns:a16="http://schemas.microsoft.com/office/drawing/2014/main" id="{6E2F069F-068C-300C-AF56-3432AF4D767F}"/>
+              </a:ext>
+            </a:extLst>
+          </p:cNvPr>
+          <p:cNvPicPr>
+            <a:picLocks noChangeAspect="1"/>
+          </p:cNvPicPr>
+          <p:nvPr/>
+        </p:nvPicPr>
+        <p:blipFill>
+          <a:blip r:embed="rId3"/>
+          <a:stretch>
+            <a:fillRect/>
+          </a:stretch>
+        </p:blipFill>
+        <p:spPr>
+          <a:xfrm>
+            <a:off x="697108" y="1745292"/>
+            <a:ext cx="4612017" cy="2181618"/>
+          </a:xfrm>
+          <a:prstGeom prst="rect">
+            <a:avLst/>
+          </a:prstGeom>
+        </p:spPr>
+      </p:pic>
+      <p:pic>
+        <p:nvPicPr>
+          <p:cNvPr id="10" name="Picture 9">
+            <a:extLst>
+              <a:ext uri="{FF2B5EF4-FFF2-40B4-BE49-F238E27FC236}">
+                <a16:creationId xmlns:a16="http://schemas.microsoft.com/office/drawing/2014/main" id="{489A0044-0EA4-60BE-B9E6-980517DA0E47}"/>
+              </a:ext>
+            </a:extLst>
+          </p:cNvPr>
+          <p:cNvPicPr>
+            <a:picLocks noChangeAspect="1"/>
+          </p:cNvPicPr>
+          <p:nvPr/>
+        </p:nvPicPr>
+        <p:blipFill>
+          <a:blip r:embed="rId4"/>
+          <a:stretch>
+            <a:fillRect/>
+          </a:stretch>
+        </p:blipFill>
+        <p:spPr>
+          <a:xfrm>
+            <a:off x="6568858" y="1704419"/>
+            <a:ext cx="2080364" cy="2220706"/>
+          </a:xfrm>
+          <a:prstGeom prst="rect">
+            <a:avLst/>
+          </a:prstGeom>
+        </p:spPr>
+      </p:pic>
+      <p:sp>
+        <p:nvSpPr>
+          <p:cNvPr id="11" name="TextBox 10">
+            <a:extLst>
+              <a:ext uri="{FF2B5EF4-FFF2-40B4-BE49-F238E27FC236}">
+                <a16:creationId xmlns:a16="http://schemas.microsoft.com/office/drawing/2014/main" id="{E6A912FF-30D2-79B4-01F1-07C981BE9D8E}"/>
+              </a:ext>
+            </a:extLst>
+          </p:cNvPr>
+          <p:cNvSpPr txBox="1"/>
+          <p:nvPr/>
+        </p:nvSpPr>
+        <p:spPr>
+          <a:xfrm>
+            <a:off x="594986" y="4294836"/>
+            <a:ext cx="4576959" cy="369332"/>
+          </a:xfrm>
+          <a:prstGeom prst="rect">
+            <a:avLst/>
+          </a:prstGeom>
+          <a:noFill/>
+        </p:spPr>
+        <p:txBody>
+          <a:bodyPr wrap="none" rtlCol="0">
+            <a:spAutoFit/>
+          </a:bodyPr>
+          <a:lstStyle/>
+          <a:p>
+            <a:r>
+              <a:rPr lang="en-US" dirty="0"/>
+              <a:t>More useful if you want to plot length vs width</a:t>
+            </a:r>
+          </a:p>
+        </p:txBody>
+      </p:sp>
+      <p:sp>
+        <p:nvSpPr>
+          <p:cNvPr id="13" name="TextBox 12">
+            <a:extLst>
+              <a:ext uri="{FF2B5EF4-FFF2-40B4-BE49-F238E27FC236}">
+                <a16:creationId xmlns:a16="http://schemas.microsoft.com/office/drawing/2014/main" id="{5E2DCCF8-1717-F444-955C-F62097346BEF}"/>
+              </a:ext>
+            </a:extLst>
+          </p:cNvPr>
+          <p:cNvSpPr txBox="1"/>
+          <p:nvPr/>
+        </p:nvSpPr>
+        <p:spPr>
+          <a:xfrm>
+            <a:off x="6330864" y="3981046"/>
+            <a:ext cx="5194948" cy="369332"/>
+          </a:xfrm>
+          <a:prstGeom prst="rect">
+            <a:avLst/>
+          </a:prstGeom>
+          <a:noFill/>
+        </p:spPr>
+        <p:txBody>
+          <a:bodyPr wrap="none" rtlCol="0">
+            <a:spAutoFit/>
+          </a:bodyPr>
+          <a:lstStyle/>
+          <a:p>
+            <a:r>
+              <a:rPr lang="en-US" dirty="0"/>
+              <a:t>More useful if you want to plot all attributes together</a:t>
+            </a:r>
+          </a:p>
+        </p:txBody>
+      </p:sp>
+      <p:pic>
+        <p:nvPicPr>
+          <p:cNvPr id="14" name="Picture 13">
+            <a:extLst>
+              <a:ext uri="{FF2B5EF4-FFF2-40B4-BE49-F238E27FC236}">
+                <a16:creationId xmlns:a16="http://schemas.microsoft.com/office/drawing/2014/main" id="{F9D1E1A7-24D9-1564-6745-23EBC52DBF63}"/>
+              </a:ext>
+            </a:extLst>
+          </p:cNvPr>
+          <p:cNvPicPr>
+            <a:picLocks noChangeAspect="1"/>
+          </p:cNvPicPr>
+          <p:nvPr/>
+        </p:nvPicPr>
+        <p:blipFill>
+          <a:blip r:embed="rId5"/>
+          <a:stretch>
+            <a:fillRect/>
+          </a:stretch>
+        </p:blipFill>
+        <p:spPr>
+          <a:xfrm>
+            <a:off x="1429340" y="4766961"/>
+            <a:ext cx="1797778" cy="1997136"/>
+          </a:xfrm>
+          <a:prstGeom prst="rect">
+            <a:avLst/>
+          </a:prstGeom>
+        </p:spPr>
+      </p:pic>
+      <p:pic>
+        <p:nvPicPr>
+          <p:cNvPr id="15" name="Picture 14">
+            <a:extLst>
+              <a:ext uri="{FF2B5EF4-FFF2-40B4-BE49-F238E27FC236}">
+                <a16:creationId xmlns:a16="http://schemas.microsoft.com/office/drawing/2014/main" id="{37AABA38-6352-FF7A-A86F-B49D58CF2110}"/>
+              </a:ext>
+            </a:extLst>
+          </p:cNvPr>
+          <p:cNvPicPr>
+            <a:picLocks noChangeAspect="1"/>
+          </p:cNvPicPr>
+          <p:nvPr/>
+        </p:nvPicPr>
+        <p:blipFill>
+          <a:blip r:embed="rId6"/>
+          <a:stretch>
+            <a:fillRect/>
+          </a:stretch>
+        </p:blipFill>
+        <p:spPr>
+          <a:xfrm>
+            <a:off x="5840849" y="4406299"/>
+            <a:ext cx="1892408" cy="2095279"/>
+          </a:xfrm>
+          <a:prstGeom prst="rect">
+            <a:avLst/>
+          </a:prstGeom>
+        </p:spPr>
+      </p:pic>
+    </p:spTree>
+    <p:extLst>
+      <p:ext uri="{BB962C8B-B14F-4D97-AF65-F5344CB8AC3E}">
+        <p14:creationId xmlns:p14="http://schemas.microsoft.com/office/powerpoint/2010/main" val="1766242288"/>
+      </p:ext>
+    </p:extLst>
+  </p:cSld>
+  <p:clrMapOvr>
+    <a:masterClrMapping/>
+  </p:clrMapOvr>
+</p:sld>
+</file>
+
+<file path=ppt/slides/slide11.xml><?xml version="1.0" encoding="utf-8"?>
+<p:sld xmlns:a="http://schemas.openxmlformats.org/drawingml/2006/main" xmlns:r="http://schemas.openxmlformats.org/officeDocument/2006/relationships" xmlns:p="http://schemas.openxmlformats.org/presentationml/2006/main">
+  <p:cSld>
+    <p:spTree>
+      <p:nvGrpSpPr>
+        <p:cNvPr id="1" name=""/>
+        <p:cNvGrpSpPr/>
+        <p:nvPr/>
+      </p:nvGrpSpPr>
+      <p:grpSpPr>
+        <a:xfrm>
+          <a:off x="0" y="0"/>
+          <a:ext cx="0" cy="0"/>
+          <a:chOff x="0" y="0"/>
+          <a:chExt cx="0" cy="0"/>
+        </a:xfrm>
+      </p:grpSpPr>
+      <p:sp>
+        <p:nvSpPr>
+          <p:cNvPr id="2" name="TextBox 1">
+            <a:extLst>
+              <a:ext uri="{FF2B5EF4-FFF2-40B4-BE49-F238E27FC236}">
+                <a16:creationId xmlns:a16="http://schemas.microsoft.com/office/drawing/2014/main" id="{EE808F59-D6A1-6EC7-8215-A1414DD3D939}"/>
+              </a:ext>
+            </a:extLst>
+          </p:cNvPr>
+          <p:cNvSpPr txBox="1"/>
+          <p:nvPr/>
+        </p:nvSpPr>
+        <p:spPr>
+          <a:xfrm>
+            <a:off x="4008329" y="294362"/>
+            <a:ext cx="4416274" cy="369332"/>
+          </a:xfrm>
+          <a:prstGeom prst="rect">
+            <a:avLst/>
+          </a:prstGeom>
+          <a:noFill/>
+        </p:spPr>
+        <p:txBody>
+          <a:bodyPr wrap="none" rtlCol="0">
+            <a:spAutoFit/>
+          </a:bodyPr>
+          <a:lstStyle/>
+          <a:p>
+            <a:r>
+              <a:rPr lang="en-US" dirty="0"/>
+              <a:t>Converting between wide and long formats </a:t>
+            </a:r>
+          </a:p>
+        </p:txBody>
+      </p:sp>
+      <p:sp>
+        <p:nvSpPr>
           <p:cNvPr id="3" name="TextBox 2">
             <a:extLst>
               <a:ext uri="{FF2B5EF4-FFF2-40B4-BE49-F238E27FC236}">
@@ -4381,7 +4754,7 @@
 </p:sld>
 </file>
 
-<file path=ppt/slides/slide11.xml><?xml version="1.0" encoding="utf-8"?>
+<file path=ppt/slides/slide12.xml><?xml version="1.0" encoding="utf-8"?>
 <p:sld xmlns:a="http://schemas.openxmlformats.org/drawingml/2006/main" xmlns:r="http://schemas.openxmlformats.org/officeDocument/2006/relationships" xmlns:p="http://schemas.openxmlformats.org/presentationml/2006/main">
   <p:cSld>
     <p:spTree>
@@ -4821,7 +5194,7 @@
 </p:sld>
 </file>
 
-<file path=ppt/slides/slide12.xml><?xml version="1.0" encoding="utf-8"?>
+<file path=ppt/slides/slide13.xml><?xml version="1.0" encoding="utf-8"?>
 <p:sld xmlns:a="http://schemas.openxmlformats.org/drawingml/2006/main" xmlns:r="http://schemas.openxmlformats.org/officeDocument/2006/relationships" xmlns:p="http://schemas.openxmlformats.org/presentationml/2006/main">
   <p:cSld>
     <p:spTree>
@@ -5322,238 +5695,6 @@
     <p:extLst>
       <p:ext uri="{BB962C8B-B14F-4D97-AF65-F5344CB8AC3E}">
         <p14:creationId xmlns:p14="http://schemas.microsoft.com/office/powerpoint/2010/main" val="3910450632"/>
-      </p:ext>
-    </p:extLst>
-  </p:cSld>
-  <p:clrMapOvr>
-    <a:masterClrMapping/>
-  </p:clrMapOvr>
-</p:sld>
-</file>
-
-<file path=ppt/slides/slide13.xml><?xml version="1.0" encoding="utf-8"?>
-<p:sld xmlns:a="http://schemas.openxmlformats.org/drawingml/2006/main" xmlns:r="http://schemas.openxmlformats.org/officeDocument/2006/relationships" xmlns:p="http://schemas.openxmlformats.org/presentationml/2006/main">
-  <p:cSld>
-    <p:spTree>
-      <p:nvGrpSpPr>
-        <p:cNvPr id="1" name=""/>
-        <p:cNvGrpSpPr/>
-        <p:nvPr/>
-      </p:nvGrpSpPr>
-      <p:grpSpPr>
-        <a:xfrm>
-          <a:off x="0" y="0"/>
-          <a:ext cx="0" cy="0"/>
-          <a:chOff x="0" y="0"/>
-          <a:chExt cx="0" cy="0"/>
-        </a:xfrm>
-      </p:grpSpPr>
-      <p:sp>
-        <p:nvSpPr>
-          <p:cNvPr id="3" name="TextBox 2">
-            <a:extLst>
-              <a:ext uri="{FF2B5EF4-FFF2-40B4-BE49-F238E27FC236}">
-                <a16:creationId xmlns:a16="http://schemas.microsoft.com/office/drawing/2014/main" id="{65154B13-23B4-D285-8E9C-1D05B2CC3314}"/>
-              </a:ext>
-            </a:extLst>
-          </p:cNvPr>
-          <p:cNvSpPr txBox="1"/>
-          <p:nvPr/>
-        </p:nvSpPr>
-        <p:spPr>
-          <a:xfrm>
-            <a:off x="8253086" y="6281896"/>
-            <a:ext cx="6097044" cy="369332"/>
-          </a:xfrm>
-          <a:prstGeom prst="rect">
-            <a:avLst/>
-          </a:prstGeom>
-          <a:noFill/>
-        </p:spPr>
-        <p:txBody>
-          <a:bodyPr wrap="square">
-            <a:spAutoFit/>
-          </a:bodyPr>
-          <a:lstStyle/>
-          <a:p>
-            <a:r>
-              <a:rPr lang="en-US" dirty="0"/>
-              <a:t>https://ggplot2.tidyverse.org/reference/</a:t>
-            </a:r>
-          </a:p>
-        </p:txBody>
-      </p:sp>
-      <p:pic>
-        <p:nvPicPr>
-          <p:cNvPr id="4" name="Picture 3">
-            <a:extLst>
-              <a:ext uri="{FF2B5EF4-FFF2-40B4-BE49-F238E27FC236}">
-                <a16:creationId xmlns:a16="http://schemas.microsoft.com/office/drawing/2014/main" id="{427FDFC9-867C-629E-80F8-EC69839FE04B}"/>
-              </a:ext>
-            </a:extLst>
-          </p:cNvPr>
-          <p:cNvPicPr>
-            <a:picLocks noChangeAspect="1"/>
-          </p:cNvPicPr>
-          <p:nvPr/>
-        </p:nvPicPr>
-        <p:blipFill>
-          <a:blip r:embed="rId2"/>
-          <a:stretch>
-            <a:fillRect/>
-          </a:stretch>
-        </p:blipFill>
-        <p:spPr>
-          <a:xfrm>
-            <a:off x="287055" y="781822"/>
-            <a:ext cx="11244374" cy="1842381"/>
-          </a:xfrm>
-          <a:prstGeom prst="rect">
-            <a:avLst/>
-          </a:prstGeom>
-        </p:spPr>
-      </p:pic>
-      <p:pic>
-        <p:nvPicPr>
-          <p:cNvPr id="5" name="Picture 4">
-            <a:extLst>
-              <a:ext uri="{FF2B5EF4-FFF2-40B4-BE49-F238E27FC236}">
-                <a16:creationId xmlns:a16="http://schemas.microsoft.com/office/drawing/2014/main" id="{6F350F51-53FD-22B7-D40E-9040D4480D15}"/>
-              </a:ext>
-            </a:extLst>
-          </p:cNvPr>
-          <p:cNvPicPr>
-            <a:picLocks noChangeAspect="1"/>
-          </p:cNvPicPr>
-          <p:nvPr/>
-        </p:nvPicPr>
-        <p:blipFill>
-          <a:blip r:embed="rId3"/>
-          <a:stretch>
-            <a:fillRect/>
-          </a:stretch>
-        </p:blipFill>
-        <p:spPr>
-          <a:xfrm>
-            <a:off x="287054" y="2799838"/>
-            <a:ext cx="11084223" cy="1258595"/>
-          </a:xfrm>
-          <a:prstGeom prst="rect">
-            <a:avLst/>
-          </a:prstGeom>
-        </p:spPr>
-      </p:pic>
-      <p:pic>
-        <p:nvPicPr>
-          <p:cNvPr id="6" name="Picture 5">
-            <a:extLst>
-              <a:ext uri="{FF2B5EF4-FFF2-40B4-BE49-F238E27FC236}">
-                <a16:creationId xmlns:a16="http://schemas.microsoft.com/office/drawing/2014/main" id="{F6DF3007-C154-2C33-1059-808C0550F56E}"/>
-              </a:ext>
-            </a:extLst>
-          </p:cNvPr>
-          <p:cNvPicPr>
-            <a:picLocks noChangeAspect="1"/>
-          </p:cNvPicPr>
-          <p:nvPr/>
-        </p:nvPicPr>
-        <p:blipFill>
-          <a:blip r:embed="rId4"/>
-          <a:stretch>
-            <a:fillRect/>
-          </a:stretch>
-        </p:blipFill>
-        <p:spPr>
-          <a:xfrm>
-            <a:off x="287053" y="4006496"/>
-            <a:ext cx="10925879" cy="1035230"/>
-          </a:xfrm>
-          <a:prstGeom prst="rect">
-            <a:avLst/>
-          </a:prstGeom>
-        </p:spPr>
-      </p:pic>
-      <p:pic>
-        <p:nvPicPr>
-          <p:cNvPr id="7" name="Picture 6">
-            <a:extLst>
-              <a:ext uri="{FF2B5EF4-FFF2-40B4-BE49-F238E27FC236}">
-                <a16:creationId xmlns:a16="http://schemas.microsoft.com/office/drawing/2014/main" id="{D2C29005-1F40-FEC8-5E08-701F87647250}"/>
-              </a:ext>
-            </a:extLst>
-          </p:cNvPr>
-          <p:cNvPicPr>
-            <a:picLocks noChangeAspect="1"/>
-          </p:cNvPicPr>
-          <p:nvPr/>
-        </p:nvPicPr>
-        <p:blipFill>
-          <a:blip r:embed="rId5"/>
-          <a:stretch>
-            <a:fillRect/>
-          </a:stretch>
-        </p:blipFill>
-        <p:spPr>
-          <a:xfrm>
-            <a:off x="337158" y="5206868"/>
-            <a:ext cx="10742249" cy="937148"/>
-          </a:xfrm>
-          <a:prstGeom prst="rect">
-            <a:avLst/>
-          </a:prstGeom>
-        </p:spPr>
-      </p:pic>
-      <p:sp>
-        <p:nvSpPr>
-          <p:cNvPr id="8" name="TextBox 7">
-            <a:extLst>
-              <a:ext uri="{FF2B5EF4-FFF2-40B4-BE49-F238E27FC236}">
-                <a16:creationId xmlns:a16="http://schemas.microsoft.com/office/drawing/2014/main" id="{D2302473-7FDB-78CA-6715-5FD17DD32A35}"/>
-              </a:ext>
-            </a:extLst>
-          </p:cNvPr>
-          <p:cNvSpPr txBox="1"/>
-          <p:nvPr/>
-        </p:nvSpPr>
-        <p:spPr>
-          <a:xfrm>
-            <a:off x="3563655" y="247348"/>
-            <a:ext cx="7273914" cy="369332"/>
-          </a:xfrm>
-          <a:prstGeom prst="rect">
-            <a:avLst/>
-          </a:prstGeom>
-          <a:noFill/>
-        </p:spPr>
-        <p:txBody>
-          <a:bodyPr wrap="none" rtlCol="0">
-            <a:spAutoFit/>
-          </a:bodyPr>
-          <a:lstStyle/>
-          <a:p>
-            <a:r>
-              <a:rPr lang="en-US" dirty="0" err="1"/>
-              <a:t>ggplot</a:t>
-            </a:r>
-            <a:r>
-              <a:rPr lang="en-US" dirty="0"/>
-              <a:t> lets you make many different kinds of plots by using different ‘</a:t>
-            </a:r>
-            <a:r>
-              <a:rPr lang="en-US" dirty="0" err="1"/>
-              <a:t>geoms</a:t>
-            </a:r>
-            <a:r>
-              <a:rPr lang="en-US" dirty="0"/>
-              <a:t>’</a:t>
-            </a:r>
-          </a:p>
-        </p:txBody>
-      </p:sp>
-    </p:spTree>
-    <p:extLst>
-      <p:ext uri="{BB962C8B-B14F-4D97-AF65-F5344CB8AC3E}">
-        <p14:creationId xmlns:p14="http://schemas.microsoft.com/office/powerpoint/2010/main" val="1698419793"/>
       </p:ext>
     </p:extLst>
   </p:cSld>
@@ -5580,9 +5721,50 @@
           <a:chExt cx="0" cy="0"/>
         </a:xfrm>
       </p:grpSpPr>
+      <p:sp>
+        <p:nvSpPr>
+          <p:cNvPr id="3" name="TextBox 2">
+            <a:extLst>
+              <a:ext uri="{FF2B5EF4-FFF2-40B4-BE49-F238E27FC236}">
+                <a16:creationId xmlns:a16="http://schemas.microsoft.com/office/drawing/2014/main" id="{65154B13-23B4-D285-8E9C-1D05B2CC3314}"/>
+              </a:ext>
+            </a:extLst>
+          </p:cNvPr>
+          <p:cNvSpPr txBox="1"/>
+          <p:nvPr/>
+        </p:nvSpPr>
+        <p:spPr>
+          <a:xfrm>
+            <a:off x="8253086" y="6281896"/>
+            <a:ext cx="6097044" cy="369332"/>
+          </a:xfrm>
+          <a:prstGeom prst="rect">
+            <a:avLst/>
+          </a:prstGeom>
+          <a:noFill/>
+        </p:spPr>
+        <p:txBody>
+          <a:bodyPr wrap="square">
+            <a:spAutoFit/>
+          </a:bodyPr>
+          <a:lstStyle/>
+          <a:p>
+            <a:r>
+              <a:rPr lang="en-US" dirty="0"/>
+              <a:t>https://ggplot2.tidyverse.org/reference/</a:t>
+            </a:r>
+          </a:p>
+        </p:txBody>
+      </p:sp>
       <p:pic>
         <p:nvPicPr>
-          <p:cNvPr id="333" name="Image" descr="Image"/>
+          <p:cNvPr id="4" name="Picture 3">
+            <a:extLst>
+              <a:ext uri="{FF2B5EF4-FFF2-40B4-BE49-F238E27FC236}">
+                <a16:creationId xmlns:a16="http://schemas.microsoft.com/office/drawing/2014/main" id="{427FDFC9-867C-629E-80F8-EC69839FE04B}"/>
+              </a:ext>
+            </a:extLst>
+          </p:cNvPr>
           <p:cNvPicPr>
             <a:picLocks noChangeAspect="1"/>
           </p:cNvPicPr>
@@ -5596,58 +5778,157 @@
         </p:blipFill>
         <p:spPr>
           <a:xfrm>
-            <a:off x="548667" y="1956759"/>
-            <a:ext cx="2557080" cy="3752929"/>
-          </a:xfrm>
-          <a:prstGeom prst="rect">
-            <a:avLst/>
-          </a:prstGeom>
-          <a:ln w="12700">
-            <a:miter lim="400000"/>
-          </a:ln>
+            <a:off x="287055" y="781822"/>
+            <a:ext cx="11244374" cy="1842381"/>
+          </a:xfrm>
+          <a:prstGeom prst="rect">
+            <a:avLst/>
+          </a:prstGeom>
         </p:spPr>
       </p:pic>
-      <p:sp>
-        <p:nvSpPr>
-          <p:cNvPr id="334" name="What if we want to look at expression levels of these 4 genes?"/>
+      <p:pic>
+        <p:nvPicPr>
+          <p:cNvPr id="5" name="Picture 4">
+            <a:extLst>
+              <a:ext uri="{FF2B5EF4-FFF2-40B4-BE49-F238E27FC236}">
+                <a16:creationId xmlns:a16="http://schemas.microsoft.com/office/drawing/2014/main" id="{6F350F51-53FD-22B7-D40E-9040D4480D15}"/>
+              </a:ext>
+            </a:extLst>
+          </p:cNvPr>
+          <p:cNvPicPr>
+            <a:picLocks noChangeAspect="1"/>
+          </p:cNvPicPr>
+          <p:nvPr/>
+        </p:nvPicPr>
+        <p:blipFill>
+          <a:blip r:embed="rId3"/>
+          <a:stretch>
+            <a:fillRect/>
+          </a:stretch>
+        </p:blipFill>
+        <p:spPr>
+          <a:xfrm>
+            <a:off x="287054" y="2799838"/>
+            <a:ext cx="11084223" cy="1258595"/>
+          </a:xfrm>
+          <a:prstGeom prst="rect">
+            <a:avLst/>
+          </a:prstGeom>
+        </p:spPr>
+      </p:pic>
+      <p:pic>
+        <p:nvPicPr>
+          <p:cNvPr id="6" name="Picture 5">
+            <a:extLst>
+              <a:ext uri="{FF2B5EF4-FFF2-40B4-BE49-F238E27FC236}">
+                <a16:creationId xmlns:a16="http://schemas.microsoft.com/office/drawing/2014/main" id="{F6DF3007-C154-2C33-1059-808C0550F56E}"/>
+              </a:ext>
+            </a:extLst>
+          </p:cNvPr>
+          <p:cNvPicPr>
+            <a:picLocks noChangeAspect="1"/>
+          </p:cNvPicPr>
+          <p:nvPr/>
+        </p:nvPicPr>
+        <p:blipFill>
+          <a:blip r:embed="rId4"/>
+          <a:stretch>
+            <a:fillRect/>
+          </a:stretch>
+        </p:blipFill>
+        <p:spPr>
+          <a:xfrm>
+            <a:off x="287053" y="4006496"/>
+            <a:ext cx="10925879" cy="1035230"/>
+          </a:xfrm>
+          <a:prstGeom prst="rect">
+            <a:avLst/>
+          </a:prstGeom>
+        </p:spPr>
+      </p:pic>
+      <p:pic>
+        <p:nvPicPr>
+          <p:cNvPr id="7" name="Picture 6">
+            <a:extLst>
+              <a:ext uri="{FF2B5EF4-FFF2-40B4-BE49-F238E27FC236}">
+                <a16:creationId xmlns:a16="http://schemas.microsoft.com/office/drawing/2014/main" id="{D2C29005-1F40-FEC8-5E08-701F87647250}"/>
+              </a:ext>
+            </a:extLst>
+          </p:cNvPr>
+          <p:cNvPicPr>
+            <a:picLocks noChangeAspect="1"/>
+          </p:cNvPicPr>
+          <p:nvPr/>
+        </p:nvPicPr>
+        <p:blipFill>
+          <a:blip r:embed="rId5"/>
+          <a:stretch>
+            <a:fillRect/>
+          </a:stretch>
+        </p:blipFill>
+        <p:spPr>
+          <a:xfrm>
+            <a:off x="337158" y="5206868"/>
+            <a:ext cx="10742249" cy="937148"/>
+          </a:xfrm>
+          <a:prstGeom prst="rect">
+            <a:avLst/>
+          </a:prstGeom>
+        </p:spPr>
+      </p:pic>
+      <p:sp>
+        <p:nvSpPr>
+          <p:cNvPr id="8" name="TextBox 7">
+            <a:extLst>
+              <a:ext uri="{FF2B5EF4-FFF2-40B4-BE49-F238E27FC236}">
+                <a16:creationId xmlns:a16="http://schemas.microsoft.com/office/drawing/2014/main" id="{D2302473-7FDB-78CA-6715-5FD17DD32A35}"/>
+              </a:ext>
+            </a:extLst>
+          </p:cNvPr>
           <p:cNvSpPr txBox="1"/>
           <p:nvPr/>
         </p:nvSpPr>
         <p:spPr>
           <a:xfrm>
-            <a:off x="3448320" y="337559"/>
-            <a:ext cx="5295360" cy="328295"/>
-          </a:xfrm>
-          <a:prstGeom prst="rect">
-            <a:avLst/>
-          </a:prstGeom>
-          <a:ln w="12700">
-            <a:miter lim="400000"/>
-          </a:ln>
-          <a:extLst>
-            <a:ext uri="{C572A759-6A51-4108-AA02-DFA0A04FC94B}">
-              <ma14:wrappingTextBoxFlag xmlns:ma14="http://schemas.microsoft.com/office/mac/drawingml/2011/main" xmlns:a14="http://schemas.microsoft.com/office/drawing/2010/main" xmlns:m="http://schemas.openxmlformats.org/officeDocument/2006/math" xmlns="" val="1"/>
-            </a:ext>
-          </a:extLst>
-        </p:spPr>
-        <p:txBody>
-          <a:bodyPr wrap="none" lIns="25400" tIns="25400" rIns="25400" bIns="25400" anchor="ctr">
+            <a:off x="3563655" y="247348"/>
+            <a:ext cx="7273914" cy="369332"/>
+          </a:xfrm>
+          <a:prstGeom prst="rect">
+            <a:avLst/>
+          </a:prstGeom>
+          <a:noFill/>
+        </p:spPr>
+        <p:txBody>
+          <a:bodyPr wrap="none" rtlCol="0">
             <a:spAutoFit/>
           </a:bodyPr>
-          <a:lstStyle>
-            <a:lvl1pPr>
-              <a:defRPr sz="3600"/>
-            </a:lvl1pPr>
-          </a:lstStyle>
-          <a:p>
-            <a:r>
-              <a:rPr sz="1800" dirty="0"/>
-              <a:t>What if we want to look at expression levels of 4 genes?</a:t>
+          <a:lstStyle/>
+          <a:p>
+            <a:r>
+              <a:rPr lang="en-US" dirty="0" err="1"/>
+              <a:t>ggplot</a:t>
+            </a:r>
+            <a:r>
+              <a:rPr lang="en-US" dirty="0"/>
+              <a:t> lets you make many different kinds of plots by using different ‘</a:t>
+            </a:r>
+            <a:r>
+              <a:rPr lang="en-US" dirty="0" err="1"/>
+              <a:t>geoms</a:t>
+            </a:r>
+            <a:r>
+              <a:rPr lang="en-US" dirty="0"/>
+              <a:t>’</a:t>
             </a:r>
           </a:p>
         </p:txBody>
       </p:sp>
     </p:spTree>
+    <p:extLst>
+      <p:ext uri="{BB962C8B-B14F-4D97-AF65-F5344CB8AC3E}">
+        <p14:creationId xmlns:p14="http://schemas.microsoft.com/office/powerpoint/2010/main" val="1698419793"/>
+      </p:ext>
+    </p:extLst>
   </p:cSld>
   <p:clrMapOvr>
     <a:masterClrMapping/>
@@ -5707,7 +5988,7 @@
         </p:nvSpPr>
         <p:spPr>
           <a:xfrm>
-            <a:off x="3105747" y="316171"/>
+            <a:off x="3448320" y="337559"/>
             <a:ext cx="5295360" cy="328295"/>
           </a:xfrm>
           <a:prstGeom prst="rect">
@@ -5739,66 +6020,7 @@
           </a:p>
         </p:txBody>
       </p:sp>
-      <p:pic>
-        <p:nvPicPr>
-          <p:cNvPr id="335" name="Image" descr="Image"/>
-          <p:cNvPicPr>
-            <a:picLocks noChangeAspect="1"/>
-          </p:cNvPicPr>
-          <p:nvPr/>
-        </p:nvPicPr>
-        <p:blipFill>
-          <a:blip r:embed="rId3"/>
-          <a:stretch>
-            <a:fillRect/>
-          </a:stretch>
-        </p:blipFill>
-        <p:spPr>
-          <a:xfrm>
-            <a:off x="3794882" y="2257620"/>
-            <a:ext cx="7979507" cy="414838"/>
-          </a:xfrm>
-          <a:prstGeom prst="rect">
-            <a:avLst/>
-          </a:prstGeom>
-          <a:ln w="12700">
-            <a:miter lim="400000"/>
-          </a:ln>
-        </p:spPr>
-      </p:pic>
-      <p:pic>
-        <p:nvPicPr>
-          <p:cNvPr id="336" name="Image" descr="Image"/>
-          <p:cNvPicPr>
-            <a:picLocks noChangeAspect="1"/>
-          </p:cNvPicPr>
-          <p:nvPr/>
-        </p:nvPicPr>
-        <p:blipFill>
-          <a:blip r:embed="rId4"/>
-          <a:stretch>
-            <a:fillRect/>
-          </a:stretch>
-        </p:blipFill>
-        <p:spPr>
-          <a:xfrm>
-            <a:off x="3541283" y="2870097"/>
-            <a:ext cx="5653199" cy="3572603"/>
-          </a:xfrm>
-          <a:prstGeom prst="rect">
-            <a:avLst/>
-          </a:prstGeom>
-          <a:ln w="12700">
-            <a:miter lim="400000"/>
-          </a:ln>
-        </p:spPr>
-      </p:pic>
     </p:spTree>
-    <p:extLst>
-      <p:ext uri="{BB962C8B-B14F-4D97-AF65-F5344CB8AC3E}">
-        <p14:creationId xmlns:p14="http://schemas.microsoft.com/office/powerpoint/2010/main" val="2696821515"/>
-      </p:ext>
-    </p:extLst>
   </p:cSld>
   <p:clrMapOvr>
     <a:masterClrMapping/>
@@ -5825,22 +6047,22 @@
       </p:grpSpPr>
       <p:pic>
         <p:nvPicPr>
-          <p:cNvPr id="338" name="Image" descr="Image"/>
+          <p:cNvPr id="333" name="Image" descr="Image"/>
           <p:cNvPicPr>
             <a:picLocks noChangeAspect="1"/>
           </p:cNvPicPr>
           <p:nvPr/>
         </p:nvPicPr>
         <p:blipFill>
-          <a:blip r:embed="rId3"/>
+          <a:blip r:embed="rId2"/>
           <a:stretch>
             <a:fillRect/>
           </a:stretch>
         </p:blipFill>
         <p:spPr>
           <a:xfrm>
-            <a:off x="202599" y="2139318"/>
-            <a:ext cx="7412239" cy="1593559"/>
+            <a:off x="548667" y="1956759"/>
+            <a:ext cx="2557080" cy="3752929"/>
           </a:xfrm>
           <a:prstGeom prst="rect">
             <a:avLst/>
@@ -5852,14 +6074,14 @@
       </p:pic>
       <p:sp>
         <p:nvSpPr>
-          <p:cNvPr id="339" name="A little more complicated example - samples from different conditions"/>
+          <p:cNvPr id="334" name="What if we want to look at expression levels of these 4 genes?"/>
           <p:cNvSpPr txBox="1"/>
           <p:nvPr/>
         </p:nvSpPr>
         <p:spPr>
           <a:xfrm>
-            <a:off x="1197886" y="163197"/>
-            <a:ext cx="8978099" cy="420628"/>
+            <a:off x="3105747" y="316171"/>
+            <a:ext cx="5295360" cy="328295"/>
           </a:xfrm>
           <a:prstGeom prst="rect">
             <a:avLst/>
@@ -5879,27 +6101,35 @@
           </a:bodyPr>
           <a:lstStyle>
             <a:lvl1pPr>
-              <a:defRPr sz="4800" b="1"/>
+              <a:defRPr sz="3600"/>
             </a:lvl1pPr>
           </a:lstStyle>
           <a:p>
             <a:r>
-              <a:rPr sz="2400"/>
-              <a:t>A little more complicated example - samples from different conditions</a:t>
-            </a:r>
-          </a:p>
-        </p:txBody>
-      </p:sp>
-      <p:sp>
-        <p:nvSpPr>
-          <p:cNvPr id="340" name="Untreated"/>
-          <p:cNvSpPr txBox="1"/>
-          <p:nvPr/>
-        </p:nvSpPr>
-        <p:spPr>
-          <a:xfrm>
-            <a:off x="2004675" y="1526185"/>
-            <a:ext cx="1355949" cy="420628"/>
+              <a:rPr sz="1800" dirty="0"/>
+              <a:t>What if we want to look at expression levels of 4 genes?</a:t>
+            </a:r>
+          </a:p>
+        </p:txBody>
+      </p:sp>
+      <p:pic>
+        <p:nvPicPr>
+          <p:cNvPr id="335" name="Image" descr="Image"/>
+          <p:cNvPicPr>
+            <a:picLocks noChangeAspect="1"/>
+          </p:cNvPicPr>
+          <p:nvPr/>
+        </p:nvPicPr>
+        <p:blipFill>
+          <a:blip r:embed="rId3"/>
+          <a:stretch>
+            <a:fillRect/>
+          </a:stretch>
+        </p:blipFill>
+        <p:spPr>
+          <a:xfrm>
+            <a:off x="3794882" y="2257620"/>
+            <a:ext cx="7979507" cy="414838"/>
           </a:xfrm>
           <a:prstGeom prst="rect">
             <a:avLst/>
@@ -5907,130 +6137,11 @@
           <a:ln w="12700">
             <a:miter lim="400000"/>
           </a:ln>
-          <a:extLst>
-            <a:ext uri="{C572A759-6A51-4108-AA02-DFA0A04FC94B}">
-              <ma14:wrappingTextBoxFlag xmlns:ma14="http://schemas.microsoft.com/office/mac/drawingml/2011/main" xmlns:a14="http://schemas.microsoft.com/office/drawing/2010/main" xmlns:m="http://schemas.openxmlformats.org/officeDocument/2006/math" xmlns="" val="1"/>
-            </a:ext>
-          </a:extLst>
-        </p:spPr>
-        <p:txBody>
-          <a:bodyPr wrap="none" lIns="25400" tIns="25400" rIns="25400" bIns="25400" anchor="ctr">
-            <a:spAutoFit/>
-          </a:bodyPr>
-          <a:lstStyle>
-            <a:lvl1pPr>
-              <a:defRPr sz="4800" b="1"/>
-            </a:lvl1pPr>
-          </a:lstStyle>
-          <a:p>
-            <a:r>
-              <a:rPr sz="2400"/>
-              <a:t>Untreated</a:t>
-            </a:r>
-          </a:p>
-        </p:txBody>
-      </p:sp>
-      <p:sp>
-        <p:nvSpPr>
-          <p:cNvPr id="341" name="Treated"/>
-          <p:cNvSpPr txBox="1"/>
-          <p:nvPr/>
-        </p:nvSpPr>
-        <p:spPr>
-          <a:xfrm>
-            <a:off x="5376405" y="1526185"/>
-            <a:ext cx="1022459" cy="420628"/>
-          </a:xfrm>
-          <a:prstGeom prst="rect">
-            <a:avLst/>
-          </a:prstGeom>
-          <a:ln w="12700">
-            <a:miter lim="400000"/>
-          </a:ln>
-          <a:extLst>
-            <a:ext uri="{C572A759-6A51-4108-AA02-DFA0A04FC94B}">
-              <ma14:wrappingTextBoxFlag xmlns:ma14="http://schemas.microsoft.com/office/mac/drawingml/2011/main" xmlns:a14="http://schemas.microsoft.com/office/drawing/2010/main" xmlns:m="http://schemas.openxmlformats.org/officeDocument/2006/math" xmlns="" val="1"/>
-            </a:ext>
-          </a:extLst>
-        </p:spPr>
-        <p:txBody>
-          <a:bodyPr wrap="none" lIns="25400" tIns="25400" rIns="25400" bIns="25400" anchor="ctr">
-            <a:spAutoFit/>
-          </a:bodyPr>
-          <a:lstStyle>
-            <a:lvl1pPr>
-              <a:defRPr sz="4800" b="1"/>
-            </a:lvl1pPr>
-          </a:lstStyle>
-          <a:p>
-            <a:r>
-              <a:rPr sz="2400"/>
-              <a:t>Treated</a:t>
-            </a:r>
-          </a:p>
-        </p:txBody>
-      </p:sp>
-      <p:sp>
-        <p:nvSpPr>
-          <p:cNvPr id="342" name="Line"/>
-          <p:cNvSpPr/>
-          <p:nvPr/>
-        </p:nvSpPr>
-        <p:spPr>
-          <a:xfrm>
-            <a:off x="1584692" y="1990499"/>
-            <a:ext cx="2342480" cy="1"/>
-          </a:xfrm>
-          <a:prstGeom prst="line">
-            <a:avLst/>
-          </a:prstGeom>
-          <a:ln w="101600">
-            <a:solidFill>
-              <a:srgbClr val="000000"/>
-            </a:solidFill>
-            <a:miter lim="400000"/>
-          </a:ln>
-        </p:spPr>
-        <p:txBody>
-          <a:bodyPr lIns="25400" tIns="25400" rIns="25400" bIns="25400" anchor="ctr"/>
-          <a:lstStyle/>
-          <a:p>
-            <a:endParaRPr sz="900"/>
-          </a:p>
-        </p:txBody>
-      </p:sp>
-      <p:sp>
-        <p:nvSpPr>
-          <p:cNvPr id="343" name="Line"/>
-          <p:cNvSpPr/>
-          <p:nvPr/>
-        </p:nvSpPr>
-        <p:spPr>
-          <a:xfrm>
-            <a:off x="4778570" y="2040473"/>
-            <a:ext cx="2342480" cy="1"/>
-          </a:xfrm>
-          <a:prstGeom prst="line">
-            <a:avLst/>
-          </a:prstGeom>
-          <a:ln w="101600">
-            <a:solidFill>
-              <a:srgbClr val="000000"/>
-            </a:solidFill>
-            <a:miter lim="400000"/>
-          </a:ln>
-        </p:spPr>
-        <p:txBody>
-          <a:bodyPr lIns="25400" tIns="25400" rIns="25400" bIns="25400" anchor="ctr"/>
-          <a:lstStyle/>
-          <a:p>
-            <a:endParaRPr sz="900"/>
-          </a:p>
-        </p:txBody>
-      </p:sp>
+        </p:spPr>
+      </p:pic>
       <p:pic>
         <p:nvPicPr>
-          <p:cNvPr id="344" name="Image" descr="Image"/>
+          <p:cNvPr id="336" name="Image" descr="Image"/>
           <p:cNvPicPr>
             <a:picLocks noChangeAspect="1"/>
           </p:cNvPicPr>
@@ -6044,8 +6155,8 @@
         </p:blipFill>
         <p:spPr>
           <a:xfrm>
-            <a:off x="8169033" y="2142844"/>
-            <a:ext cx="3510206" cy="3194288"/>
+            <a:off x="3541283" y="2870097"/>
+            <a:ext cx="5653199" cy="3572603"/>
           </a:xfrm>
           <a:prstGeom prst="rect">
             <a:avLst/>
@@ -6055,87 +6166,12 @@
           </a:ln>
         </p:spPr>
       </p:pic>
-      <p:sp>
-        <p:nvSpPr>
-          <p:cNvPr id="345" name="Wide"/>
-          <p:cNvSpPr txBox="1"/>
-          <p:nvPr/>
-        </p:nvSpPr>
-        <p:spPr>
-          <a:xfrm>
-            <a:off x="3771499" y="3835594"/>
-            <a:ext cx="726161" cy="420628"/>
-          </a:xfrm>
-          <a:prstGeom prst="rect">
-            <a:avLst/>
-          </a:prstGeom>
-          <a:ln w="12700">
-            <a:miter lim="400000"/>
-          </a:ln>
-          <a:extLst>
-            <a:ext uri="{C572A759-6A51-4108-AA02-DFA0A04FC94B}">
-              <ma14:wrappingTextBoxFlag xmlns:ma14="http://schemas.microsoft.com/office/mac/drawingml/2011/main" xmlns:a14="http://schemas.microsoft.com/office/drawing/2010/main" xmlns:m="http://schemas.openxmlformats.org/officeDocument/2006/math" xmlns="" val="1"/>
-            </a:ext>
-          </a:extLst>
-        </p:spPr>
-        <p:txBody>
-          <a:bodyPr wrap="none" lIns="25400" tIns="25400" rIns="25400" bIns="25400" anchor="ctr">
-            <a:spAutoFit/>
-          </a:bodyPr>
-          <a:lstStyle>
-            <a:lvl1pPr>
-              <a:defRPr sz="4800" b="1"/>
-            </a:lvl1pPr>
-          </a:lstStyle>
-          <a:p>
-            <a:r>
-              <a:rPr sz="2400"/>
-              <a:t>Wide</a:t>
-            </a:r>
-          </a:p>
-        </p:txBody>
-      </p:sp>
-      <p:sp>
-        <p:nvSpPr>
-          <p:cNvPr id="346" name="Long"/>
-          <p:cNvSpPr txBox="1"/>
-          <p:nvPr/>
-        </p:nvSpPr>
-        <p:spPr>
-          <a:xfrm>
-            <a:off x="9528582" y="5396883"/>
-            <a:ext cx="657231" cy="420628"/>
-          </a:xfrm>
-          <a:prstGeom prst="rect">
-            <a:avLst/>
-          </a:prstGeom>
-          <a:ln w="12700">
-            <a:miter lim="400000"/>
-          </a:ln>
-          <a:extLst>
-            <a:ext uri="{C572A759-6A51-4108-AA02-DFA0A04FC94B}">
-              <ma14:wrappingTextBoxFlag xmlns:ma14="http://schemas.microsoft.com/office/mac/drawingml/2011/main" xmlns:a14="http://schemas.microsoft.com/office/drawing/2010/main" xmlns:m="http://schemas.openxmlformats.org/officeDocument/2006/math" xmlns="" val="1"/>
-            </a:ext>
-          </a:extLst>
-        </p:spPr>
-        <p:txBody>
-          <a:bodyPr wrap="none" lIns="25400" tIns="25400" rIns="25400" bIns="25400" anchor="ctr">
-            <a:spAutoFit/>
-          </a:bodyPr>
-          <a:lstStyle>
-            <a:lvl1pPr>
-              <a:defRPr sz="4800" b="1"/>
-            </a:lvl1pPr>
-          </a:lstStyle>
-          <a:p>
-            <a:r>
-              <a:rPr sz="2400"/>
-              <a:t>Long</a:t>
-            </a:r>
-          </a:p>
-        </p:txBody>
-      </p:sp>
     </p:spTree>
+    <p:extLst>
+      <p:ext uri="{BB962C8B-B14F-4D97-AF65-F5344CB8AC3E}">
+        <p14:creationId xmlns:p14="http://schemas.microsoft.com/office/powerpoint/2010/main" val="2696821515"/>
+      </p:ext>
+    </p:extLst>
   </p:cSld>
   <p:clrMapOvr>
     <a:masterClrMapping/>
@@ -6162,7 +6198,7 @@
       </p:grpSpPr>
       <p:pic>
         <p:nvPicPr>
-          <p:cNvPr id="350" name="Image" descr="Image"/>
+          <p:cNvPr id="338" name="Image" descr="Image"/>
           <p:cNvPicPr>
             <a:picLocks noChangeAspect="1"/>
           </p:cNvPicPr>
@@ -6176,8 +6212,8 @@
         </p:blipFill>
         <p:spPr>
           <a:xfrm>
-            <a:off x="6672906" y="3124151"/>
-            <a:ext cx="5067520" cy="3091072"/>
+            <a:off x="202599" y="2139318"/>
+            <a:ext cx="7412239" cy="1593559"/>
           </a:xfrm>
           <a:prstGeom prst="rect">
             <a:avLst/>
@@ -6187,36 +6223,9 @@
           </a:ln>
         </p:spPr>
       </p:pic>
-      <p:pic>
-        <p:nvPicPr>
-          <p:cNvPr id="351" name="Image" descr="Image"/>
-          <p:cNvPicPr>
-            <a:picLocks noChangeAspect="1"/>
-          </p:cNvPicPr>
-          <p:nvPr/>
-        </p:nvPicPr>
-        <p:blipFill>
-          <a:blip r:embed="rId4"/>
-          <a:stretch>
-            <a:fillRect/>
-          </a:stretch>
-        </p:blipFill>
-        <p:spPr>
-          <a:xfrm>
-            <a:off x="889780" y="1831857"/>
-            <a:ext cx="3510206" cy="3194287"/>
-          </a:xfrm>
-          <a:prstGeom prst="rect">
-            <a:avLst/>
-          </a:prstGeom>
-          <a:ln w="12700">
-            <a:miter lim="400000"/>
-          </a:ln>
-        </p:spPr>
-      </p:pic>
-      <p:sp>
-        <p:nvSpPr>
-          <p:cNvPr id="352" name="A little more complicated example - samples from different conditions"/>
+      <p:sp>
+        <p:nvSpPr>
+          <p:cNvPr id="339" name="A little more complicated example - samples from different conditions"/>
           <p:cNvSpPr txBox="1"/>
           <p:nvPr/>
         </p:nvSpPr>
@@ -6233,7 +6242,7 @@
           </a:ln>
           <a:extLst>
             <a:ext uri="{C572A759-6A51-4108-AA02-DFA0A04FC94B}">
-              <ma14:wrappingTextBoxFlag xmlns:ma14="http://schemas.microsoft.com/office/mac/drawingml/2011/main" xmlns:a14="http://schemas.microsoft.com/office/drawing/2010/main" xmlns:m="http://schemas.openxmlformats.org/officeDocument/2006/math" xmlns="" val="1"/>
+              <ma14:wrappingTextBoxFlag xmlns="" xmlns:m="http://schemas.openxmlformats.org/officeDocument/2006/math" xmlns:a14="http://schemas.microsoft.com/office/drawing/2010/main" xmlns:ma14="http://schemas.microsoft.com/office/mac/drawingml/2011/main" val="1"/>
             </a:ext>
           </a:extLst>
         </p:spPr>
@@ -6254,24 +6263,162 @@
           </a:p>
         </p:txBody>
       </p:sp>
+      <p:sp>
+        <p:nvSpPr>
+          <p:cNvPr id="340" name="Untreated"/>
+          <p:cNvSpPr txBox="1"/>
+          <p:nvPr/>
+        </p:nvSpPr>
+        <p:spPr>
+          <a:xfrm>
+            <a:off x="2004675" y="1526185"/>
+            <a:ext cx="1355949" cy="420628"/>
+          </a:xfrm>
+          <a:prstGeom prst="rect">
+            <a:avLst/>
+          </a:prstGeom>
+          <a:ln w="12700">
+            <a:miter lim="400000"/>
+          </a:ln>
+          <a:extLst>
+            <a:ext uri="{C572A759-6A51-4108-AA02-DFA0A04FC94B}">
+              <ma14:wrappingTextBoxFlag xmlns="" xmlns:m="http://schemas.openxmlformats.org/officeDocument/2006/math" xmlns:a14="http://schemas.microsoft.com/office/drawing/2010/main" xmlns:ma14="http://schemas.microsoft.com/office/mac/drawingml/2011/main" val="1"/>
+            </a:ext>
+          </a:extLst>
+        </p:spPr>
+        <p:txBody>
+          <a:bodyPr wrap="none" lIns="25400" tIns="25400" rIns="25400" bIns="25400" anchor="ctr">
+            <a:spAutoFit/>
+          </a:bodyPr>
+          <a:lstStyle>
+            <a:lvl1pPr>
+              <a:defRPr sz="4800" b="1"/>
+            </a:lvl1pPr>
+          </a:lstStyle>
+          <a:p>
+            <a:r>
+              <a:rPr sz="2400"/>
+              <a:t>Untreated</a:t>
+            </a:r>
+          </a:p>
+        </p:txBody>
+      </p:sp>
+      <p:sp>
+        <p:nvSpPr>
+          <p:cNvPr id="341" name="Treated"/>
+          <p:cNvSpPr txBox="1"/>
+          <p:nvPr/>
+        </p:nvSpPr>
+        <p:spPr>
+          <a:xfrm>
+            <a:off x="5376405" y="1526185"/>
+            <a:ext cx="1022459" cy="420628"/>
+          </a:xfrm>
+          <a:prstGeom prst="rect">
+            <a:avLst/>
+          </a:prstGeom>
+          <a:ln w="12700">
+            <a:miter lim="400000"/>
+          </a:ln>
+          <a:extLst>
+            <a:ext uri="{C572A759-6A51-4108-AA02-DFA0A04FC94B}">
+              <ma14:wrappingTextBoxFlag xmlns="" xmlns:m="http://schemas.openxmlformats.org/officeDocument/2006/math" xmlns:a14="http://schemas.microsoft.com/office/drawing/2010/main" xmlns:ma14="http://schemas.microsoft.com/office/mac/drawingml/2011/main" val="1"/>
+            </a:ext>
+          </a:extLst>
+        </p:spPr>
+        <p:txBody>
+          <a:bodyPr wrap="none" lIns="25400" tIns="25400" rIns="25400" bIns="25400" anchor="ctr">
+            <a:spAutoFit/>
+          </a:bodyPr>
+          <a:lstStyle>
+            <a:lvl1pPr>
+              <a:defRPr sz="4800" b="1"/>
+            </a:lvl1pPr>
+          </a:lstStyle>
+          <a:p>
+            <a:r>
+              <a:rPr sz="2400"/>
+              <a:t>Treated</a:t>
+            </a:r>
+          </a:p>
+        </p:txBody>
+      </p:sp>
+      <p:sp>
+        <p:nvSpPr>
+          <p:cNvPr id="342" name="Line"/>
+          <p:cNvSpPr/>
+          <p:nvPr/>
+        </p:nvSpPr>
+        <p:spPr>
+          <a:xfrm>
+            <a:off x="1584692" y="1990499"/>
+            <a:ext cx="2342480" cy="1"/>
+          </a:xfrm>
+          <a:prstGeom prst="line">
+            <a:avLst/>
+          </a:prstGeom>
+          <a:ln w="101600">
+            <a:solidFill>
+              <a:srgbClr val="000000"/>
+            </a:solidFill>
+            <a:miter lim="400000"/>
+          </a:ln>
+        </p:spPr>
+        <p:txBody>
+          <a:bodyPr lIns="25400" tIns="25400" rIns="25400" bIns="25400" anchor="ctr"/>
+          <a:lstStyle/>
+          <a:p>
+            <a:endParaRPr sz="900"/>
+          </a:p>
+        </p:txBody>
+      </p:sp>
+      <p:sp>
+        <p:nvSpPr>
+          <p:cNvPr id="343" name="Line"/>
+          <p:cNvSpPr/>
+          <p:nvPr/>
+        </p:nvSpPr>
+        <p:spPr>
+          <a:xfrm>
+            <a:off x="4778570" y="2040473"/>
+            <a:ext cx="2342480" cy="1"/>
+          </a:xfrm>
+          <a:prstGeom prst="line">
+            <a:avLst/>
+          </a:prstGeom>
+          <a:ln w="101600">
+            <a:solidFill>
+              <a:srgbClr val="000000"/>
+            </a:solidFill>
+            <a:miter lim="400000"/>
+          </a:ln>
+        </p:spPr>
+        <p:txBody>
+          <a:bodyPr lIns="25400" tIns="25400" rIns="25400" bIns="25400" anchor="ctr"/>
+          <a:lstStyle/>
+          <a:p>
+            <a:endParaRPr sz="900"/>
+          </a:p>
+        </p:txBody>
+      </p:sp>
       <p:pic>
         <p:nvPicPr>
-          <p:cNvPr id="353" name="Image" descr="Image"/>
+          <p:cNvPr id="344" name="Image" descr="Image"/>
           <p:cNvPicPr>
             <a:picLocks noChangeAspect="1"/>
           </p:cNvPicPr>
           <p:nvPr/>
         </p:nvPicPr>
         <p:blipFill>
-          <a:blip r:embed="rId5"/>
+          <a:blip r:embed="rId4"/>
           <a:stretch>
             <a:fillRect/>
           </a:stretch>
         </p:blipFill>
         <p:spPr>
           <a:xfrm>
-            <a:off x="5312266" y="1746648"/>
-            <a:ext cx="5475550" cy="882045"/>
+            <a:off x="8169033" y="2142844"/>
+            <a:ext cx="3510206" cy="3194288"/>
           </a:xfrm>
           <a:prstGeom prst="rect">
             <a:avLst/>
@@ -6281,6 +6428,86 @@
           </a:ln>
         </p:spPr>
       </p:pic>
+      <p:sp>
+        <p:nvSpPr>
+          <p:cNvPr id="345" name="Wide"/>
+          <p:cNvSpPr txBox="1"/>
+          <p:nvPr/>
+        </p:nvSpPr>
+        <p:spPr>
+          <a:xfrm>
+            <a:off x="3771499" y="3835594"/>
+            <a:ext cx="726161" cy="420628"/>
+          </a:xfrm>
+          <a:prstGeom prst="rect">
+            <a:avLst/>
+          </a:prstGeom>
+          <a:ln w="12700">
+            <a:miter lim="400000"/>
+          </a:ln>
+          <a:extLst>
+            <a:ext uri="{C572A759-6A51-4108-AA02-DFA0A04FC94B}">
+              <ma14:wrappingTextBoxFlag xmlns="" xmlns:m="http://schemas.openxmlformats.org/officeDocument/2006/math" xmlns:a14="http://schemas.microsoft.com/office/drawing/2010/main" xmlns:ma14="http://schemas.microsoft.com/office/mac/drawingml/2011/main" val="1"/>
+            </a:ext>
+          </a:extLst>
+        </p:spPr>
+        <p:txBody>
+          <a:bodyPr wrap="none" lIns="25400" tIns="25400" rIns="25400" bIns="25400" anchor="ctr">
+            <a:spAutoFit/>
+          </a:bodyPr>
+          <a:lstStyle>
+            <a:lvl1pPr>
+              <a:defRPr sz="4800" b="1"/>
+            </a:lvl1pPr>
+          </a:lstStyle>
+          <a:p>
+            <a:r>
+              <a:rPr sz="2400"/>
+              <a:t>Wide</a:t>
+            </a:r>
+          </a:p>
+        </p:txBody>
+      </p:sp>
+      <p:sp>
+        <p:nvSpPr>
+          <p:cNvPr id="346" name="Long"/>
+          <p:cNvSpPr txBox="1"/>
+          <p:nvPr/>
+        </p:nvSpPr>
+        <p:spPr>
+          <a:xfrm>
+            <a:off x="9528582" y="5396883"/>
+            <a:ext cx="657231" cy="420628"/>
+          </a:xfrm>
+          <a:prstGeom prst="rect">
+            <a:avLst/>
+          </a:prstGeom>
+          <a:ln w="12700">
+            <a:miter lim="400000"/>
+          </a:ln>
+          <a:extLst>
+            <a:ext uri="{C572A759-6A51-4108-AA02-DFA0A04FC94B}">
+              <ma14:wrappingTextBoxFlag xmlns="" xmlns:m="http://schemas.openxmlformats.org/officeDocument/2006/math" xmlns:a14="http://schemas.microsoft.com/office/drawing/2010/main" xmlns:ma14="http://schemas.microsoft.com/office/mac/drawingml/2011/main" val="1"/>
+            </a:ext>
+          </a:extLst>
+        </p:spPr>
+        <p:txBody>
+          <a:bodyPr wrap="none" lIns="25400" tIns="25400" rIns="25400" bIns="25400" anchor="ctr">
+            <a:spAutoFit/>
+          </a:bodyPr>
+          <a:lstStyle>
+            <a:lvl1pPr>
+              <a:defRPr sz="4800" b="1"/>
+            </a:lvl1pPr>
+          </a:lstStyle>
+          <a:p>
+            <a:r>
+              <a:rPr sz="2400"/>
+              <a:t>Long</a:t>
+            </a:r>
+          </a:p>
+        </p:txBody>
+      </p:sp>
     </p:spTree>
   </p:cSld>
   <p:clrMapOvr>
@@ -6308,7 +6535,7 @@
       </p:grpSpPr>
       <p:pic>
         <p:nvPicPr>
-          <p:cNvPr id="357" name="Image" descr="Image"/>
+          <p:cNvPr id="350" name="Image" descr="Image"/>
           <p:cNvPicPr>
             <a:picLocks noChangeAspect="1"/>
           </p:cNvPicPr>
@@ -6322,8 +6549,8 @@
         </p:blipFill>
         <p:spPr>
           <a:xfrm>
-            <a:off x="889780" y="1831857"/>
-            <a:ext cx="3510206" cy="3194287"/>
+            <a:off x="6672906" y="3124151"/>
+            <a:ext cx="5067520" cy="3091072"/>
           </a:xfrm>
           <a:prstGeom prst="rect">
             <a:avLst/>
@@ -6333,9 +6560,36 @@
           </a:ln>
         </p:spPr>
       </p:pic>
-      <p:sp>
-        <p:nvSpPr>
-          <p:cNvPr id="358" name="A little more complicated example - samples from different conditions"/>
+      <p:pic>
+        <p:nvPicPr>
+          <p:cNvPr id="351" name="Image" descr="Image"/>
+          <p:cNvPicPr>
+            <a:picLocks noChangeAspect="1"/>
+          </p:cNvPicPr>
+          <p:nvPr/>
+        </p:nvPicPr>
+        <p:blipFill>
+          <a:blip r:embed="rId4"/>
+          <a:stretch>
+            <a:fillRect/>
+          </a:stretch>
+        </p:blipFill>
+        <p:spPr>
+          <a:xfrm>
+            <a:off x="889780" y="1831857"/>
+            <a:ext cx="3510206" cy="3194287"/>
+          </a:xfrm>
+          <a:prstGeom prst="rect">
+            <a:avLst/>
+          </a:prstGeom>
+          <a:ln w="12700">
+            <a:miter lim="400000"/>
+          </a:ln>
+        </p:spPr>
+      </p:pic>
+      <p:sp>
+        <p:nvSpPr>
+          <p:cNvPr id="352" name="A little more complicated example - samples from different conditions"/>
           <p:cNvSpPr txBox="1"/>
           <p:nvPr/>
         </p:nvSpPr>
@@ -6352,7 +6606,7 @@
           </a:ln>
           <a:extLst>
             <a:ext uri="{C572A759-6A51-4108-AA02-DFA0A04FC94B}">
-              <ma14:wrappingTextBoxFlag xmlns:ma14="http://schemas.microsoft.com/office/mac/drawingml/2011/main" xmlns:a14="http://schemas.microsoft.com/office/drawing/2010/main" xmlns:m="http://schemas.openxmlformats.org/officeDocument/2006/math" xmlns="" val="1"/>
+              <ma14:wrappingTextBoxFlag xmlns="" xmlns:m="http://schemas.openxmlformats.org/officeDocument/2006/math" xmlns:a14="http://schemas.microsoft.com/office/drawing/2010/main" xmlns:ma14="http://schemas.microsoft.com/office/mac/drawingml/2011/main" val="1"/>
             </a:ext>
           </a:extLst>
         </p:spPr>
@@ -6375,34 +6629,7 @@
       </p:sp>
       <p:pic>
         <p:nvPicPr>
-          <p:cNvPr id="359" name="Image" descr="Image"/>
-          <p:cNvPicPr>
-            <a:picLocks noChangeAspect="1"/>
-          </p:cNvPicPr>
-          <p:nvPr/>
-        </p:nvPicPr>
-        <p:blipFill>
-          <a:blip r:embed="rId4"/>
-          <a:stretch>
-            <a:fillRect/>
-          </a:stretch>
-        </p:blipFill>
-        <p:spPr>
-          <a:xfrm>
-            <a:off x="4859685" y="3045933"/>
-            <a:ext cx="6626289" cy="3194287"/>
-          </a:xfrm>
-          <a:prstGeom prst="rect">
-            <a:avLst/>
-          </a:prstGeom>
-          <a:ln w="12700">
-            <a:miter lim="400000"/>
-          </a:ln>
-        </p:spPr>
-      </p:pic>
-      <p:pic>
-        <p:nvPicPr>
-          <p:cNvPr id="360" name="Image" descr="Image"/>
+          <p:cNvPr id="353" name="Image" descr="Image"/>
           <p:cNvPicPr>
             <a:picLocks noChangeAspect="1"/>
           </p:cNvPicPr>
@@ -6416,8 +6643,8 @@
         </p:blipFill>
         <p:spPr>
           <a:xfrm>
-            <a:off x="4602042" y="1695828"/>
-            <a:ext cx="7141574" cy="828009"/>
+            <a:off x="5312266" y="1746648"/>
+            <a:ext cx="5475550" cy="882045"/>
           </a:xfrm>
           <a:prstGeom prst="rect">
             <a:avLst/>
@@ -6452,88 +6679,9 @@
           <a:chExt cx="0" cy="0"/>
         </a:xfrm>
       </p:grpSpPr>
-      <p:sp>
-        <p:nvSpPr>
-          <p:cNvPr id="2" name="TextBox 1">
-            <a:extLst>
-              <a:ext uri="{FF2B5EF4-FFF2-40B4-BE49-F238E27FC236}">
-                <a16:creationId xmlns:a16="http://schemas.microsoft.com/office/drawing/2014/main" id="{EE23F229-A1B6-0446-00FC-B1B1D54C5CFE}"/>
-              </a:ext>
-            </a:extLst>
-          </p:cNvPr>
-          <p:cNvSpPr txBox="1"/>
-          <p:nvPr/>
-        </p:nvSpPr>
-        <p:spPr>
-          <a:xfrm>
-            <a:off x="4421606" y="150395"/>
-            <a:ext cx="2794932" cy="369332"/>
-          </a:xfrm>
-          <a:prstGeom prst="rect">
-            <a:avLst/>
-          </a:prstGeom>
-          <a:noFill/>
-        </p:spPr>
-        <p:txBody>
-          <a:bodyPr wrap="none" rtlCol="0">
-            <a:spAutoFit/>
-          </a:bodyPr>
-          <a:lstStyle/>
-          <a:p>
-            <a:r>
-              <a:rPr lang="en-US" dirty="0"/>
-              <a:t>There are many </a:t>
-            </a:r>
-            <a:r>
-              <a:rPr lang="en-US" dirty="0" err="1"/>
-              <a:t>geom</a:t>
-            </a:r>
-            <a:r>
-              <a:rPr lang="en-US" dirty="0"/>
-              <a:t> types</a:t>
-            </a:r>
-          </a:p>
-        </p:txBody>
-      </p:sp>
       <p:pic>
         <p:nvPicPr>
-          <p:cNvPr id="3" name="Picture 2">
-            <a:extLst>
-              <a:ext uri="{FF2B5EF4-FFF2-40B4-BE49-F238E27FC236}">
-                <a16:creationId xmlns:a16="http://schemas.microsoft.com/office/drawing/2014/main" id="{739D2904-7AF1-B407-63CF-27FC539ADD4D}"/>
-              </a:ext>
-            </a:extLst>
-          </p:cNvPr>
-          <p:cNvPicPr>
-            <a:picLocks noChangeAspect="1"/>
-          </p:cNvPicPr>
-          <p:nvPr/>
-        </p:nvPicPr>
-        <p:blipFill>
-          <a:blip r:embed="rId2"/>
-          <a:stretch>
-            <a:fillRect/>
-          </a:stretch>
-        </p:blipFill>
-        <p:spPr>
-          <a:xfrm>
-            <a:off x="1292617" y="731520"/>
-            <a:ext cx="3611018" cy="5831058"/>
-          </a:xfrm>
-          <a:prstGeom prst="rect">
-            <a:avLst/>
-          </a:prstGeom>
-        </p:spPr>
-      </p:pic>
-      <p:pic>
-        <p:nvPicPr>
-          <p:cNvPr id="4" name="Picture 3">
-            <a:extLst>
-              <a:ext uri="{FF2B5EF4-FFF2-40B4-BE49-F238E27FC236}">
-                <a16:creationId xmlns:a16="http://schemas.microsoft.com/office/drawing/2014/main" id="{D0F3C31B-97A0-2A58-E665-EACC45DD2F57}"/>
-              </a:ext>
-            </a:extLst>
-          </p:cNvPr>
+          <p:cNvPr id="357" name="Image" descr="Image"/>
           <p:cNvPicPr>
             <a:picLocks noChangeAspect="1"/>
           </p:cNvPicPr>
@@ -6547,55 +6695,112 @@
         </p:blipFill>
         <p:spPr>
           <a:xfrm>
-            <a:off x="5868335" y="731520"/>
-            <a:ext cx="4007185" cy="5877546"/>
-          </a:xfrm>
-          <a:prstGeom prst="rect">
-            <a:avLst/>
-          </a:prstGeom>
+            <a:off x="889780" y="1831857"/>
+            <a:ext cx="3510206" cy="3194287"/>
+          </a:xfrm>
+          <a:prstGeom prst="rect">
+            <a:avLst/>
+          </a:prstGeom>
+          <a:ln w="12700">
+            <a:miter lim="400000"/>
+          </a:ln>
         </p:spPr>
       </p:pic>
       <p:sp>
         <p:nvSpPr>
-          <p:cNvPr id="6" name="TextBox 5">
-            <a:extLst>
-              <a:ext uri="{FF2B5EF4-FFF2-40B4-BE49-F238E27FC236}">
-                <a16:creationId xmlns:a16="http://schemas.microsoft.com/office/drawing/2014/main" id="{F0586E30-DD1D-65EA-CA6D-B6B67F2A1887}"/>
-              </a:ext>
-            </a:extLst>
-          </p:cNvPr>
+          <p:cNvPr id="358" name="A little more complicated example - samples from different conditions"/>
           <p:cNvSpPr txBox="1"/>
           <p:nvPr/>
         </p:nvSpPr>
         <p:spPr>
           <a:xfrm>
-            <a:off x="105693" y="158234"/>
-            <a:ext cx="4051218" cy="307777"/>
-          </a:xfrm>
-          <a:prstGeom prst="rect">
-            <a:avLst/>
-          </a:prstGeom>
-          <a:noFill/>
-        </p:spPr>
-        <p:txBody>
-          <a:bodyPr wrap="square">
+            <a:off x="1197886" y="163197"/>
+            <a:ext cx="8978099" cy="420628"/>
+          </a:xfrm>
+          <a:prstGeom prst="rect">
+            <a:avLst/>
+          </a:prstGeom>
+          <a:ln w="12700">
+            <a:miter lim="400000"/>
+          </a:ln>
+          <a:extLst>
+            <a:ext uri="{C572A759-6A51-4108-AA02-DFA0A04FC94B}">
+              <ma14:wrappingTextBoxFlag xmlns="" xmlns:m="http://schemas.openxmlformats.org/officeDocument/2006/math" xmlns:a14="http://schemas.microsoft.com/office/drawing/2010/main" xmlns:ma14="http://schemas.microsoft.com/office/mac/drawingml/2011/main" val="1"/>
+            </a:ext>
+          </a:extLst>
+        </p:spPr>
+        <p:txBody>
+          <a:bodyPr wrap="none" lIns="25400" tIns="25400" rIns="25400" bIns="25400" anchor="ctr">
             <a:spAutoFit/>
           </a:bodyPr>
-          <a:lstStyle/>
-          <a:p>
-            <a:r>
-              <a:rPr lang="en-US" sz="1400" dirty="0"/>
-              <a:t>https://ggplot2.tidyverse.org/reference/</a:t>
-            </a:r>
-          </a:p>
-        </p:txBody>
-      </p:sp>
+          <a:lstStyle>
+            <a:lvl1pPr>
+              <a:defRPr sz="4800" b="1"/>
+            </a:lvl1pPr>
+          </a:lstStyle>
+          <a:p>
+            <a:r>
+              <a:rPr sz="2400"/>
+              <a:t>A little more complicated example - samples from different conditions</a:t>
+            </a:r>
+          </a:p>
+        </p:txBody>
+      </p:sp>
+      <p:pic>
+        <p:nvPicPr>
+          <p:cNvPr id="359" name="Image" descr="Image"/>
+          <p:cNvPicPr>
+            <a:picLocks noChangeAspect="1"/>
+          </p:cNvPicPr>
+          <p:nvPr/>
+        </p:nvPicPr>
+        <p:blipFill>
+          <a:blip r:embed="rId4"/>
+          <a:stretch>
+            <a:fillRect/>
+          </a:stretch>
+        </p:blipFill>
+        <p:spPr>
+          <a:xfrm>
+            <a:off x="4859685" y="3045933"/>
+            <a:ext cx="6626289" cy="3194287"/>
+          </a:xfrm>
+          <a:prstGeom prst="rect">
+            <a:avLst/>
+          </a:prstGeom>
+          <a:ln w="12700">
+            <a:miter lim="400000"/>
+          </a:ln>
+        </p:spPr>
+      </p:pic>
+      <p:pic>
+        <p:nvPicPr>
+          <p:cNvPr id="360" name="Image" descr="Image"/>
+          <p:cNvPicPr>
+            <a:picLocks noChangeAspect="1"/>
+          </p:cNvPicPr>
+          <p:nvPr/>
+        </p:nvPicPr>
+        <p:blipFill>
+          <a:blip r:embed="rId5"/>
+          <a:stretch>
+            <a:fillRect/>
+          </a:stretch>
+        </p:blipFill>
+        <p:spPr>
+          <a:xfrm>
+            <a:off x="4602042" y="1695828"/>
+            <a:ext cx="7141574" cy="828009"/>
+          </a:xfrm>
+          <a:prstGeom prst="rect">
+            <a:avLst/>
+          </a:prstGeom>
+          <a:ln w="12700">
+            <a:miter lim="400000"/>
+          </a:ln>
+        </p:spPr>
+      </p:pic>
     </p:spTree>
-    <p:extLst>
-      <p:ext uri="{BB962C8B-B14F-4D97-AF65-F5344CB8AC3E}">
-        <p14:creationId xmlns:p14="http://schemas.microsoft.com/office/powerpoint/2010/main" val="3139845781"/>
-      </p:ext>
-    </p:extLst>
   </p:cSld>
   <p:clrMapOvr>
     <a:masterClrMapping/>
@@ -6639,7 +6844,7 @@
           </a:ln>
           <a:extLst>
             <a:ext uri="{C572A759-6A51-4108-AA02-DFA0A04FC94B}">
-              <ma14:wrappingTextBoxFlag xmlns:ma14="http://schemas.microsoft.com/office/mac/drawingml/2011/main" xmlns:a14="http://schemas.microsoft.com/office/drawing/2010/main" xmlns:m="http://schemas.openxmlformats.org/officeDocument/2006/math" xmlns="" val="1"/>
+              <ma14:wrappingTextBoxFlag xmlns="" xmlns:m="http://schemas.openxmlformats.org/officeDocument/2006/math" xmlns:a14="http://schemas.microsoft.com/office/drawing/2010/main" xmlns:ma14="http://schemas.microsoft.com/office/mac/drawingml/2011/main" val="1"/>
             </a:ext>
           </a:extLst>
         </p:spPr>
@@ -6665,7 +6870,7 @@
         </p:nvSpPr>
         <p:spPr>
           <a:xfrm>
-            <a:off x="2170887" y="1184653"/>
+            <a:off x="2170887" y="1204532"/>
             <a:ext cx="7850226" cy="974626"/>
           </a:xfrm>
           <a:prstGeom prst="rect">
@@ -6676,7 +6881,7 @@
           </a:ln>
           <a:extLst>
             <a:ext uri="{C572A759-6A51-4108-AA02-DFA0A04FC94B}">
-              <ma14:wrappingTextBoxFlag xmlns:ma14="http://schemas.microsoft.com/office/mac/drawingml/2011/main" xmlns:a14="http://schemas.microsoft.com/office/drawing/2010/main" xmlns:m="http://schemas.openxmlformats.org/officeDocument/2006/math" xmlns="" val="1"/>
+              <ma14:wrappingTextBoxFlag xmlns="" xmlns:m="http://schemas.openxmlformats.org/officeDocument/2006/math" xmlns:a14="http://schemas.microsoft.com/office/drawing/2010/main" xmlns:ma14="http://schemas.microsoft.com/office/mac/drawingml/2011/main" val="1"/>
             </a:ext>
           </a:extLst>
         </p:spPr>
@@ -6817,7 +7022,7 @@
           <p:cNvPr id="2" name="TextBox 1">
             <a:extLst>
               <a:ext uri="{FF2B5EF4-FFF2-40B4-BE49-F238E27FC236}">
-                <a16:creationId xmlns:a16="http://schemas.microsoft.com/office/drawing/2014/main" id="{A819696E-90FA-20E5-DEDA-9D8EF88EF437}"/>
+                <a16:creationId xmlns:a16="http://schemas.microsoft.com/office/drawing/2014/main" id="{EE23F229-A1B6-0446-00FC-B1B1D54C5CFE}"/>
               </a:ext>
             </a:extLst>
           </p:cNvPr>
@@ -6826,8 +7031,8 @@
         </p:nvSpPr>
         <p:spPr>
           <a:xfrm>
-            <a:off x="4816257" y="413359"/>
-            <a:ext cx="5423770" cy="369332"/>
+            <a:off x="4421606" y="150395"/>
+            <a:ext cx="2794932" cy="369332"/>
           </a:xfrm>
           <a:prstGeom prst="rect">
             <a:avLst/>
@@ -6835,14 +7040,22 @@
           <a:noFill/>
         </p:spPr>
         <p:txBody>
-          <a:bodyPr wrap="square" rtlCol="0">
+          <a:bodyPr wrap="none" rtlCol="0">
             <a:spAutoFit/>
           </a:bodyPr>
           <a:lstStyle/>
           <a:p>
             <a:r>
               <a:rPr lang="en-US" dirty="0"/>
-              <a:t>Adding to plots</a:t>
+              <a:t>There are many </a:t>
+            </a:r>
+            <a:r>
+              <a:rPr lang="en-US" dirty="0" err="1"/>
+              <a:t>geom</a:t>
+            </a:r>
+            <a:r>
+              <a:rPr lang="en-US" dirty="0"/>
+              <a:t> types</a:t>
             </a:r>
           </a:p>
         </p:txBody>
@@ -6852,7 +7065,7 @@
           <p:cNvPr id="3" name="Picture 2">
             <a:extLst>
               <a:ext uri="{FF2B5EF4-FFF2-40B4-BE49-F238E27FC236}">
-                <a16:creationId xmlns:a16="http://schemas.microsoft.com/office/drawing/2014/main" id="{3AEB7DA1-01E0-57D5-BCCD-A3B23DEC2DDD}"/>
+                <a16:creationId xmlns:a16="http://schemas.microsoft.com/office/drawing/2014/main" id="{739D2904-7AF1-B407-63CF-27FC539ADD4D}"/>
               </a:ext>
             </a:extLst>
           </p:cNvPr>
@@ -6869,8 +7082,8 @@
         </p:blipFill>
         <p:spPr>
           <a:xfrm>
-            <a:off x="860730" y="1507298"/>
-            <a:ext cx="4481621" cy="632699"/>
+            <a:off x="1292617" y="731520"/>
+            <a:ext cx="3611018" cy="5831058"/>
           </a:xfrm>
           <a:prstGeom prst="rect">
             <a:avLst/>
@@ -6882,7 +7095,7 @@
           <p:cNvPr id="4" name="Picture 3">
             <a:extLst>
               <a:ext uri="{FF2B5EF4-FFF2-40B4-BE49-F238E27FC236}">
-                <a16:creationId xmlns:a16="http://schemas.microsoft.com/office/drawing/2014/main" id="{527AC54C-DA3A-2D2F-9F68-4BD9D7A7B114}"/>
+                <a16:creationId xmlns:a16="http://schemas.microsoft.com/office/drawing/2014/main" id="{D0F3C31B-97A0-2A58-E665-EACC45DD2F57}"/>
               </a:ext>
             </a:extLst>
           </p:cNvPr>
@@ -6899,18 +7112,53 @@
         </p:blipFill>
         <p:spPr>
           <a:xfrm>
-            <a:off x="997337" y="2256166"/>
-            <a:ext cx="3762553" cy="4194738"/>
+            <a:off x="5868335" y="731520"/>
+            <a:ext cx="4007185" cy="5877546"/>
           </a:xfrm>
           <a:prstGeom prst="rect">
             <a:avLst/>
           </a:prstGeom>
         </p:spPr>
       </p:pic>
+      <p:sp>
+        <p:nvSpPr>
+          <p:cNvPr id="6" name="TextBox 5">
+            <a:extLst>
+              <a:ext uri="{FF2B5EF4-FFF2-40B4-BE49-F238E27FC236}">
+                <a16:creationId xmlns:a16="http://schemas.microsoft.com/office/drawing/2014/main" id="{F0586E30-DD1D-65EA-CA6D-B6B67F2A1887}"/>
+              </a:ext>
+            </a:extLst>
+          </p:cNvPr>
+          <p:cNvSpPr txBox="1"/>
+          <p:nvPr/>
+        </p:nvSpPr>
+        <p:spPr>
+          <a:xfrm>
+            <a:off x="105693" y="158234"/>
+            <a:ext cx="4051218" cy="307777"/>
+          </a:xfrm>
+          <a:prstGeom prst="rect">
+            <a:avLst/>
+          </a:prstGeom>
+          <a:noFill/>
+        </p:spPr>
+        <p:txBody>
+          <a:bodyPr wrap="square">
+            <a:spAutoFit/>
+          </a:bodyPr>
+          <a:lstStyle/>
+          <a:p>
+            <a:r>
+              <a:rPr lang="en-US" sz="1400" dirty="0"/>
+              <a:t>https://ggplot2.tidyverse.org/reference/</a:t>
+            </a:r>
+          </a:p>
+        </p:txBody>
+      </p:sp>
     </p:spTree>
     <p:extLst>
       <p:ext uri="{BB962C8B-B14F-4D97-AF65-F5344CB8AC3E}">
-        <p14:creationId xmlns:p14="http://schemas.microsoft.com/office/powerpoint/2010/main" val="959462186"/>
+        <p14:creationId xmlns:p14="http://schemas.microsoft.com/office/powerpoint/2010/main" val="3139845781"/>
       </p:ext>
     </p:extLst>
   </p:cSld>
@@ -7032,70 +7280,10 @@
           </a:prstGeom>
         </p:spPr>
       </p:pic>
-      <p:pic>
-        <p:nvPicPr>
-          <p:cNvPr id="5" name="Picture 4">
-            <a:extLst>
-              <a:ext uri="{FF2B5EF4-FFF2-40B4-BE49-F238E27FC236}">
-                <a16:creationId xmlns:a16="http://schemas.microsoft.com/office/drawing/2014/main" id="{69CEE7E9-BA82-A3E8-8076-D4CB078E2281}"/>
-              </a:ext>
-            </a:extLst>
-          </p:cNvPr>
-          <p:cNvPicPr>
-            <a:picLocks noChangeAspect="1"/>
-          </p:cNvPicPr>
-          <p:nvPr/>
-        </p:nvPicPr>
-        <p:blipFill>
-          <a:blip r:embed="rId4"/>
-          <a:stretch>
-            <a:fillRect/>
-          </a:stretch>
-        </p:blipFill>
-        <p:spPr>
-          <a:xfrm>
-            <a:off x="5828430" y="1417247"/>
-            <a:ext cx="5232400" cy="812800"/>
-          </a:xfrm>
-          <a:prstGeom prst="rect">
-            <a:avLst/>
-          </a:prstGeom>
-        </p:spPr>
-      </p:pic>
-      <p:pic>
-        <p:nvPicPr>
-          <p:cNvPr id="6" name="Picture 5">
-            <a:extLst>
-              <a:ext uri="{FF2B5EF4-FFF2-40B4-BE49-F238E27FC236}">
-                <a16:creationId xmlns:a16="http://schemas.microsoft.com/office/drawing/2014/main" id="{4B750163-A931-293D-B26C-1E073FA430BE}"/>
-              </a:ext>
-            </a:extLst>
-          </p:cNvPr>
-          <p:cNvPicPr>
-            <a:picLocks noChangeAspect="1"/>
-          </p:cNvPicPr>
-          <p:nvPr/>
-        </p:nvPicPr>
-        <p:blipFill>
-          <a:blip r:embed="rId5"/>
-          <a:stretch>
-            <a:fillRect/>
-          </a:stretch>
-        </p:blipFill>
-        <p:spPr>
-          <a:xfrm>
-            <a:off x="6194679" y="2256166"/>
-            <a:ext cx="3932613" cy="4416729"/>
-          </a:xfrm>
-          <a:prstGeom prst="rect">
-            <a:avLst/>
-          </a:prstGeom>
-        </p:spPr>
-      </p:pic>
     </p:spTree>
     <p:extLst>
       <p:ext uri="{BB962C8B-B14F-4D97-AF65-F5344CB8AC3E}">
-        <p14:creationId xmlns:p14="http://schemas.microsoft.com/office/powerpoint/2010/main" val="3465441234"/>
+        <p14:creationId xmlns:p14="http://schemas.microsoft.com/office/powerpoint/2010/main" val="959462186"/>
       </p:ext>
     </p:extLst>
   </p:cSld>
@@ -7159,10 +7347,10 @@
       </p:sp>
       <p:pic>
         <p:nvPicPr>
-          <p:cNvPr id="7" name="Picture 6">
-            <a:extLst>
-              <a:ext uri="{FF2B5EF4-FFF2-40B4-BE49-F238E27FC236}">
-                <a16:creationId xmlns:a16="http://schemas.microsoft.com/office/drawing/2014/main" id="{CE5CC22E-0EFC-D30F-2A68-07750058C185}"/>
+          <p:cNvPr id="3" name="Picture 2">
+            <a:extLst>
+              <a:ext uri="{FF2B5EF4-FFF2-40B4-BE49-F238E27FC236}">
+                <a16:creationId xmlns:a16="http://schemas.microsoft.com/office/drawing/2014/main" id="{3AEB7DA1-01E0-57D5-BCCD-A3B23DEC2DDD}"/>
               </a:ext>
             </a:extLst>
           </p:cNvPr>
@@ -7179,8 +7367,8 @@
         </p:blipFill>
         <p:spPr>
           <a:xfrm>
-            <a:off x="372736" y="1221809"/>
-            <a:ext cx="4756672" cy="988148"/>
+            <a:off x="860730" y="1507298"/>
+            <a:ext cx="4481621" cy="632699"/>
           </a:xfrm>
           <a:prstGeom prst="rect">
             <a:avLst/>
@@ -7189,10 +7377,10 @@
       </p:pic>
       <p:pic>
         <p:nvPicPr>
-          <p:cNvPr id="8" name="Picture 7">
-            <a:extLst>
-              <a:ext uri="{FF2B5EF4-FFF2-40B4-BE49-F238E27FC236}">
-                <a16:creationId xmlns:a16="http://schemas.microsoft.com/office/drawing/2014/main" id="{FEE92BA7-B87D-BAB5-F39F-F551F17D326D}"/>
+          <p:cNvPr id="4" name="Picture 3">
+            <a:extLst>
+              <a:ext uri="{FF2B5EF4-FFF2-40B4-BE49-F238E27FC236}">
+                <a16:creationId xmlns:a16="http://schemas.microsoft.com/office/drawing/2014/main" id="{527AC54C-DA3A-2D2F-9F68-4BD9D7A7B114}"/>
               </a:ext>
             </a:extLst>
           </p:cNvPr>
@@ -7209,8 +7397,8 @@
         </p:blipFill>
         <p:spPr>
           <a:xfrm>
-            <a:off x="859109" y="2308924"/>
-            <a:ext cx="3759103" cy="4173295"/>
+            <a:off x="997337" y="2256166"/>
+            <a:ext cx="3762553" cy="4194738"/>
           </a:xfrm>
           <a:prstGeom prst="rect">
             <a:avLst/>
@@ -7219,10 +7407,10 @@
       </p:pic>
       <p:pic>
         <p:nvPicPr>
-          <p:cNvPr id="9" name="Picture 8">
-            <a:extLst>
-              <a:ext uri="{FF2B5EF4-FFF2-40B4-BE49-F238E27FC236}">
-                <a16:creationId xmlns:a16="http://schemas.microsoft.com/office/drawing/2014/main" id="{71E68F9D-CE1C-3433-A199-4F022E618C77}"/>
+          <p:cNvPr id="5" name="Picture 4">
+            <a:extLst>
+              <a:ext uri="{FF2B5EF4-FFF2-40B4-BE49-F238E27FC236}">
+                <a16:creationId xmlns:a16="http://schemas.microsoft.com/office/drawing/2014/main" id="{69CEE7E9-BA82-A3E8-8076-D4CB078E2281}"/>
               </a:ext>
             </a:extLst>
           </p:cNvPr>
@@ -7239,8 +7427,8 @@
         </p:blipFill>
         <p:spPr>
           <a:xfrm>
-            <a:off x="6530061" y="1164396"/>
-            <a:ext cx="4505369" cy="1102974"/>
+            <a:off x="5828430" y="1417247"/>
+            <a:ext cx="5232400" cy="812800"/>
           </a:xfrm>
           <a:prstGeom prst="rect">
             <a:avLst/>
@@ -7249,10 +7437,10 @@
       </p:pic>
       <p:pic>
         <p:nvPicPr>
-          <p:cNvPr id="10" name="Picture 9">
-            <a:extLst>
-              <a:ext uri="{FF2B5EF4-FFF2-40B4-BE49-F238E27FC236}">
-                <a16:creationId xmlns:a16="http://schemas.microsoft.com/office/drawing/2014/main" id="{D85A8081-977E-A64B-5127-7198A85BC7E2}"/>
+          <p:cNvPr id="6" name="Picture 5">
+            <a:extLst>
+              <a:ext uri="{FF2B5EF4-FFF2-40B4-BE49-F238E27FC236}">
+                <a16:creationId xmlns:a16="http://schemas.microsoft.com/office/drawing/2014/main" id="{4B750163-A931-293D-B26C-1E073FA430BE}"/>
               </a:ext>
             </a:extLst>
           </p:cNvPr>
@@ -7269,8 +7457,8 @@
         </p:blipFill>
         <p:spPr>
           <a:xfrm>
-            <a:off x="6735425" y="2308924"/>
-            <a:ext cx="3586021" cy="3975155"/>
+            <a:off x="6194679" y="2256166"/>
+            <a:ext cx="3932613" cy="4416729"/>
           </a:xfrm>
           <a:prstGeom prst="rect">
             <a:avLst/>
@@ -7280,7 +7468,7 @@
     </p:spTree>
     <p:extLst>
       <p:ext uri="{BB962C8B-B14F-4D97-AF65-F5344CB8AC3E}">
-        <p14:creationId xmlns:p14="http://schemas.microsoft.com/office/powerpoint/2010/main" val="3204375063"/>
+        <p14:creationId xmlns:p14="http://schemas.microsoft.com/office/powerpoint/2010/main" val="3465441234"/>
       </p:ext>
     </p:extLst>
   </p:cSld>
@@ -7312,7 +7500,7 @@
           <p:cNvPr id="2" name="TextBox 1">
             <a:extLst>
               <a:ext uri="{FF2B5EF4-FFF2-40B4-BE49-F238E27FC236}">
-                <a16:creationId xmlns:a16="http://schemas.microsoft.com/office/drawing/2014/main" id="{BC3D68CD-363F-FDDD-56F1-E286D0BB3EA5}"/>
+                <a16:creationId xmlns:a16="http://schemas.microsoft.com/office/drawing/2014/main" id="{A819696E-90FA-20E5-DEDA-9D8EF88EF437}"/>
               </a:ext>
             </a:extLst>
           </p:cNvPr>
@@ -7321,8 +7509,8 @@
         </p:nvSpPr>
         <p:spPr>
           <a:xfrm>
-            <a:off x="4283901" y="482252"/>
-            <a:ext cx="4014592" cy="369332"/>
+            <a:off x="4816257" y="413359"/>
+            <a:ext cx="5423770" cy="369332"/>
           </a:xfrm>
           <a:prstGeom prst="rect">
             <a:avLst/>
@@ -7337,17 +7525,17 @@
           <a:p>
             <a:r>
               <a:rPr lang="en-US" dirty="0"/>
-              <a:t>Making plots look better – Themes!</a:t>
+              <a:t>Adding to plots</a:t>
             </a:r>
           </a:p>
         </p:txBody>
       </p:sp>
       <p:pic>
         <p:nvPicPr>
-          <p:cNvPr id="3" name="Picture 2">
-            <a:extLst>
-              <a:ext uri="{FF2B5EF4-FFF2-40B4-BE49-F238E27FC236}">
-                <a16:creationId xmlns:a16="http://schemas.microsoft.com/office/drawing/2014/main" id="{98D59025-87C0-C6BC-53D3-2AD1D8216A6E}"/>
+          <p:cNvPr id="7" name="Picture 6">
+            <a:extLst>
+              <a:ext uri="{FF2B5EF4-FFF2-40B4-BE49-F238E27FC236}">
+                <a16:creationId xmlns:a16="http://schemas.microsoft.com/office/drawing/2014/main" id="{CE5CC22E-0EFC-D30F-2A68-07750058C185}"/>
               </a:ext>
             </a:extLst>
           </p:cNvPr>
@@ -7364,8 +7552,8 @@
         </p:blipFill>
         <p:spPr>
           <a:xfrm>
-            <a:off x="1027831" y="1479202"/>
-            <a:ext cx="1117600" cy="292100"/>
+            <a:off x="372736" y="1221809"/>
+            <a:ext cx="4756672" cy="988148"/>
           </a:xfrm>
           <a:prstGeom prst="rect">
             <a:avLst/>
@@ -7374,10 +7562,10 @@
       </p:pic>
       <p:pic>
         <p:nvPicPr>
-          <p:cNvPr id="4" name="Picture 3">
-            <a:extLst>
-              <a:ext uri="{FF2B5EF4-FFF2-40B4-BE49-F238E27FC236}">
-                <a16:creationId xmlns:a16="http://schemas.microsoft.com/office/drawing/2014/main" id="{33CED6A7-4ECC-F738-ABF9-8DD1BD4DC339}"/>
+          <p:cNvPr id="8" name="Picture 7">
+            <a:extLst>
+              <a:ext uri="{FF2B5EF4-FFF2-40B4-BE49-F238E27FC236}">
+                <a16:creationId xmlns:a16="http://schemas.microsoft.com/office/drawing/2014/main" id="{FEE92BA7-B87D-BAB5-F39F-F551F17D326D}"/>
               </a:ext>
             </a:extLst>
           </p:cNvPr>
@@ -7394,8 +7582,8 @@
         </p:blipFill>
         <p:spPr>
           <a:xfrm>
-            <a:off x="124865" y="1910218"/>
-            <a:ext cx="3524866" cy="3895595"/>
+            <a:off x="859109" y="2308924"/>
+            <a:ext cx="3759103" cy="4173295"/>
           </a:xfrm>
           <a:prstGeom prst="rect">
             <a:avLst/>
@@ -7404,10 +7592,10 @@
       </p:pic>
       <p:pic>
         <p:nvPicPr>
-          <p:cNvPr id="5" name="Picture 4">
-            <a:extLst>
-              <a:ext uri="{FF2B5EF4-FFF2-40B4-BE49-F238E27FC236}">
-                <a16:creationId xmlns:a16="http://schemas.microsoft.com/office/drawing/2014/main" id="{5E95CDF4-2363-3B7E-A97E-B81AC7B0612B}"/>
+          <p:cNvPr id="9" name="Picture 8">
+            <a:extLst>
+              <a:ext uri="{FF2B5EF4-FFF2-40B4-BE49-F238E27FC236}">
+                <a16:creationId xmlns:a16="http://schemas.microsoft.com/office/drawing/2014/main" id="{71E68F9D-CE1C-3433-A199-4F022E618C77}"/>
               </a:ext>
             </a:extLst>
           </p:cNvPr>
@@ -7424,8 +7612,8 @@
         </p:blipFill>
         <p:spPr>
           <a:xfrm>
-            <a:off x="4158641" y="1930271"/>
-            <a:ext cx="3651337" cy="3875542"/>
+            <a:off x="6530061" y="1164396"/>
+            <a:ext cx="4505369" cy="1102974"/>
           </a:xfrm>
           <a:prstGeom prst="rect">
             <a:avLst/>
@@ -7434,10 +7622,10 @@
       </p:pic>
       <p:pic>
         <p:nvPicPr>
-          <p:cNvPr id="6" name="Picture 5">
-            <a:extLst>
-              <a:ext uri="{FF2B5EF4-FFF2-40B4-BE49-F238E27FC236}">
-                <a16:creationId xmlns:a16="http://schemas.microsoft.com/office/drawing/2014/main" id="{83579CEE-E3D4-3118-F0EA-5357BE50F129}"/>
+          <p:cNvPr id="10" name="Picture 9">
+            <a:extLst>
+              <a:ext uri="{FF2B5EF4-FFF2-40B4-BE49-F238E27FC236}">
+                <a16:creationId xmlns:a16="http://schemas.microsoft.com/office/drawing/2014/main" id="{D85A8081-977E-A64B-5127-7198A85BC7E2}"/>
               </a:ext>
             </a:extLst>
           </p:cNvPr>
@@ -7454,98 +7642,8 @@
         </p:blipFill>
         <p:spPr>
           <a:xfrm>
-            <a:off x="5276850" y="1453802"/>
-            <a:ext cx="1638300" cy="317500"/>
-          </a:xfrm>
-          <a:prstGeom prst="rect">
-            <a:avLst/>
-          </a:prstGeom>
-        </p:spPr>
-      </p:pic>
-      <p:pic>
-        <p:nvPicPr>
-          <p:cNvPr id="7" name="Picture 6">
-            <a:extLst>
-              <a:ext uri="{FF2B5EF4-FFF2-40B4-BE49-F238E27FC236}">
-                <a16:creationId xmlns:a16="http://schemas.microsoft.com/office/drawing/2014/main" id="{6128C118-F8CB-10C6-CB0C-2F8F7A41E6EA}"/>
-              </a:ext>
-            </a:extLst>
-          </p:cNvPr>
-          <p:cNvPicPr>
-            <a:picLocks noChangeAspect="1"/>
-          </p:cNvPicPr>
-          <p:nvPr/>
-        </p:nvPicPr>
-        <p:blipFill>
-          <a:blip r:embed="rId6"/>
-          <a:stretch>
-            <a:fillRect/>
-          </a:stretch>
-        </p:blipFill>
-        <p:spPr>
-          <a:xfrm>
-            <a:off x="8284136" y="527343"/>
-            <a:ext cx="3524866" cy="1097909"/>
-          </a:xfrm>
-          <a:prstGeom prst="rect">
-            <a:avLst/>
-          </a:prstGeom>
-        </p:spPr>
-      </p:pic>
-      <p:pic>
-        <p:nvPicPr>
-          <p:cNvPr id="8" name="Picture 7">
-            <a:extLst>
-              <a:ext uri="{FF2B5EF4-FFF2-40B4-BE49-F238E27FC236}">
-                <a16:creationId xmlns:a16="http://schemas.microsoft.com/office/drawing/2014/main" id="{C1C346ED-6D3D-F60C-9413-E6360C27D1B1}"/>
-              </a:ext>
-            </a:extLst>
-          </p:cNvPr>
-          <p:cNvPicPr>
-            <a:picLocks noChangeAspect="1"/>
-          </p:cNvPicPr>
-          <p:nvPr/>
-        </p:nvPicPr>
-        <p:blipFill>
-          <a:blip r:embed="rId7"/>
-          <a:stretch>
-            <a:fillRect/>
-          </a:stretch>
-        </p:blipFill>
-        <p:spPr>
-          <a:xfrm>
-            <a:off x="8041449" y="2174206"/>
-            <a:ext cx="3717418" cy="3895595"/>
-          </a:xfrm>
-          <a:prstGeom prst="rect">
-            <a:avLst/>
-          </a:prstGeom>
-        </p:spPr>
-      </p:pic>
-      <p:pic>
-        <p:nvPicPr>
-          <p:cNvPr id="9" name="Picture 8">
-            <a:extLst>
-              <a:ext uri="{FF2B5EF4-FFF2-40B4-BE49-F238E27FC236}">
-                <a16:creationId xmlns:a16="http://schemas.microsoft.com/office/drawing/2014/main" id="{1D89B98D-6FC3-10BC-EC07-DD686B028A73}"/>
-              </a:ext>
-            </a:extLst>
-          </p:cNvPr>
-          <p:cNvPicPr>
-            <a:picLocks noChangeAspect="1"/>
-          </p:cNvPicPr>
-          <p:nvPr/>
-        </p:nvPicPr>
-        <p:blipFill>
-          <a:blip r:embed="rId8"/>
-          <a:stretch>
-            <a:fillRect/>
-          </a:stretch>
-        </p:blipFill>
-        <p:spPr>
-          <a:xfrm>
-            <a:off x="8808319" y="1740979"/>
-            <a:ext cx="2476500" cy="317500"/>
+            <a:off x="6735425" y="2308924"/>
+            <a:ext cx="3586021" cy="3975155"/>
           </a:xfrm>
           <a:prstGeom prst="rect">
             <a:avLst/>
@@ -7555,7 +7653,7 @@
     </p:spTree>
     <p:extLst>
       <p:ext uri="{BB962C8B-B14F-4D97-AF65-F5344CB8AC3E}">
-        <p14:creationId xmlns:p14="http://schemas.microsoft.com/office/powerpoint/2010/main" val="295684193"/>
+        <p14:creationId xmlns:p14="http://schemas.microsoft.com/office/powerpoint/2010/main" val="3204375063"/>
       </p:ext>
     </p:extLst>
   </p:cSld>
@@ -7587,7 +7685,7 @@
           <p:cNvPr id="2" name="TextBox 1">
             <a:extLst>
               <a:ext uri="{FF2B5EF4-FFF2-40B4-BE49-F238E27FC236}">
-                <a16:creationId xmlns:a16="http://schemas.microsoft.com/office/drawing/2014/main" id="{BB0ED4C7-7072-9DBF-33A9-4AA4D246AA68}"/>
+                <a16:creationId xmlns:a16="http://schemas.microsoft.com/office/drawing/2014/main" id="{BC3D68CD-363F-FDDD-56F1-E286D0BB3EA5}"/>
               </a:ext>
             </a:extLst>
           </p:cNvPr>
@@ -7596,8 +7694,8 @@
         </p:nvSpPr>
         <p:spPr>
           <a:xfrm>
-            <a:off x="3331923" y="269310"/>
-            <a:ext cx="5073440" cy="369332"/>
+            <a:off x="4283901" y="482252"/>
+            <a:ext cx="4014592" cy="369332"/>
           </a:xfrm>
           <a:prstGeom prst="rect">
             <a:avLst/>
@@ -7605,14 +7703,14 @@
           <a:noFill/>
         </p:spPr>
         <p:txBody>
-          <a:bodyPr wrap="none" rtlCol="0">
+          <a:bodyPr wrap="square" rtlCol="0">
             <a:spAutoFit/>
           </a:bodyPr>
           <a:lstStyle/>
           <a:p>
             <a:r>
               <a:rPr lang="en-US" dirty="0"/>
-              <a:t>Themes can be added to like any other plot element</a:t>
+              <a:t>Making plots look better – Themes!</a:t>
             </a:r>
           </a:p>
         </p:txBody>
@@ -7622,7 +7720,7 @@
           <p:cNvPr id="3" name="Picture 2">
             <a:extLst>
               <a:ext uri="{FF2B5EF4-FFF2-40B4-BE49-F238E27FC236}">
-                <a16:creationId xmlns:a16="http://schemas.microsoft.com/office/drawing/2014/main" id="{96F45484-C265-8873-5FCA-E2E58BE96ABD}"/>
+                <a16:creationId xmlns:a16="http://schemas.microsoft.com/office/drawing/2014/main" id="{98D59025-87C0-C6BC-53D3-2AD1D8216A6E}"/>
               </a:ext>
             </a:extLst>
           </p:cNvPr>
@@ -7639,8 +7737,8 @@
         </p:blipFill>
         <p:spPr>
           <a:xfrm>
-            <a:off x="322023" y="1191785"/>
-            <a:ext cx="4801122" cy="1285462"/>
+            <a:off x="1027831" y="1479202"/>
+            <a:ext cx="1117600" cy="292100"/>
           </a:xfrm>
           <a:prstGeom prst="rect">
             <a:avLst/>
@@ -7652,7 +7750,7 @@
           <p:cNvPr id="4" name="Picture 3">
             <a:extLst>
               <a:ext uri="{FF2B5EF4-FFF2-40B4-BE49-F238E27FC236}">
-                <a16:creationId xmlns:a16="http://schemas.microsoft.com/office/drawing/2014/main" id="{0CE3BC9A-8B3E-F9BF-FF6D-0D13A563D8E0}"/>
+                <a16:creationId xmlns:a16="http://schemas.microsoft.com/office/drawing/2014/main" id="{33CED6A7-4ECC-F738-ABF9-8DD1BD4DC339}"/>
               </a:ext>
             </a:extLst>
           </p:cNvPr>
@@ -7669,8 +7767,8 @@
         </p:blipFill>
         <p:spPr>
           <a:xfrm>
-            <a:off x="800121" y="2477247"/>
-            <a:ext cx="3844926" cy="4267868"/>
+            <a:off x="124865" y="1910218"/>
+            <a:ext cx="3524866" cy="3895595"/>
           </a:xfrm>
           <a:prstGeom prst="rect">
             <a:avLst/>
@@ -7682,7 +7780,7 @@
           <p:cNvPr id="5" name="Picture 4">
             <a:extLst>
               <a:ext uri="{FF2B5EF4-FFF2-40B4-BE49-F238E27FC236}">
-                <a16:creationId xmlns:a16="http://schemas.microsoft.com/office/drawing/2014/main" id="{6E06D12F-FC24-750F-E5C8-857AC5C81927}"/>
+                <a16:creationId xmlns:a16="http://schemas.microsoft.com/office/drawing/2014/main" id="{5E95CDF4-2363-3B7E-A97E-B81AC7B0612B}"/>
               </a:ext>
             </a:extLst>
           </p:cNvPr>
@@ -7699,58 +7797,138 @@
         </p:blipFill>
         <p:spPr>
           <a:xfrm>
-            <a:off x="5795718" y="1139868"/>
-            <a:ext cx="3053920" cy="5357682"/>
+            <a:off x="4158641" y="1930271"/>
+            <a:ext cx="3651337" cy="3875542"/>
           </a:xfrm>
           <a:prstGeom prst="rect">
             <a:avLst/>
           </a:prstGeom>
         </p:spPr>
       </p:pic>
-      <p:sp>
-        <p:nvSpPr>
-          <p:cNvPr id="7" name="TextBox 6">
-            <a:extLst>
-              <a:ext uri="{FF2B5EF4-FFF2-40B4-BE49-F238E27FC236}">
-                <a16:creationId xmlns:a16="http://schemas.microsoft.com/office/drawing/2014/main" id="{7CF36290-573D-639B-4CB0-8A36DCE32216}"/>
-              </a:ext>
-            </a:extLst>
-          </p:cNvPr>
-          <p:cNvSpPr txBox="1"/>
-          <p:nvPr/>
-        </p:nvSpPr>
-        <p:spPr>
-          <a:xfrm>
-            <a:off x="7125744" y="6147100"/>
-            <a:ext cx="6097044" cy="369332"/>
-          </a:xfrm>
-          <a:prstGeom prst="rect">
-            <a:avLst/>
-          </a:prstGeom>
-          <a:noFill/>
-        </p:spPr>
-        <p:txBody>
-          <a:bodyPr wrap="square">
-            <a:spAutoFit/>
-          </a:bodyPr>
-          <a:lstStyle/>
-          <a:p>
-            <a:r>
-              <a:rPr lang="en-US" dirty="0"/>
-              <a:t>https://ggplot2.tidyverse.org/reference/</a:t>
-            </a:r>
-            <a:r>
-              <a:rPr lang="en-US" dirty="0" err="1"/>
-              <a:t>theme.html</a:t>
-            </a:r>
-            <a:endParaRPr lang="en-US" dirty="0"/>
-          </a:p>
-        </p:txBody>
-      </p:sp>
+      <p:pic>
+        <p:nvPicPr>
+          <p:cNvPr id="6" name="Picture 5">
+            <a:extLst>
+              <a:ext uri="{FF2B5EF4-FFF2-40B4-BE49-F238E27FC236}">
+                <a16:creationId xmlns:a16="http://schemas.microsoft.com/office/drawing/2014/main" id="{83579CEE-E3D4-3118-F0EA-5357BE50F129}"/>
+              </a:ext>
+            </a:extLst>
+          </p:cNvPr>
+          <p:cNvPicPr>
+            <a:picLocks noChangeAspect="1"/>
+          </p:cNvPicPr>
+          <p:nvPr/>
+        </p:nvPicPr>
+        <p:blipFill>
+          <a:blip r:embed="rId5"/>
+          <a:stretch>
+            <a:fillRect/>
+          </a:stretch>
+        </p:blipFill>
+        <p:spPr>
+          <a:xfrm>
+            <a:off x="5276850" y="1453802"/>
+            <a:ext cx="1638300" cy="317500"/>
+          </a:xfrm>
+          <a:prstGeom prst="rect">
+            <a:avLst/>
+          </a:prstGeom>
+        </p:spPr>
+      </p:pic>
+      <p:pic>
+        <p:nvPicPr>
+          <p:cNvPr id="7" name="Picture 6">
+            <a:extLst>
+              <a:ext uri="{FF2B5EF4-FFF2-40B4-BE49-F238E27FC236}">
+                <a16:creationId xmlns:a16="http://schemas.microsoft.com/office/drawing/2014/main" id="{6128C118-F8CB-10C6-CB0C-2F8F7A41E6EA}"/>
+              </a:ext>
+            </a:extLst>
+          </p:cNvPr>
+          <p:cNvPicPr>
+            <a:picLocks noChangeAspect="1"/>
+          </p:cNvPicPr>
+          <p:nvPr/>
+        </p:nvPicPr>
+        <p:blipFill>
+          <a:blip r:embed="rId6"/>
+          <a:stretch>
+            <a:fillRect/>
+          </a:stretch>
+        </p:blipFill>
+        <p:spPr>
+          <a:xfrm>
+            <a:off x="8284136" y="527343"/>
+            <a:ext cx="3524866" cy="1097909"/>
+          </a:xfrm>
+          <a:prstGeom prst="rect">
+            <a:avLst/>
+          </a:prstGeom>
+        </p:spPr>
+      </p:pic>
+      <p:pic>
+        <p:nvPicPr>
+          <p:cNvPr id="8" name="Picture 7">
+            <a:extLst>
+              <a:ext uri="{FF2B5EF4-FFF2-40B4-BE49-F238E27FC236}">
+                <a16:creationId xmlns:a16="http://schemas.microsoft.com/office/drawing/2014/main" id="{C1C346ED-6D3D-F60C-9413-E6360C27D1B1}"/>
+              </a:ext>
+            </a:extLst>
+          </p:cNvPr>
+          <p:cNvPicPr>
+            <a:picLocks noChangeAspect="1"/>
+          </p:cNvPicPr>
+          <p:nvPr/>
+        </p:nvPicPr>
+        <p:blipFill>
+          <a:blip r:embed="rId7"/>
+          <a:stretch>
+            <a:fillRect/>
+          </a:stretch>
+        </p:blipFill>
+        <p:spPr>
+          <a:xfrm>
+            <a:off x="8041449" y="2174206"/>
+            <a:ext cx="3717418" cy="3895595"/>
+          </a:xfrm>
+          <a:prstGeom prst="rect">
+            <a:avLst/>
+          </a:prstGeom>
+        </p:spPr>
+      </p:pic>
+      <p:pic>
+        <p:nvPicPr>
+          <p:cNvPr id="9" name="Picture 8">
+            <a:extLst>
+              <a:ext uri="{FF2B5EF4-FFF2-40B4-BE49-F238E27FC236}">
+                <a16:creationId xmlns:a16="http://schemas.microsoft.com/office/drawing/2014/main" id="{1D89B98D-6FC3-10BC-EC07-DD686B028A73}"/>
+              </a:ext>
+            </a:extLst>
+          </p:cNvPr>
+          <p:cNvPicPr>
+            <a:picLocks noChangeAspect="1"/>
+          </p:cNvPicPr>
+          <p:nvPr/>
+        </p:nvPicPr>
+        <p:blipFill>
+          <a:blip r:embed="rId8"/>
+          <a:stretch>
+            <a:fillRect/>
+          </a:stretch>
+        </p:blipFill>
+        <p:spPr>
+          <a:xfrm>
+            <a:off x="8808319" y="1740979"/>
+            <a:ext cx="2476500" cy="317500"/>
+          </a:xfrm>
+          <a:prstGeom prst="rect">
+            <a:avLst/>
+          </a:prstGeom>
+        </p:spPr>
+      </p:pic>
     </p:spTree>
     <p:extLst>
       <p:ext uri="{BB962C8B-B14F-4D97-AF65-F5344CB8AC3E}">
-        <p14:creationId xmlns:p14="http://schemas.microsoft.com/office/powerpoint/2010/main" val="1375084345"/>
+        <p14:creationId xmlns:p14="http://schemas.microsoft.com/office/powerpoint/2010/main" val="295684193"/>
       </p:ext>
     </p:extLst>
   </p:cSld>
@@ -7779,6 +7957,201 @@
       </p:grpSpPr>
       <p:sp>
         <p:nvSpPr>
+          <p:cNvPr id="2" name="TextBox 1">
+            <a:extLst>
+              <a:ext uri="{FF2B5EF4-FFF2-40B4-BE49-F238E27FC236}">
+                <a16:creationId xmlns:a16="http://schemas.microsoft.com/office/drawing/2014/main" id="{BB0ED4C7-7072-9DBF-33A9-4AA4D246AA68}"/>
+              </a:ext>
+            </a:extLst>
+          </p:cNvPr>
+          <p:cNvSpPr txBox="1"/>
+          <p:nvPr/>
+        </p:nvSpPr>
+        <p:spPr>
+          <a:xfrm>
+            <a:off x="3331923" y="269310"/>
+            <a:ext cx="5073440" cy="369332"/>
+          </a:xfrm>
+          <a:prstGeom prst="rect">
+            <a:avLst/>
+          </a:prstGeom>
+          <a:noFill/>
+        </p:spPr>
+        <p:txBody>
+          <a:bodyPr wrap="none" rtlCol="0">
+            <a:spAutoFit/>
+          </a:bodyPr>
+          <a:lstStyle/>
+          <a:p>
+            <a:r>
+              <a:rPr lang="en-US" dirty="0"/>
+              <a:t>Themes can be added to like any other plot element</a:t>
+            </a:r>
+          </a:p>
+        </p:txBody>
+      </p:sp>
+      <p:pic>
+        <p:nvPicPr>
+          <p:cNvPr id="3" name="Picture 2">
+            <a:extLst>
+              <a:ext uri="{FF2B5EF4-FFF2-40B4-BE49-F238E27FC236}">
+                <a16:creationId xmlns:a16="http://schemas.microsoft.com/office/drawing/2014/main" id="{96F45484-C265-8873-5FCA-E2E58BE96ABD}"/>
+              </a:ext>
+            </a:extLst>
+          </p:cNvPr>
+          <p:cNvPicPr>
+            <a:picLocks noChangeAspect="1"/>
+          </p:cNvPicPr>
+          <p:nvPr/>
+        </p:nvPicPr>
+        <p:blipFill>
+          <a:blip r:embed="rId2"/>
+          <a:stretch>
+            <a:fillRect/>
+          </a:stretch>
+        </p:blipFill>
+        <p:spPr>
+          <a:xfrm>
+            <a:off x="322023" y="1191785"/>
+            <a:ext cx="4801122" cy="1285462"/>
+          </a:xfrm>
+          <a:prstGeom prst="rect">
+            <a:avLst/>
+          </a:prstGeom>
+        </p:spPr>
+      </p:pic>
+      <p:pic>
+        <p:nvPicPr>
+          <p:cNvPr id="4" name="Picture 3">
+            <a:extLst>
+              <a:ext uri="{FF2B5EF4-FFF2-40B4-BE49-F238E27FC236}">
+                <a16:creationId xmlns:a16="http://schemas.microsoft.com/office/drawing/2014/main" id="{0CE3BC9A-8B3E-F9BF-FF6D-0D13A563D8E0}"/>
+              </a:ext>
+            </a:extLst>
+          </p:cNvPr>
+          <p:cNvPicPr>
+            <a:picLocks noChangeAspect="1"/>
+          </p:cNvPicPr>
+          <p:nvPr/>
+        </p:nvPicPr>
+        <p:blipFill>
+          <a:blip r:embed="rId3"/>
+          <a:stretch>
+            <a:fillRect/>
+          </a:stretch>
+        </p:blipFill>
+        <p:spPr>
+          <a:xfrm>
+            <a:off x="800121" y="2477247"/>
+            <a:ext cx="3844926" cy="4267868"/>
+          </a:xfrm>
+          <a:prstGeom prst="rect">
+            <a:avLst/>
+          </a:prstGeom>
+        </p:spPr>
+      </p:pic>
+      <p:pic>
+        <p:nvPicPr>
+          <p:cNvPr id="5" name="Picture 4">
+            <a:extLst>
+              <a:ext uri="{FF2B5EF4-FFF2-40B4-BE49-F238E27FC236}">
+                <a16:creationId xmlns:a16="http://schemas.microsoft.com/office/drawing/2014/main" id="{6E06D12F-FC24-750F-E5C8-857AC5C81927}"/>
+              </a:ext>
+            </a:extLst>
+          </p:cNvPr>
+          <p:cNvPicPr>
+            <a:picLocks noChangeAspect="1"/>
+          </p:cNvPicPr>
+          <p:nvPr/>
+        </p:nvPicPr>
+        <p:blipFill>
+          <a:blip r:embed="rId4"/>
+          <a:stretch>
+            <a:fillRect/>
+          </a:stretch>
+        </p:blipFill>
+        <p:spPr>
+          <a:xfrm>
+            <a:off x="5795718" y="1139868"/>
+            <a:ext cx="3053920" cy="5357682"/>
+          </a:xfrm>
+          <a:prstGeom prst="rect">
+            <a:avLst/>
+          </a:prstGeom>
+        </p:spPr>
+      </p:pic>
+      <p:sp>
+        <p:nvSpPr>
+          <p:cNvPr id="7" name="TextBox 6">
+            <a:extLst>
+              <a:ext uri="{FF2B5EF4-FFF2-40B4-BE49-F238E27FC236}">
+                <a16:creationId xmlns:a16="http://schemas.microsoft.com/office/drawing/2014/main" id="{7CF36290-573D-639B-4CB0-8A36DCE32216}"/>
+              </a:ext>
+            </a:extLst>
+          </p:cNvPr>
+          <p:cNvSpPr txBox="1"/>
+          <p:nvPr/>
+        </p:nvSpPr>
+        <p:spPr>
+          <a:xfrm>
+            <a:off x="7125744" y="6147100"/>
+            <a:ext cx="6097044" cy="369332"/>
+          </a:xfrm>
+          <a:prstGeom prst="rect">
+            <a:avLst/>
+          </a:prstGeom>
+          <a:noFill/>
+        </p:spPr>
+        <p:txBody>
+          <a:bodyPr wrap="square">
+            <a:spAutoFit/>
+          </a:bodyPr>
+          <a:lstStyle/>
+          <a:p>
+            <a:r>
+              <a:rPr lang="en-US" dirty="0"/>
+              <a:t>https://ggplot2.tidyverse.org/reference/</a:t>
+            </a:r>
+            <a:r>
+              <a:rPr lang="en-US" dirty="0" err="1"/>
+              <a:t>theme.html</a:t>
+            </a:r>
+            <a:endParaRPr lang="en-US" dirty="0"/>
+          </a:p>
+        </p:txBody>
+      </p:sp>
+    </p:spTree>
+    <p:extLst>
+      <p:ext uri="{BB962C8B-B14F-4D97-AF65-F5344CB8AC3E}">
+        <p14:creationId xmlns:p14="http://schemas.microsoft.com/office/powerpoint/2010/main" val="1375084345"/>
+      </p:ext>
+    </p:extLst>
+  </p:cSld>
+  <p:clrMapOvr>
+    <a:masterClrMapping/>
+  </p:clrMapOvr>
+</p:sld>
+</file>
+
+<file path=ppt/slides/slide26.xml><?xml version="1.0" encoding="utf-8"?>
+<p:sld xmlns:a="http://schemas.openxmlformats.org/drawingml/2006/main" xmlns:r="http://schemas.openxmlformats.org/officeDocument/2006/relationships" xmlns:p="http://schemas.openxmlformats.org/presentationml/2006/main">
+  <p:cSld>
+    <p:spTree>
+      <p:nvGrpSpPr>
+        <p:cNvPr id="1" name=""/>
+        <p:cNvGrpSpPr/>
+        <p:nvPr/>
+      </p:nvGrpSpPr>
+      <p:grpSpPr>
+        <a:xfrm>
+          <a:off x="0" y="0"/>
+          <a:ext cx="0" cy="0"/>
+          <a:chOff x="0" y="0"/>
+          <a:chExt cx="0" cy="0"/>
+        </a:xfrm>
+      </p:grpSpPr>
+      <p:sp>
+        <p:nvSpPr>
           <p:cNvPr id="366" name="Merging and Joining (relational data)"/>
           <p:cNvSpPr txBox="1"/>
           <p:nvPr/>
@@ -7796,7 +8169,7 @@
           </a:ln>
           <a:extLst>
             <a:ext uri="{C572A759-6A51-4108-AA02-DFA0A04FC94B}">
-              <ma14:wrappingTextBoxFlag xmlns:ma14="http://schemas.microsoft.com/office/mac/drawingml/2011/main" xmlns:a14="http://schemas.microsoft.com/office/drawing/2010/main" xmlns:m="http://schemas.openxmlformats.org/officeDocument/2006/math" xmlns="" val="1"/>
+              <ma14:wrappingTextBoxFlag xmlns="" xmlns:m="http://schemas.openxmlformats.org/officeDocument/2006/math" xmlns:a14="http://schemas.microsoft.com/office/drawing/2010/main" xmlns:ma14="http://schemas.microsoft.com/office/mac/drawingml/2011/main" val="1"/>
             </a:ext>
           </a:extLst>
         </p:spPr>
@@ -8390,7 +8763,7 @@
 </p:sld>
 </file>
 
-<file path=ppt/slides/slide26.xml><?xml version="1.0" encoding="utf-8"?>
+<file path=ppt/slides/slide27.xml><?xml version="1.0" encoding="utf-8"?>
 <p:sld xmlns:a="http://schemas.openxmlformats.org/drawingml/2006/main" xmlns:r="http://schemas.openxmlformats.org/officeDocument/2006/relationships" xmlns:p="http://schemas.openxmlformats.org/presentationml/2006/main">
   <p:cSld>
     <p:spTree>
@@ -8426,7 +8799,7 @@
           </a:ln>
           <a:extLst>
             <a:ext uri="{C572A759-6A51-4108-AA02-DFA0A04FC94B}">
-              <ma14:wrappingTextBoxFlag xmlns:ma14="http://schemas.microsoft.com/office/mac/drawingml/2011/main" xmlns:a14="http://schemas.microsoft.com/office/drawing/2010/main" xmlns:m="http://schemas.openxmlformats.org/officeDocument/2006/math" xmlns="" val="1"/>
+              <ma14:wrappingTextBoxFlag xmlns="" xmlns:m="http://schemas.openxmlformats.org/officeDocument/2006/math" xmlns:a14="http://schemas.microsoft.com/office/drawing/2010/main" xmlns:ma14="http://schemas.microsoft.com/office/mac/drawingml/2011/main" val="1"/>
             </a:ext>
           </a:extLst>
         </p:spPr>
@@ -8977,7 +9350,7 @@
 </p:sld>
 </file>
 
-<file path=ppt/slides/slide27.xml><?xml version="1.0" encoding="utf-8"?>
+<file path=ppt/slides/slide28.xml><?xml version="1.0" encoding="utf-8"?>
 <p:sld xmlns:a="http://schemas.openxmlformats.org/drawingml/2006/main" xmlns:r="http://schemas.openxmlformats.org/officeDocument/2006/relationships" xmlns:p="http://schemas.openxmlformats.org/presentationml/2006/main">
   <p:cSld>
     <p:spTree>
@@ -9416,7 +9789,7 @@
           </a:ln>
           <a:extLst>
             <a:ext uri="{C572A759-6A51-4108-AA02-DFA0A04FC94B}">
-              <ma14:wrappingTextBoxFlag xmlns:ma14="http://schemas.microsoft.com/office/mac/drawingml/2011/main" xmlns:a14="http://schemas.microsoft.com/office/drawing/2010/main" xmlns:m="http://schemas.openxmlformats.org/officeDocument/2006/math" xmlns="" val="1"/>
+              <ma14:wrappingTextBoxFlag xmlns="" xmlns:m="http://schemas.openxmlformats.org/officeDocument/2006/math" xmlns:a14="http://schemas.microsoft.com/office/drawing/2010/main" xmlns:ma14="http://schemas.microsoft.com/office/mac/drawingml/2011/main" val="1"/>
             </a:ext>
           </a:extLst>
         </p:spPr>
@@ -9475,7 +9848,7 @@
 </p:sld>
 </file>
 
-<file path=ppt/slides/slide28.xml><?xml version="1.0" encoding="utf-8"?>
+<file path=ppt/slides/slide29.xml><?xml version="1.0" encoding="utf-8"?>
 <p:sld xmlns:a="http://schemas.openxmlformats.org/drawingml/2006/main" xmlns:r="http://schemas.openxmlformats.org/officeDocument/2006/relationships" xmlns:p="http://schemas.openxmlformats.org/presentationml/2006/main">
   <p:cSld>
     <p:spTree>
@@ -9511,7 +9884,7 @@
           </a:ln>
           <a:extLst>
             <a:ext uri="{C572A759-6A51-4108-AA02-DFA0A04FC94B}">
-              <ma14:wrappingTextBoxFlag xmlns:ma14="http://schemas.microsoft.com/office/mac/drawingml/2011/main" xmlns:a14="http://schemas.microsoft.com/office/drawing/2010/main" xmlns:m="http://schemas.openxmlformats.org/officeDocument/2006/math" xmlns="" val="1"/>
+              <ma14:wrappingTextBoxFlag xmlns="" xmlns:m="http://schemas.openxmlformats.org/officeDocument/2006/math" xmlns:a14="http://schemas.microsoft.com/office/drawing/2010/main" xmlns:ma14="http://schemas.microsoft.com/office/mac/drawingml/2011/main" val="1"/>
             </a:ext>
           </a:extLst>
         </p:spPr>
@@ -10411,141 +10784,6 @@
 </p:sld>
 </file>
 
-<file path=ppt/slides/slide29.xml><?xml version="1.0" encoding="utf-8"?>
-<p:sld xmlns:a="http://schemas.openxmlformats.org/drawingml/2006/main" xmlns:r="http://schemas.openxmlformats.org/officeDocument/2006/relationships" xmlns:p="http://schemas.openxmlformats.org/presentationml/2006/main">
-  <p:cSld>
-    <p:spTree>
-      <p:nvGrpSpPr>
-        <p:cNvPr id="1" name=""/>
-        <p:cNvGrpSpPr/>
-        <p:nvPr/>
-      </p:nvGrpSpPr>
-      <p:grpSpPr>
-        <a:xfrm>
-          <a:off x="0" y="0"/>
-          <a:ext cx="0" cy="0"/>
-          <a:chOff x="0" y="0"/>
-          <a:chExt cx="0" cy="0"/>
-        </a:xfrm>
-      </p:grpSpPr>
-      <p:pic>
-        <p:nvPicPr>
-          <p:cNvPr id="387" name="Image" descr="Image"/>
-          <p:cNvPicPr>
-            <a:picLocks noChangeAspect="1"/>
-          </p:cNvPicPr>
-          <p:nvPr/>
-        </p:nvPicPr>
-        <p:blipFill>
-          <a:blip r:embed="rId2"/>
-          <a:stretch>
-            <a:fillRect/>
-          </a:stretch>
-        </p:blipFill>
-        <p:spPr>
-          <a:xfrm>
-            <a:off x="4161653" y="1418082"/>
-            <a:ext cx="3964838" cy="3775675"/>
-          </a:xfrm>
-          <a:prstGeom prst="rect">
-            <a:avLst/>
-          </a:prstGeom>
-          <a:ln w="12700">
-            <a:miter lim="400000"/>
-          </a:ln>
-        </p:spPr>
-      </p:pic>
-      <p:sp>
-        <p:nvSpPr>
-          <p:cNvPr id="388" name="https://tavareshugo.github.io/r-intro-tidyverse-gapminder/08-joins/index.html"/>
-          <p:cNvSpPr txBox="1"/>
-          <p:nvPr/>
-        </p:nvSpPr>
-        <p:spPr>
-          <a:xfrm>
-            <a:off x="6646056" y="6283857"/>
-            <a:ext cx="3771866" cy="189796"/>
-          </a:xfrm>
-          <a:prstGeom prst="rect">
-            <a:avLst/>
-          </a:prstGeom>
-          <a:ln w="12700">
-            <a:miter lim="400000"/>
-          </a:ln>
-          <a:extLst>
-            <a:ext uri="{C572A759-6A51-4108-AA02-DFA0A04FC94B}">
-              <ma14:wrappingTextBoxFlag xmlns:ma14="http://schemas.microsoft.com/office/mac/drawingml/2011/main" xmlns:a14="http://schemas.microsoft.com/office/drawing/2010/main" xmlns:m="http://schemas.openxmlformats.org/officeDocument/2006/math" xmlns="" val="1"/>
-            </a:ext>
-          </a:extLst>
-        </p:spPr>
-        <p:txBody>
-          <a:bodyPr wrap="none" lIns="25400" tIns="25400" rIns="25400" bIns="25400" anchor="ctr">
-            <a:spAutoFit/>
-          </a:bodyPr>
-          <a:lstStyle/>
-          <a:p>
-            <a:r>
-              <a:rPr sz="900"/>
-              <a:t>https://tavareshugo.github.io/r-intro-tidyverse-gapminder/08-joins/index.html</a:t>
-            </a:r>
-          </a:p>
-        </p:txBody>
-      </p:sp>
-      <p:sp>
-        <p:nvSpPr>
-          <p:cNvPr id="389" name="link to the license"/>
-          <p:cNvSpPr txBox="1"/>
-          <p:nvPr/>
-        </p:nvSpPr>
-        <p:spPr>
-          <a:xfrm>
-            <a:off x="11225603" y="6461931"/>
-            <a:ext cx="694101" cy="159018"/>
-          </a:xfrm>
-          <a:prstGeom prst="rect">
-            <a:avLst/>
-          </a:prstGeom>
-          <a:ln w="12700">
-            <a:miter lim="400000"/>
-          </a:ln>
-          <a:extLst>
-            <a:ext uri="{C572A759-6A51-4108-AA02-DFA0A04FC94B}">
-              <ma14:wrappingTextBoxFlag xmlns:ma14="http://schemas.microsoft.com/office/mac/drawingml/2011/main" xmlns:a14="http://schemas.microsoft.com/office/drawing/2010/main" xmlns:m="http://schemas.openxmlformats.org/officeDocument/2006/math" xmlns="" val="1"/>
-            </a:ext>
-          </a:extLst>
-        </p:spPr>
-        <p:txBody>
-          <a:bodyPr wrap="none" lIns="25400" tIns="25400" rIns="25400" bIns="25400" anchor="ctr">
-            <a:spAutoFit/>
-          </a:bodyPr>
-          <a:lstStyle>
-            <a:lvl1pPr algn="l" defTabSz="457200">
-              <a:defRPr sz="1400" u="sng">
-                <a:solidFill>
-                  <a:srgbClr val="23527C"/>
-                </a:solidFill>
-                <a:hlinkClick r:id="rId3"/>
-              </a:defRPr>
-            </a:lvl1pPr>
-          </a:lstStyle>
-          <a:p>
-            <a:r>
-              <a:rPr sz="700">
-                <a:hlinkClick r:id="rId3"/>
-              </a:rPr>
-              <a:t>link to the license</a:t>
-            </a:r>
-          </a:p>
-        </p:txBody>
-      </p:sp>
-    </p:spTree>
-  </p:cSld>
-  <p:clrMapOvr>
-    <a:masterClrMapping/>
-  </p:clrMapOvr>
-</p:sld>
-</file>
-
 <file path=ppt/slides/slide3.xml><?xml version="1.0" encoding="utf-8"?>
 <p:sld xmlns:a="http://schemas.openxmlformats.org/drawingml/2006/main" xmlns:r="http://schemas.openxmlformats.org/officeDocument/2006/relationships" xmlns:p="http://schemas.openxmlformats.org/presentationml/2006/main">
   <p:cSld>
@@ -10565,139 +10803,20 @@
       </p:grpSpPr>
       <p:sp>
         <p:nvSpPr>
-          <p:cNvPr id="314" name="install.packages(‘nycflights13’)"/>
+          <p:cNvPr id="2" name="TextBox 1">
+            <a:extLst>
+              <a:ext uri="{FF2B5EF4-FFF2-40B4-BE49-F238E27FC236}">
+                <a16:creationId xmlns:a16="http://schemas.microsoft.com/office/drawing/2014/main" id="{72A6D32A-989A-5AFB-7568-3037BBFDF5B5}"/>
+              </a:ext>
+            </a:extLst>
+          </p:cNvPr>
           <p:cNvSpPr txBox="1"/>
           <p:nvPr/>
         </p:nvSpPr>
         <p:spPr>
           <a:xfrm>
-            <a:off x="166572" y="114454"/>
-            <a:ext cx="3216778" cy="359073"/>
-          </a:xfrm>
-          <a:prstGeom prst="rect">
-            <a:avLst/>
-          </a:prstGeom>
-          <a:ln w="12700">
-            <a:miter lim="400000"/>
-          </a:ln>
-          <a:extLst>
-            <a:ext uri="{C572A759-6A51-4108-AA02-DFA0A04FC94B}">
-              <ma14:wrappingTextBoxFlag xmlns:ma14="http://schemas.microsoft.com/office/mac/drawingml/2011/main" xmlns:a14="http://schemas.microsoft.com/office/drawing/2010/main" xmlns:m="http://schemas.openxmlformats.org/officeDocument/2006/math" xmlns="" val="1"/>
-            </a:ext>
-          </a:extLst>
-        </p:spPr>
-        <p:txBody>
-          <a:bodyPr wrap="none" lIns="25400" tIns="25400" rIns="25400" bIns="25400" anchor="ctr">
-            <a:spAutoFit/>
-          </a:bodyPr>
-          <a:lstStyle>
-            <a:lvl1pPr>
-              <a:defRPr sz="4000"/>
-            </a:lvl1pPr>
-          </a:lstStyle>
-          <a:p>
-            <a:r>
-              <a:rPr sz="2000" dirty="0" err="1"/>
-              <a:t>install.packages</a:t>
-            </a:r>
-            <a:r>
-              <a:rPr sz="2000" dirty="0"/>
-              <a:t>(‘nycflights13’)</a:t>
-            </a:r>
-          </a:p>
-        </p:txBody>
-      </p:sp>
-      <p:sp>
-        <p:nvSpPr>
-          <p:cNvPr id="315" name="data(ToothGrowth)"/>
-          <p:cNvSpPr txBox="1"/>
-          <p:nvPr/>
-        </p:nvSpPr>
-        <p:spPr>
-          <a:xfrm>
-            <a:off x="780182" y="1570088"/>
-            <a:ext cx="51361" cy="328295"/>
-          </a:xfrm>
-          <a:prstGeom prst="rect">
-            <a:avLst/>
-          </a:prstGeom>
-          <a:ln w="12700">
-            <a:miter lim="400000"/>
-          </a:ln>
-          <a:extLst>
-            <a:ext uri="{C572A759-6A51-4108-AA02-DFA0A04FC94B}">
-              <ma14:wrappingTextBoxFlag xmlns:ma14="http://schemas.microsoft.com/office/mac/drawingml/2011/main" xmlns:a14="http://schemas.microsoft.com/office/drawing/2010/main" xmlns:m="http://schemas.openxmlformats.org/officeDocument/2006/math" xmlns="" val="1"/>
-            </a:ext>
-          </a:extLst>
-        </p:spPr>
-        <p:txBody>
-          <a:bodyPr wrap="none" lIns="25400" tIns="25400" rIns="25400" bIns="25400" anchor="ctr">
-            <a:spAutoFit/>
-          </a:bodyPr>
-          <a:lstStyle>
-            <a:lvl1pPr>
-              <a:defRPr sz="3600"/>
-            </a:lvl1pPr>
-          </a:lstStyle>
-          <a:p>
-            <a:endParaRPr sz="1800" dirty="0"/>
-          </a:p>
-        </p:txBody>
-      </p:sp>
-      <p:sp>
-        <p:nvSpPr>
-          <p:cNvPr id="316" name="How many observations for each treatment?…"/>
-          <p:cNvSpPr txBox="1"/>
-          <p:nvPr/>
-        </p:nvSpPr>
-        <p:spPr>
-          <a:xfrm>
-            <a:off x="3585310" y="3236384"/>
-            <a:ext cx="166712" cy="282129"/>
-          </a:xfrm>
-          <a:prstGeom prst="rect">
-            <a:avLst/>
-          </a:prstGeom>
-          <a:ln w="12700">
-            <a:miter lim="400000"/>
-          </a:ln>
-          <a:extLst>
-            <a:ext uri="{C572A759-6A51-4108-AA02-DFA0A04FC94B}">
-              <ma14:wrappingTextBoxFlag xmlns:ma14="http://schemas.microsoft.com/office/mac/drawingml/2011/main" xmlns:a14="http://schemas.microsoft.com/office/drawing/2010/main" xmlns:m="http://schemas.openxmlformats.org/officeDocument/2006/math" xmlns="" val="1"/>
-            </a:ext>
-          </a:extLst>
-        </p:spPr>
-        <p:txBody>
-          <a:bodyPr wrap="none" lIns="25400" tIns="25400" rIns="25400" bIns="25400" anchor="ctr">
-            <a:spAutoFit/>
-          </a:bodyPr>
-          <a:lstStyle/>
-          <a:p>
-            <a:pPr marL="114300" indent="-114300">
-              <a:buSzPct val="100000"/>
-              <a:buChar char="•"/>
-              <a:defRPr sz="3000"/>
-            </a:pPr>
-            <a:endParaRPr sz="1500" dirty="0"/>
-          </a:p>
-        </p:txBody>
-      </p:sp>
-      <p:sp>
-        <p:nvSpPr>
-          <p:cNvPr id="3" name="TextBox 2">
-            <a:extLst>
-              <a:ext uri="{FF2B5EF4-FFF2-40B4-BE49-F238E27FC236}">
-                <a16:creationId xmlns:a16="http://schemas.microsoft.com/office/drawing/2014/main" id="{B480CC13-B99C-66C6-65F4-DA3A79B21A2F}"/>
-              </a:ext>
-            </a:extLst>
-          </p:cNvPr>
-          <p:cNvSpPr txBox="1"/>
-          <p:nvPr/>
-        </p:nvSpPr>
-        <p:spPr>
-          <a:xfrm>
-            <a:off x="5308485" y="202740"/>
-            <a:ext cx="1683986" cy="369332"/>
+            <a:off x="4840356" y="417443"/>
+            <a:ext cx="2872409" cy="369332"/>
           </a:xfrm>
           <a:prstGeom prst="rect">
             <a:avLst/>
@@ -10712,77 +10831,17 @@
           <a:p>
             <a:r>
               <a:rPr lang="en-US" dirty="0"/>
-              <a:t>Practice</a:t>
-            </a:r>
-          </a:p>
-        </p:txBody>
-      </p:sp>
-      <p:pic>
-        <p:nvPicPr>
-          <p:cNvPr id="5" name="Picture 4">
-            <a:extLst>
-              <a:ext uri="{FF2B5EF4-FFF2-40B4-BE49-F238E27FC236}">
-                <a16:creationId xmlns:a16="http://schemas.microsoft.com/office/drawing/2014/main" id="{434F984D-EC51-95A9-D2F1-6F72E403D109}"/>
-              </a:ext>
-            </a:extLst>
-          </p:cNvPr>
-          <p:cNvPicPr>
-            <a:picLocks noChangeAspect="1"/>
-          </p:cNvPicPr>
-          <p:nvPr/>
-        </p:nvPicPr>
-        <p:blipFill>
-          <a:blip r:embed="rId2"/>
-          <a:stretch>
-            <a:fillRect/>
-          </a:stretch>
-        </p:blipFill>
-        <p:spPr>
-          <a:xfrm>
-            <a:off x="3438655" y="1144586"/>
-            <a:ext cx="7772400" cy="1585305"/>
-          </a:xfrm>
-          <a:prstGeom prst="rect">
-            <a:avLst/>
-          </a:prstGeom>
-        </p:spPr>
-      </p:pic>
-      <p:pic>
-        <p:nvPicPr>
-          <p:cNvPr id="6" name="Picture 5">
-            <a:extLst>
-              <a:ext uri="{FF2B5EF4-FFF2-40B4-BE49-F238E27FC236}">
-                <a16:creationId xmlns:a16="http://schemas.microsoft.com/office/drawing/2014/main" id="{A8D5D959-2E35-7386-C195-325470631E31}"/>
-              </a:ext>
-            </a:extLst>
-          </p:cNvPr>
-          <p:cNvPicPr>
-            <a:picLocks noChangeAspect="1"/>
-          </p:cNvPicPr>
-          <p:nvPr/>
-        </p:nvPicPr>
-        <p:blipFill>
-          <a:blip r:embed="rId3"/>
-          <a:stretch>
-            <a:fillRect/>
-          </a:stretch>
-        </p:blipFill>
-        <p:spPr>
-          <a:xfrm>
-            <a:off x="3438655" y="2972088"/>
-            <a:ext cx="7772400" cy="1854687"/>
-          </a:xfrm>
-          <a:prstGeom prst="rect">
-            <a:avLst/>
-          </a:prstGeom>
-        </p:spPr>
-      </p:pic>
-      <p:sp>
-        <p:nvSpPr>
-          <p:cNvPr id="7" name="TextBox 6">
-            <a:extLst>
-              <a:ext uri="{FF2B5EF4-FFF2-40B4-BE49-F238E27FC236}">
-                <a16:creationId xmlns:a16="http://schemas.microsoft.com/office/drawing/2014/main" id="{1EEBD7FF-A83D-B147-E7F3-1E9F8B336E5A}"/>
+              <a:t>Installing libraries </a:t>
+            </a:r>
+          </a:p>
+        </p:txBody>
+      </p:sp>
+      <p:sp>
+        <p:nvSpPr>
+          <p:cNvPr id="3" name="TextBox 2">
+            <a:extLst>
+              <a:ext uri="{FF2B5EF4-FFF2-40B4-BE49-F238E27FC236}">
+                <a16:creationId xmlns:a16="http://schemas.microsoft.com/office/drawing/2014/main" id="{5AA12617-48B1-3F73-5E67-1DFB957F5BDE}"/>
               </a:ext>
             </a:extLst>
           </p:cNvPr>
@@ -10791,8 +10850,8 @@
         </p:nvSpPr>
         <p:spPr>
           <a:xfrm>
-            <a:off x="294310" y="473527"/>
-            <a:ext cx="2018367" cy="6463308"/>
+            <a:off x="2703443" y="1311965"/>
+            <a:ext cx="7245627" cy="369332"/>
           </a:xfrm>
           <a:prstGeom prst="rect">
             <a:avLst/>
@@ -10805,86 +10864,24 @@
           </a:bodyPr>
           <a:lstStyle/>
           <a:p>
-            <a:pPr marL="285750" indent="-285750">
-              <a:buFont typeface="Arial" panose="020B0604020202020204" pitchFamily="34" charset="0"/>
-              <a:buChar char="•"/>
-            </a:pPr>
             <a:r>
               <a:rPr lang="en-US" dirty="0"/>
-              <a:t>How many flights originated at each airport</a:t>
-            </a:r>
-          </a:p>
-          <a:p>
-            <a:pPr marL="285750" indent="-285750">
-              <a:buFont typeface="Arial" panose="020B0604020202020204" pitchFamily="34" charset="0"/>
-              <a:buChar char="•"/>
-            </a:pPr>
+              <a:t>Script -        scripts/</a:t>
+            </a:r>
+            <a:r>
+              <a:rPr lang="en-US" dirty="0" err="1"/>
+              <a:t>class_packages.R</a:t>
+            </a:r>
             <a:endParaRPr lang="en-US" dirty="0"/>
           </a:p>
-          <a:p>
-            <a:pPr marL="285750" indent="-285750">
-              <a:buFont typeface="Arial" panose="020B0604020202020204" pitchFamily="34" charset="0"/>
-              <a:buChar char="•"/>
-            </a:pPr>
-            <a:r>
-              <a:rPr lang="en-US" dirty="0"/>
-              <a:t>How long was the average flight that left EWR (Newark)</a:t>
-            </a:r>
-          </a:p>
-          <a:p>
-            <a:pPr marL="285750" indent="-285750">
-              <a:buFont typeface="Arial" panose="020B0604020202020204" pitchFamily="34" charset="0"/>
-              <a:buChar char="•"/>
-            </a:pPr>
-            <a:endParaRPr lang="en-US" dirty="0"/>
-          </a:p>
-          <a:p>
-            <a:pPr marL="285750" indent="-285750">
-              <a:buFont typeface="Arial" panose="020B0604020202020204" pitchFamily="34" charset="0"/>
-              <a:buChar char="•"/>
-            </a:pPr>
-            <a:r>
-              <a:rPr lang="en-US" dirty="0"/>
-              <a:t>What airport had the longest average arrival delay </a:t>
-            </a:r>
-          </a:p>
-          <a:p>
-            <a:pPr marL="285750" indent="-285750">
-              <a:buFont typeface="Arial" panose="020B0604020202020204" pitchFamily="34" charset="0"/>
-              <a:buChar char="•"/>
-            </a:pPr>
-            <a:endParaRPr lang="en-US" dirty="0"/>
-          </a:p>
-          <a:p>
-            <a:pPr marL="285750" indent="-285750">
-              <a:buFont typeface="Arial" panose="020B0604020202020204" pitchFamily="34" charset="0"/>
-              <a:buChar char="•"/>
-            </a:pPr>
-            <a:r>
-              <a:rPr lang="en-US" dirty="0"/>
-              <a:t>Which carrier had the most departure delays (&gt; 0)</a:t>
-            </a:r>
-          </a:p>
-          <a:p>
-            <a:pPr marL="285750" indent="-285750">
-              <a:buFont typeface="Arial" panose="020B0604020202020204" pitchFamily="34" charset="0"/>
-              <a:buChar char="•"/>
-            </a:pPr>
-            <a:endParaRPr lang="en-US" dirty="0"/>
-          </a:p>
-          <a:p>
-            <a:pPr marL="285750" indent="-285750">
-              <a:buFont typeface="Arial" panose="020B0604020202020204" pitchFamily="34" charset="0"/>
-              <a:buChar char="•"/>
-            </a:pPr>
-            <a:r>
-              <a:rPr lang="en-US" dirty="0"/>
-              <a:t>How many flights per month</a:t>
-            </a:r>
-          </a:p>
         </p:txBody>
       </p:sp>
     </p:spTree>
+    <p:extLst>
+      <p:ext uri="{BB962C8B-B14F-4D97-AF65-F5344CB8AC3E}">
+        <p14:creationId xmlns:p14="http://schemas.microsoft.com/office/powerpoint/2010/main" val="1923552443"/>
+      </p:ext>
+    </p:extLst>
   </p:cSld>
   <p:clrMapOvr>
     <a:masterClrMapping/>
@@ -10909,16 +10906,43 @@
           <a:chExt cx="0" cy="0"/>
         </a:xfrm>
       </p:grpSpPr>
-      <p:sp>
-        <p:nvSpPr>
-          <p:cNvPr id="391" name="back to code"/>
+      <p:pic>
+        <p:nvPicPr>
+          <p:cNvPr id="387" name="Image" descr="Image"/>
+          <p:cNvPicPr>
+            <a:picLocks noChangeAspect="1"/>
+          </p:cNvPicPr>
+          <p:nvPr/>
+        </p:nvPicPr>
+        <p:blipFill>
+          <a:blip r:embed="rId2"/>
+          <a:stretch>
+            <a:fillRect/>
+          </a:stretch>
+        </p:blipFill>
+        <p:spPr>
+          <a:xfrm>
+            <a:off x="4161653" y="1418082"/>
+            <a:ext cx="3964838" cy="3775675"/>
+          </a:xfrm>
+          <a:prstGeom prst="rect">
+            <a:avLst/>
+          </a:prstGeom>
+          <a:ln w="12700">
+            <a:miter lim="400000"/>
+          </a:ln>
+        </p:spPr>
+      </p:pic>
+      <p:sp>
+        <p:nvSpPr>
+          <p:cNvPr id="388" name="https://tavareshugo.github.io/r-intro-tidyverse-gapminder/08-joins/index.html"/>
           <p:cNvSpPr txBox="1"/>
           <p:nvPr/>
         </p:nvSpPr>
         <p:spPr>
           <a:xfrm>
-            <a:off x="5318765" y="2631502"/>
-            <a:ext cx="2879699" cy="605294"/>
+            <a:off x="6646056" y="6283857"/>
+            <a:ext cx="3771866" cy="189796"/>
           </a:xfrm>
           <a:prstGeom prst="rect">
             <a:avLst/>
@@ -10928,7 +10952,7 @@
           </a:ln>
           <a:extLst>
             <a:ext uri="{C572A759-6A51-4108-AA02-DFA0A04FC94B}">
-              <ma14:wrappingTextBoxFlag xmlns:ma14="http://schemas.microsoft.com/office/mac/drawingml/2011/main" xmlns:a14="http://schemas.microsoft.com/office/drawing/2010/main" xmlns:m="http://schemas.openxmlformats.org/officeDocument/2006/math" xmlns="" val="1"/>
+              <ma14:wrappingTextBoxFlag xmlns="" xmlns:m="http://schemas.openxmlformats.org/officeDocument/2006/math" xmlns:a14="http://schemas.microsoft.com/office/drawing/2010/main" xmlns:ma14="http://schemas.microsoft.com/office/mac/drawingml/2011/main" val="1"/>
             </a:ext>
           </a:extLst>
         </p:spPr>
@@ -10939,10 +10963,56 @@
           <a:lstStyle/>
           <a:p>
             <a:r>
-              <a:rPr lang="en-US" sz="3600" dirty="0"/>
-              <a:t>Code examples</a:t>
-            </a:r>
-            <a:endParaRPr sz="3600" dirty="0"/>
+              <a:rPr sz="900"/>
+              <a:t>https://tavareshugo.github.io/r-intro-tidyverse-gapminder/08-joins/index.html</a:t>
+            </a:r>
+          </a:p>
+        </p:txBody>
+      </p:sp>
+      <p:sp>
+        <p:nvSpPr>
+          <p:cNvPr id="389" name="link to the license"/>
+          <p:cNvSpPr txBox="1"/>
+          <p:nvPr/>
+        </p:nvSpPr>
+        <p:spPr>
+          <a:xfrm>
+            <a:off x="11225603" y="6461931"/>
+            <a:ext cx="694101" cy="159018"/>
+          </a:xfrm>
+          <a:prstGeom prst="rect">
+            <a:avLst/>
+          </a:prstGeom>
+          <a:ln w="12700">
+            <a:miter lim="400000"/>
+          </a:ln>
+          <a:extLst>
+            <a:ext uri="{C572A759-6A51-4108-AA02-DFA0A04FC94B}">
+              <ma14:wrappingTextBoxFlag xmlns="" xmlns:m="http://schemas.openxmlformats.org/officeDocument/2006/math" xmlns:a14="http://schemas.microsoft.com/office/drawing/2010/main" xmlns:ma14="http://schemas.microsoft.com/office/mac/drawingml/2011/main" val="1"/>
+            </a:ext>
+          </a:extLst>
+        </p:spPr>
+        <p:txBody>
+          <a:bodyPr wrap="none" lIns="25400" tIns="25400" rIns="25400" bIns="25400" anchor="ctr">
+            <a:spAutoFit/>
+          </a:bodyPr>
+          <a:lstStyle>
+            <a:lvl1pPr algn="l" defTabSz="457200">
+              <a:defRPr sz="1400" u="sng">
+                <a:solidFill>
+                  <a:srgbClr val="23527C"/>
+                </a:solidFill>
+                <a:hlinkClick r:id="rId3"/>
+              </a:defRPr>
+            </a:lvl1pPr>
+          </a:lstStyle>
+          <a:p>
+            <a:r>
+              <a:rPr sz="700">
+                <a:hlinkClick r:id="rId3"/>
+              </a:rPr>
+              <a:t>link to the license</a:t>
+            </a:r>
           </a:p>
         </p:txBody>
       </p:sp>
@@ -10955,6 +11025,68 @@
 </file>
 
 <file path=ppt/slides/slide31.xml><?xml version="1.0" encoding="utf-8"?>
+<p:sld xmlns:a="http://schemas.openxmlformats.org/drawingml/2006/main" xmlns:r="http://schemas.openxmlformats.org/officeDocument/2006/relationships" xmlns:p="http://schemas.openxmlformats.org/presentationml/2006/main">
+  <p:cSld>
+    <p:spTree>
+      <p:nvGrpSpPr>
+        <p:cNvPr id="1" name=""/>
+        <p:cNvGrpSpPr/>
+        <p:nvPr/>
+      </p:nvGrpSpPr>
+      <p:grpSpPr>
+        <a:xfrm>
+          <a:off x="0" y="0"/>
+          <a:ext cx="0" cy="0"/>
+          <a:chOff x="0" y="0"/>
+          <a:chExt cx="0" cy="0"/>
+        </a:xfrm>
+      </p:grpSpPr>
+      <p:sp>
+        <p:nvSpPr>
+          <p:cNvPr id="391" name="back to code"/>
+          <p:cNvSpPr txBox="1"/>
+          <p:nvPr/>
+        </p:nvSpPr>
+        <p:spPr>
+          <a:xfrm>
+            <a:off x="5318765" y="2631502"/>
+            <a:ext cx="2879699" cy="605294"/>
+          </a:xfrm>
+          <a:prstGeom prst="rect">
+            <a:avLst/>
+          </a:prstGeom>
+          <a:ln w="12700">
+            <a:miter lim="400000"/>
+          </a:ln>
+          <a:extLst>
+            <a:ext uri="{C572A759-6A51-4108-AA02-DFA0A04FC94B}">
+              <ma14:wrappingTextBoxFlag xmlns="" xmlns:m="http://schemas.openxmlformats.org/officeDocument/2006/math" xmlns:a14="http://schemas.microsoft.com/office/drawing/2010/main" xmlns:ma14="http://schemas.microsoft.com/office/mac/drawingml/2011/main" val="1"/>
+            </a:ext>
+          </a:extLst>
+        </p:spPr>
+        <p:txBody>
+          <a:bodyPr wrap="none" lIns="25400" tIns="25400" rIns="25400" bIns="25400" anchor="ctr">
+            <a:spAutoFit/>
+          </a:bodyPr>
+          <a:lstStyle/>
+          <a:p>
+            <a:r>
+              <a:rPr lang="en-US" sz="3600" dirty="0"/>
+              <a:t>Code examples</a:t>
+            </a:r>
+            <a:endParaRPr sz="3600" dirty="0"/>
+          </a:p>
+        </p:txBody>
+      </p:sp>
+    </p:spTree>
+  </p:cSld>
+  <p:clrMapOvr>
+    <a:masterClrMapping/>
+  </p:clrMapOvr>
+</p:sld>
+</file>
+
+<file path=ppt/slides/slide32.xml><?xml version="1.0" encoding="utf-8"?>
 <p:sld xmlns:a="http://schemas.openxmlformats.org/drawingml/2006/main" xmlns:r="http://schemas.openxmlformats.org/officeDocument/2006/relationships" xmlns:p="http://schemas.openxmlformats.org/presentationml/2006/main">
   <p:cSld>
     <p:spTree>
@@ -11117,20 +11249,147 @@
       </p:grpSpPr>
       <p:sp>
         <p:nvSpPr>
-          <p:cNvPr id="2" name="TextBox 1">
-            <a:extLst>
-              <a:ext uri="{FF2B5EF4-FFF2-40B4-BE49-F238E27FC236}">
-                <a16:creationId xmlns:a16="http://schemas.microsoft.com/office/drawing/2014/main" id="{BF7D0C15-9868-0394-584D-B1F548C00E08}"/>
-              </a:ext>
-            </a:extLst>
-          </p:cNvPr>
+          <p:cNvPr id="314" name="install.packages(‘nycflights13’)"/>
           <p:cNvSpPr txBox="1"/>
           <p:nvPr/>
         </p:nvSpPr>
         <p:spPr>
           <a:xfrm>
-            <a:off x="5550946" y="333487"/>
-            <a:ext cx="6433073" cy="369332"/>
+            <a:off x="166572" y="-39434"/>
+            <a:ext cx="3216778" cy="666849"/>
+          </a:xfrm>
+          <a:prstGeom prst="rect">
+            <a:avLst/>
+          </a:prstGeom>
+          <a:ln w="12700">
+            <a:miter lim="400000"/>
+          </a:ln>
+          <a:extLst>
+            <a:ext uri="{C572A759-6A51-4108-AA02-DFA0A04FC94B}">
+              <ma14:wrappingTextBoxFlag xmlns="" xmlns:m="http://schemas.openxmlformats.org/officeDocument/2006/math" xmlns:a14="http://schemas.microsoft.com/office/drawing/2010/main" xmlns:ma14="http://schemas.microsoft.com/office/mac/drawingml/2011/main" val="1"/>
+            </a:ext>
+          </a:extLst>
+        </p:spPr>
+        <p:txBody>
+          <a:bodyPr wrap="none" lIns="25400" tIns="25400" rIns="25400" bIns="25400" anchor="ctr">
+            <a:spAutoFit/>
+          </a:bodyPr>
+          <a:lstStyle>
+            <a:lvl1pPr>
+              <a:defRPr sz="4000"/>
+            </a:lvl1pPr>
+          </a:lstStyle>
+          <a:p>
+            <a:r>
+              <a:rPr sz="2000" dirty="0" err="1"/>
+              <a:t>install.packages</a:t>
+            </a:r>
+            <a:r>
+              <a:rPr sz="2000" dirty="0"/>
+              <a:t>(‘nycflights13’)</a:t>
+            </a:r>
+            <a:endParaRPr lang="en-US" sz="2000" dirty="0"/>
+          </a:p>
+          <a:p>
+            <a:r>
+              <a:rPr lang="en-US" sz="2000" dirty="0"/>
+              <a:t>library(nycflights13)</a:t>
+            </a:r>
+            <a:endParaRPr sz="2000" dirty="0"/>
+          </a:p>
+        </p:txBody>
+      </p:sp>
+      <p:sp>
+        <p:nvSpPr>
+          <p:cNvPr id="315" name="data(ToothGrowth)"/>
+          <p:cNvSpPr txBox="1"/>
+          <p:nvPr/>
+        </p:nvSpPr>
+        <p:spPr>
+          <a:xfrm>
+            <a:off x="780182" y="1570088"/>
+            <a:ext cx="51361" cy="328295"/>
+          </a:xfrm>
+          <a:prstGeom prst="rect">
+            <a:avLst/>
+          </a:prstGeom>
+          <a:ln w="12700">
+            <a:miter lim="400000"/>
+          </a:ln>
+          <a:extLst>
+            <a:ext uri="{C572A759-6A51-4108-AA02-DFA0A04FC94B}">
+              <ma14:wrappingTextBoxFlag xmlns="" xmlns:m="http://schemas.openxmlformats.org/officeDocument/2006/math" xmlns:a14="http://schemas.microsoft.com/office/drawing/2010/main" xmlns:ma14="http://schemas.microsoft.com/office/mac/drawingml/2011/main" val="1"/>
+            </a:ext>
+          </a:extLst>
+        </p:spPr>
+        <p:txBody>
+          <a:bodyPr wrap="none" lIns="25400" tIns="25400" rIns="25400" bIns="25400" anchor="ctr">
+            <a:spAutoFit/>
+          </a:bodyPr>
+          <a:lstStyle>
+            <a:lvl1pPr>
+              <a:defRPr sz="3600"/>
+            </a:lvl1pPr>
+          </a:lstStyle>
+          <a:p>
+            <a:endParaRPr sz="1800" dirty="0"/>
+          </a:p>
+        </p:txBody>
+      </p:sp>
+      <p:sp>
+        <p:nvSpPr>
+          <p:cNvPr id="316" name="How many observations for each treatment?…"/>
+          <p:cNvSpPr txBox="1"/>
+          <p:nvPr/>
+        </p:nvSpPr>
+        <p:spPr>
+          <a:xfrm>
+            <a:off x="3585310" y="3236384"/>
+            <a:ext cx="166712" cy="282129"/>
+          </a:xfrm>
+          <a:prstGeom prst="rect">
+            <a:avLst/>
+          </a:prstGeom>
+          <a:ln w="12700">
+            <a:miter lim="400000"/>
+          </a:ln>
+          <a:extLst>
+            <a:ext uri="{C572A759-6A51-4108-AA02-DFA0A04FC94B}">
+              <ma14:wrappingTextBoxFlag xmlns="" xmlns:m="http://schemas.openxmlformats.org/officeDocument/2006/math" xmlns:a14="http://schemas.microsoft.com/office/drawing/2010/main" xmlns:ma14="http://schemas.microsoft.com/office/mac/drawingml/2011/main" val="1"/>
+            </a:ext>
+          </a:extLst>
+        </p:spPr>
+        <p:txBody>
+          <a:bodyPr wrap="none" lIns="25400" tIns="25400" rIns="25400" bIns="25400" anchor="ctr">
+            <a:spAutoFit/>
+          </a:bodyPr>
+          <a:lstStyle/>
+          <a:p>
+            <a:pPr marL="114300" indent="-114300">
+              <a:buSzPct val="100000"/>
+              <a:buChar char="•"/>
+              <a:defRPr sz="3000"/>
+            </a:pPr>
+            <a:endParaRPr sz="1500" dirty="0"/>
+          </a:p>
+        </p:txBody>
+      </p:sp>
+      <p:sp>
+        <p:nvSpPr>
+          <p:cNvPr id="3" name="TextBox 2">
+            <a:extLst>
+              <a:ext uri="{FF2B5EF4-FFF2-40B4-BE49-F238E27FC236}">
+                <a16:creationId xmlns:a16="http://schemas.microsoft.com/office/drawing/2014/main" id="{B480CC13-B99C-66C6-65F4-DA3A79B21A2F}"/>
+              </a:ext>
+            </a:extLst>
+          </p:cNvPr>
+          <p:cNvSpPr txBox="1"/>
+          <p:nvPr/>
+        </p:nvSpPr>
+        <p:spPr>
+          <a:xfrm>
+            <a:off x="5308485" y="202740"/>
+            <a:ext cx="1683986" cy="369332"/>
           </a:xfrm>
           <a:prstGeom prst="rect">
             <a:avLst/>
@@ -11145,17 +11404,77 @@
           <a:p>
             <a:r>
               <a:rPr lang="en-US" dirty="0"/>
-              <a:t>Today’s Goals</a:t>
-            </a:r>
-          </a:p>
-        </p:txBody>
-      </p:sp>
-      <p:sp>
-        <p:nvSpPr>
-          <p:cNvPr id="3" name="TextBox 2">
-            <a:extLst>
-              <a:ext uri="{FF2B5EF4-FFF2-40B4-BE49-F238E27FC236}">
-                <a16:creationId xmlns:a16="http://schemas.microsoft.com/office/drawing/2014/main" id="{4D2F2DB7-B785-759B-32FA-605A8FA354E1}"/>
+              <a:t>Practice</a:t>
+            </a:r>
+          </a:p>
+        </p:txBody>
+      </p:sp>
+      <p:pic>
+        <p:nvPicPr>
+          <p:cNvPr id="5" name="Picture 4">
+            <a:extLst>
+              <a:ext uri="{FF2B5EF4-FFF2-40B4-BE49-F238E27FC236}">
+                <a16:creationId xmlns:a16="http://schemas.microsoft.com/office/drawing/2014/main" id="{434F984D-EC51-95A9-D2F1-6F72E403D109}"/>
+              </a:ext>
+            </a:extLst>
+          </p:cNvPr>
+          <p:cNvPicPr>
+            <a:picLocks noChangeAspect="1"/>
+          </p:cNvPicPr>
+          <p:nvPr/>
+        </p:nvPicPr>
+        <p:blipFill>
+          <a:blip r:embed="rId2"/>
+          <a:stretch>
+            <a:fillRect/>
+          </a:stretch>
+        </p:blipFill>
+        <p:spPr>
+          <a:xfrm>
+            <a:off x="3438655" y="1144586"/>
+            <a:ext cx="7772400" cy="1585305"/>
+          </a:xfrm>
+          <a:prstGeom prst="rect">
+            <a:avLst/>
+          </a:prstGeom>
+        </p:spPr>
+      </p:pic>
+      <p:pic>
+        <p:nvPicPr>
+          <p:cNvPr id="6" name="Picture 5">
+            <a:extLst>
+              <a:ext uri="{FF2B5EF4-FFF2-40B4-BE49-F238E27FC236}">
+                <a16:creationId xmlns:a16="http://schemas.microsoft.com/office/drawing/2014/main" id="{A8D5D959-2E35-7386-C195-325470631E31}"/>
+              </a:ext>
+            </a:extLst>
+          </p:cNvPr>
+          <p:cNvPicPr>
+            <a:picLocks noChangeAspect="1"/>
+          </p:cNvPicPr>
+          <p:nvPr/>
+        </p:nvPicPr>
+        <p:blipFill>
+          <a:blip r:embed="rId3"/>
+          <a:stretch>
+            <a:fillRect/>
+          </a:stretch>
+        </p:blipFill>
+        <p:spPr>
+          <a:xfrm>
+            <a:off x="3438655" y="2972088"/>
+            <a:ext cx="7772400" cy="1854687"/>
+          </a:xfrm>
+          <a:prstGeom prst="rect">
+            <a:avLst/>
+          </a:prstGeom>
+        </p:spPr>
+      </p:pic>
+      <p:sp>
+        <p:nvSpPr>
+          <p:cNvPr id="7" name="TextBox 6">
+            <a:extLst>
+              <a:ext uri="{FF2B5EF4-FFF2-40B4-BE49-F238E27FC236}">
+                <a16:creationId xmlns:a16="http://schemas.microsoft.com/office/drawing/2014/main" id="{1EEBD7FF-A83D-B147-E7F3-1E9F8B336E5A}"/>
               </a:ext>
             </a:extLst>
           </p:cNvPr>
@@ -11164,8 +11483,8 @@
         </p:nvSpPr>
         <p:spPr>
           <a:xfrm>
-            <a:off x="4442908" y="2323651"/>
-            <a:ext cx="8186569" cy="1200329"/>
+            <a:off x="484432" y="728005"/>
+            <a:ext cx="2018367" cy="5016758"/>
           </a:xfrm>
           <a:prstGeom prst="rect">
             <a:avLst/>
@@ -11178,43 +11497,86 @@
           </a:bodyPr>
           <a:lstStyle/>
           <a:p>
-            <a:pPr marL="342900" indent="-342900">
-              <a:buAutoNum type="arabicPeriod"/>
+            <a:pPr marL="285750" indent="-285750">
+              <a:buFont typeface="Arial" panose="020B0604020202020204" pitchFamily="34" charset="0"/>
+              <a:buChar char="•"/>
             </a:pPr>
             <a:r>
-              <a:rPr lang="en-US" dirty="0"/>
-              <a:t>Tidy Data (wide vs long format of data)</a:t>
-            </a:r>
-          </a:p>
-          <a:p>
-            <a:pPr marL="342900" indent="-342900">
-              <a:buAutoNum type="arabicPeriod"/>
+              <a:rPr lang="en-US" sz="1600" dirty="0"/>
+              <a:t>How many flights originated at each airport</a:t>
+            </a:r>
+          </a:p>
+          <a:p>
+            <a:pPr marL="285750" indent="-285750">
+              <a:buFont typeface="Arial" panose="020B0604020202020204" pitchFamily="34" charset="0"/>
+              <a:buChar char="•"/>
             </a:pPr>
-            <a:r>
-              <a:rPr lang="en-US" dirty="0"/>
-              <a:t>Plotting</a:t>
-            </a:r>
-          </a:p>
-          <a:p>
-            <a:pPr marL="342900" indent="-342900">
-              <a:buAutoNum type="arabicPeriod"/>
+            <a:endParaRPr lang="en-US" sz="1600" dirty="0"/>
+          </a:p>
+          <a:p>
+            <a:pPr marL="285750" indent="-285750">
+              <a:buFont typeface="Arial" panose="020B0604020202020204" pitchFamily="34" charset="0"/>
+              <a:buChar char="•"/>
             </a:pPr>
             <a:r>
-              <a:rPr lang="en-US" dirty="0"/>
-              <a:t>Merging and joining (relational data)</a:t>
-            </a:r>
-          </a:p>
-          <a:p>
-            <a:endParaRPr lang="en-US" dirty="0"/>
+              <a:rPr lang="en-US" sz="1600" dirty="0"/>
+              <a:t>How long was the average flight that left EWR (Newark)</a:t>
+            </a:r>
+          </a:p>
+          <a:p>
+            <a:pPr marL="285750" indent="-285750">
+              <a:buFont typeface="Arial" panose="020B0604020202020204" pitchFamily="34" charset="0"/>
+              <a:buChar char="•"/>
+            </a:pPr>
+            <a:endParaRPr lang="en-US" sz="1600" dirty="0"/>
+          </a:p>
+          <a:p>
+            <a:pPr marL="285750" indent="-285750">
+              <a:buFont typeface="Arial" panose="020B0604020202020204" pitchFamily="34" charset="0"/>
+              <a:buChar char="•"/>
+            </a:pPr>
+            <a:r>
+              <a:rPr lang="en-US" sz="1600" dirty="0"/>
+              <a:t>What airport had the longest average arrival delay </a:t>
+            </a:r>
+          </a:p>
+          <a:p>
+            <a:pPr marL="285750" indent="-285750">
+              <a:buFont typeface="Arial" panose="020B0604020202020204" pitchFamily="34" charset="0"/>
+              <a:buChar char="•"/>
+            </a:pPr>
+            <a:endParaRPr lang="en-US" sz="1600" dirty="0"/>
+          </a:p>
+          <a:p>
+            <a:pPr marL="285750" indent="-285750">
+              <a:buFont typeface="Arial" panose="020B0604020202020204" pitchFamily="34" charset="0"/>
+              <a:buChar char="•"/>
+            </a:pPr>
+            <a:r>
+              <a:rPr lang="en-US" sz="1600" dirty="0"/>
+              <a:t>Which carrier had the most departure delays (&gt; 0)</a:t>
+            </a:r>
+          </a:p>
+          <a:p>
+            <a:pPr marL="285750" indent="-285750">
+              <a:buFont typeface="Arial" panose="020B0604020202020204" pitchFamily="34" charset="0"/>
+              <a:buChar char="•"/>
+            </a:pPr>
+            <a:endParaRPr lang="en-US" sz="1600" dirty="0"/>
+          </a:p>
+          <a:p>
+            <a:pPr marL="285750" indent="-285750">
+              <a:buFont typeface="Arial" panose="020B0604020202020204" pitchFamily="34" charset="0"/>
+              <a:buChar char="•"/>
+            </a:pPr>
+            <a:r>
+              <a:rPr lang="en-US" sz="1600" dirty="0"/>
+              <a:t>How many flights per month</a:t>
+            </a:r>
           </a:p>
         </p:txBody>
       </p:sp>
     </p:spTree>
-    <p:extLst>
-      <p:ext uri="{BB962C8B-B14F-4D97-AF65-F5344CB8AC3E}">
-        <p14:creationId xmlns:p14="http://schemas.microsoft.com/office/powerpoint/2010/main" val="3914751174"/>
-      </p:ext>
-    </p:extLst>
   </p:cSld>
   <p:clrMapOvr>
     <a:masterClrMapping/>
@@ -11241,274 +11603,104 @@
       </p:grpSpPr>
       <p:sp>
         <p:nvSpPr>
-          <p:cNvPr id="318" name="Tidy Data"/>
+          <p:cNvPr id="2" name="TextBox 1">
+            <a:extLst>
+              <a:ext uri="{FF2B5EF4-FFF2-40B4-BE49-F238E27FC236}">
+                <a16:creationId xmlns:a16="http://schemas.microsoft.com/office/drawing/2014/main" id="{BF7D0C15-9868-0394-584D-B1F548C00E08}"/>
+              </a:ext>
+            </a:extLst>
+          </p:cNvPr>
           <p:cNvSpPr txBox="1"/>
           <p:nvPr/>
         </p:nvSpPr>
         <p:spPr>
           <a:xfrm>
-            <a:off x="5409819" y="177130"/>
-            <a:ext cx="1382879" cy="420628"/>
-          </a:xfrm>
-          <a:prstGeom prst="rect">
-            <a:avLst/>
-          </a:prstGeom>
-          <a:ln w="12700">
-            <a:miter lim="400000"/>
-          </a:ln>
-          <a:extLst>
-            <a:ext uri="{C572A759-6A51-4108-AA02-DFA0A04FC94B}">
-              <ma14:wrappingTextBoxFlag xmlns:ma14="http://schemas.microsoft.com/office/mac/drawingml/2011/main" xmlns:a14="http://schemas.microsoft.com/office/drawing/2010/main" xmlns:m="http://schemas.openxmlformats.org/officeDocument/2006/math" xmlns="" val="1"/>
-            </a:ext>
-          </a:extLst>
-        </p:spPr>
-        <p:txBody>
-          <a:bodyPr wrap="none" lIns="25400" tIns="25400" rIns="25400" bIns="25400" anchor="ctr">
-            <a:spAutoFit/>
-          </a:bodyPr>
-          <a:lstStyle>
-            <a:lvl1pPr>
-              <a:defRPr sz="4800">
-                <a:latin typeface="Avenir Next Regular"/>
-                <a:ea typeface="Avenir Next Regular"/>
-                <a:cs typeface="Avenir Next Regular"/>
-                <a:sym typeface="Avenir Next Regular"/>
-              </a:defRPr>
-            </a:lvl1pPr>
-          </a:lstStyle>
-          <a:p>
-            <a:r>
-              <a:rPr sz="2400"/>
-              <a:t>Tidy Data</a:t>
-            </a:r>
-          </a:p>
-        </p:txBody>
-      </p:sp>
-      <p:pic>
-        <p:nvPicPr>
-          <p:cNvPr id="319" name="Image" descr="Image"/>
-          <p:cNvPicPr>
-            <a:picLocks noChangeAspect="1"/>
-          </p:cNvPicPr>
-          <p:nvPr/>
-        </p:nvPicPr>
-        <p:blipFill>
-          <a:blip r:embed="rId2"/>
-          <a:stretch>
-            <a:fillRect/>
-          </a:stretch>
-        </p:blipFill>
-        <p:spPr>
-          <a:xfrm>
-            <a:off x="489345" y="1079287"/>
-            <a:ext cx="5125620" cy="1521018"/>
-          </a:xfrm>
-          <a:prstGeom prst="rect">
-            <a:avLst/>
-          </a:prstGeom>
-          <a:ln w="12700">
-            <a:miter lim="400000"/>
-          </a:ln>
-        </p:spPr>
-      </p:pic>
-      <p:pic>
-        <p:nvPicPr>
-          <p:cNvPr id="320" name="Image" descr="Image"/>
-          <p:cNvPicPr>
-            <a:picLocks noChangeAspect="1"/>
-          </p:cNvPicPr>
-          <p:nvPr/>
-        </p:nvPicPr>
-        <p:blipFill>
-          <a:blip r:embed="rId3"/>
-          <a:stretch>
-            <a:fillRect/>
-          </a:stretch>
-        </p:blipFill>
-        <p:spPr>
-          <a:xfrm>
-            <a:off x="237077" y="2297728"/>
-            <a:ext cx="6491694" cy="2540985"/>
-          </a:xfrm>
-          <a:prstGeom prst="rect">
-            <a:avLst/>
-          </a:prstGeom>
-          <a:ln w="12700">
-            <a:miter lim="400000"/>
-          </a:ln>
-        </p:spPr>
-      </p:pic>
-      <p:sp>
-        <p:nvSpPr>
-          <p:cNvPr id="321" name="https://r4ds.had.co.nz/tidy-data.html"/>
-          <p:cNvSpPr txBox="1"/>
-          <p:nvPr/>
-        </p:nvSpPr>
-        <p:spPr>
-          <a:xfrm>
-            <a:off x="9346138" y="6221681"/>
-            <a:ext cx="1812997" cy="189796"/>
-          </a:xfrm>
-          <a:prstGeom prst="rect">
-            <a:avLst/>
-          </a:prstGeom>
-          <a:ln w="12700">
-            <a:miter lim="400000"/>
-          </a:ln>
-          <a:extLst>
-            <a:ext uri="{C572A759-6A51-4108-AA02-DFA0A04FC94B}">
-              <ma14:wrappingTextBoxFlag xmlns:ma14="http://schemas.microsoft.com/office/mac/drawingml/2011/main" xmlns:a14="http://schemas.microsoft.com/office/drawing/2010/main" xmlns:m="http://schemas.openxmlformats.org/officeDocument/2006/math" xmlns="" val="1"/>
-            </a:ext>
-          </a:extLst>
-        </p:spPr>
-        <p:txBody>
-          <a:bodyPr wrap="none" lIns="25400" tIns="25400" rIns="25400" bIns="25400" anchor="ctr">
+            <a:off x="5550946" y="333487"/>
+            <a:ext cx="6433073" cy="369332"/>
+          </a:xfrm>
+          <a:prstGeom prst="rect">
+            <a:avLst/>
+          </a:prstGeom>
+          <a:noFill/>
+        </p:spPr>
+        <p:txBody>
+          <a:bodyPr wrap="square" rtlCol="0">
             <a:spAutoFit/>
           </a:bodyPr>
           <a:lstStyle/>
           <a:p>
             <a:r>
-              <a:rPr sz="900"/>
-              <a:t>https://r4ds.had.co.nz/tidy-data.html</a:t>
-            </a:r>
-          </a:p>
-        </p:txBody>
-      </p:sp>
-      <p:sp>
-        <p:nvSpPr>
-          <p:cNvPr id="322" name="Not Tidy - wide"/>
+              <a:rPr lang="en-US" dirty="0"/>
+              <a:t>Today’s Goals</a:t>
+            </a:r>
+          </a:p>
+        </p:txBody>
+      </p:sp>
+      <p:sp>
+        <p:nvSpPr>
+          <p:cNvPr id="3" name="TextBox 2">
+            <a:extLst>
+              <a:ext uri="{FF2B5EF4-FFF2-40B4-BE49-F238E27FC236}">
+                <a16:creationId xmlns:a16="http://schemas.microsoft.com/office/drawing/2014/main" id="{4D2F2DB7-B785-759B-32FA-605A8FA354E1}"/>
+              </a:ext>
+            </a:extLst>
+          </p:cNvPr>
           <p:cNvSpPr txBox="1"/>
           <p:nvPr/>
         </p:nvSpPr>
         <p:spPr>
           <a:xfrm>
-            <a:off x="8432134" y="1102077"/>
-            <a:ext cx="1505220" cy="328295"/>
-          </a:xfrm>
-          <a:prstGeom prst="rect">
-            <a:avLst/>
-          </a:prstGeom>
-          <a:ln w="12700">
-            <a:miter lim="400000"/>
-          </a:ln>
-          <a:extLst>
-            <a:ext uri="{C572A759-6A51-4108-AA02-DFA0A04FC94B}">
-              <ma14:wrappingTextBoxFlag xmlns:ma14="http://schemas.microsoft.com/office/mac/drawingml/2011/main" xmlns:a14="http://schemas.microsoft.com/office/drawing/2010/main" xmlns:m="http://schemas.openxmlformats.org/officeDocument/2006/math" xmlns="" val="1"/>
-            </a:ext>
-          </a:extLst>
-        </p:spPr>
-        <p:txBody>
-          <a:bodyPr wrap="none" lIns="25400" tIns="25400" rIns="25400" bIns="25400" anchor="ctr">
+            <a:off x="4442908" y="2323651"/>
+            <a:ext cx="8186569" cy="1200329"/>
+          </a:xfrm>
+          <a:prstGeom prst="rect">
+            <a:avLst/>
+          </a:prstGeom>
+          <a:noFill/>
+        </p:spPr>
+        <p:txBody>
+          <a:bodyPr wrap="square" rtlCol="0">
             <a:spAutoFit/>
           </a:bodyPr>
-          <a:lstStyle>
-            <a:lvl1pPr>
-              <a:defRPr sz="3600" b="1"/>
-            </a:lvl1pPr>
-          </a:lstStyle>
-          <a:p>
-            <a:r>
-              <a:rPr sz="1800"/>
-              <a:t>Not Tidy - wide</a:t>
-            </a:r>
-          </a:p>
-        </p:txBody>
-      </p:sp>
-      <p:sp>
-        <p:nvSpPr>
-          <p:cNvPr id="323" name="Tidy - long"/>
-          <p:cNvSpPr txBox="1"/>
-          <p:nvPr/>
-        </p:nvSpPr>
-        <p:spPr>
-          <a:xfrm>
-            <a:off x="9825690" y="4412340"/>
-            <a:ext cx="1041952" cy="328295"/>
-          </a:xfrm>
-          <a:prstGeom prst="rect">
-            <a:avLst/>
-          </a:prstGeom>
-          <a:ln w="12700">
-            <a:miter lim="400000"/>
-          </a:ln>
-          <a:extLst>
-            <a:ext uri="{C572A759-6A51-4108-AA02-DFA0A04FC94B}">
-              <ma14:wrappingTextBoxFlag xmlns:ma14="http://schemas.microsoft.com/office/mac/drawingml/2011/main" xmlns:a14="http://schemas.microsoft.com/office/drawing/2010/main" xmlns:m="http://schemas.openxmlformats.org/officeDocument/2006/math" xmlns="" val="1"/>
-            </a:ext>
-          </a:extLst>
-        </p:spPr>
-        <p:txBody>
-          <a:bodyPr wrap="none" lIns="25400" tIns="25400" rIns="25400" bIns="25400" anchor="ctr">
-            <a:spAutoFit/>
-          </a:bodyPr>
-          <a:lstStyle>
-            <a:lvl1pPr>
-              <a:defRPr sz="3600" b="1"/>
-            </a:lvl1pPr>
-          </a:lstStyle>
-          <a:p>
-            <a:r>
-              <a:rPr sz="1800"/>
-              <a:t>Tidy - long</a:t>
-            </a:r>
-          </a:p>
-        </p:txBody>
-      </p:sp>
-      <p:pic>
-        <p:nvPicPr>
-          <p:cNvPr id="324" name="Image" descr="Image"/>
-          <p:cNvPicPr>
-            <a:picLocks noChangeAspect="1"/>
-          </p:cNvPicPr>
-          <p:nvPr/>
-        </p:nvPicPr>
-        <p:blipFill>
-          <a:blip r:embed="rId4"/>
-          <a:stretch>
-            <a:fillRect/>
-          </a:stretch>
-        </p:blipFill>
-        <p:spPr>
-          <a:xfrm>
-            <a:off x="7617571" y="1455154"/>
-            <a:ext cx="3452745" cy="1496583"/>
-          </a:xfrm>
-          <a:prstGeom prst="rect">
-            <a:avLst/>
-          </a:prstGeom>
-          <a:ln w="12700">
-            <a:miter lim="400000"/>
-          </a:ln>
-        </p:spPr>
-      </p:pic>
-      <p:pic>
-        <p:nvPicPr>
-          <p:cNvPr id="325" name="Image" descr="Image"/>
-          <p:cNvPicPr>
-            <a:picLocks noChangeAspect="1"/>
-          </p:cNvPicPr>
-          <p:nvPr/>
-        </p:nvPicPr>
-        <p:blipFill>
-          <a:blip r:embed="rId5"/>
-          <a:stretch>
-            <a:fillRect/>
-          </a:stretch>
-        </p:blipFill>
-        <p:spPr>
-          <a:xfrm>
-            <a:off x="7562460" y="3109826"/>
-            <a:ext cx="2068241" cy="2933323"/>
-          </a:xfrm>
-          <a:prstGeom prst="rect">
-            <a:avLst/>
-          </a:prstGeom>
-          <a:ln w="12700">
-            <a:miter lim="400000"/>
-          </a:ln>
-        </p:spPr>
-      </p:pic>
+          <a:lstStyle/>
+          <a:p>
+            <a:pPr marL="342900" indent="-342900">
+              <a:buAutoNum type="arabicPeriod"/>
+            </a:pPr>
+            <a:r>
+              <a:rPr lang="en-US" dirty="0"/>
+              <a:t>Tidy Data (wide vs long format of data)</a:t>
+            </a:r>
+          </a:p>
+          <a:p>
+            <a:pPr marL="342900" indent="-342900">
+              <a:buAutoNum type="arabicPeriod"/>
+            </a:pPr>
+            <a:r>
+              <a:rPr lang="en-US" dirty="0"/>
+              <a:t>Plotting</a:t>
+            </a:r>
+          </a:p>
+          <a:p>
+            <a:pPr marL="342900" indent="-342900">
+              <a:buAutoNum type="arabicPeriod"/>
+            </a:pPr>
+            <a:r>
+              <a:rPr lang="en-US" dirty="0"/>
+              <a:t>Merging and joining (relational data)</a:t>
+            </a:r>
+          </a:p>
+          <a:p>
+            <a:endParaRPr lang="en-US" dirty="0"/>
+          </a:p>
+        </p:txBody>
+      </p:sp>
     </p:spTree>
+    <p:extLst>
+      <p:ext uri="{BB962C8B-B14F-4D97-AF65-F5344CB8AC3E}">
+        <p14:creationId xmlns:p14="http://schemas.microsoft.com/office/powerpoint/2010/main" val="3914751174"/>
+      </p:ext>
+    </p:extLst>
   </p:cSld>
   <p:clrMapOvr>
     <a:masterClrMapping/>
@@ -11535,14 +11727,14 @@
       </p:grpSpPr>
       <p:sp>
         <p:nvSpPr>
-          <p:cNvPr id="327" name="Why should data be Tidy"/>
+          <p:cNvPr id="318" name="Tidy Data"/>
           <p:cNvSpPr txBox="1"/>
           <p:nvPr/>
         </p:nvSpPr>
         <p:spPr>
           <a:xfrm>
-            <a:off x="4162500" y="895012"/>
-            <a:ext cx="3200941" cy="420628"/>
+            <a:off x="5409819" y="177130"/>
+            <a:ext cx="1382879" cy="420628"/>
           </a:xfrm>
           <a:prstGeom prst="rect">
             <a:avLst/>
@@ -11552,7 +11744,7 @@
           </a:ln>
           <a:extLst>
             <a:ext uri="{C572A759-6A51-4108-AA02-DFA0A04FC94B}">
-              <ma14:wrappingTextBoxFlag xmlns:ma14="http://schemas.microsoft.com/office/mac/drawingml/2011/main" xmlns:a14="http://schemas.microsoft.com/office/drawing/2010/main" xmlns:m="http://schemas.openxmlformats.org/officeDocument/2006/math" xmlns="" val="1"/>
+              <ma14:wrappingTextBoxFlag xmlns="" xmlns:m="http://schemas.openxmlformats.org/officeDocument/2006/math" xmlns:a14="http://schemas.microsoft.com/office/drawing/2010/main" xmlns:ma14="http://schemas.microsoft.com/office/mac/drawingml/2011/main" val="1"/>
             </a:ext>
           </a:extLst>
         </p:spPr>
@@ -11561,28 +11753,87 @@
             <a:spAutoFit/>
           </a:bodyPr>
           <a:lstStyle>
-            <a:lvl1pPr algn="l">
-              <a:defRPr sz="4800" b="1"/>
+            <a:lvl1pPr>
+              <a:defRPr sz="4800">
+                <a:latin typeface="Avenir Next Regular"/>
+                <a:ea typeface="Avenir Next Regular"/>
+                <a:cs typeface="Avenir Next Regular"/>
+                <a:sym typeface="Avenir Next Regular"/>
+              </a:defRPr>
             </a:lvl1pPr>
           </a:lstStyle>
           <a:p>
             <a:r>
-              <a:rPr sz="2400" dirty="0"/>
-              <a:t>Why should data be Tidy</a:t>
-            </a:r>
-          </a:p>
-        </p:txBody>
-      </p:sp>
-      <p:sp>
-        <p:nvSpPr>
-          <p:cNvPr id="328" name="Consistency - easier if you always know how the data should be represented…"/>
+              <a:rPr sz="2400"/>
+              <a:t>Tidy Data</a:t>
+            </a:r>
+          </a:p>
+        </p:txBody>
+      </p:sp>
+      <p:pic>
+        <p:nvPicPr>
+          <p:cNvPr id="319" name="Image" descr="Image"/>
+          <p:cNvPicPr>
+            <a:picLocks noChangeAspect="1"/>
+          </p:cNvPicPr>
+          <p:nvPr/>
+        </p:nvPicPr>
+        <p:blipFill>
+          <a:blip r:embed="rId2"/>
+          <a:stretch>
+            <a:fillRect/>
+          </a:stretch>
+        </p:blipFill>
+        <p:spPr>
+          <a:xfrm>
+            <a:off x="474830" y="776710"/>
+            <a:ext cx="5125620" cy="1521018"/>
+          </a:xfrm>
+          <a:prstGeom prst="rect">
+            <a:avLst/>
+          </a:prstGeom>
+          <a:ln w="12700">
+            <a:miter lim="400000"/>
+          </a:ln>
+        </p:spPr>
+      </p:pic>
+      <p:pic>
+        <p:nvPicPr>
+          <p:cNvPr id="320" name="Image" descr="Image"/>
+          <p:cNvPicPr>
+            <a:picLocks noChangeAspect="1"/>
+          </p:cNvPicPr>
+          <p:nvPr/>
+        </p:nvPicPr>
+        <p:blipFill>
+          <a:blip r:embed="rId3"/>
+          <a:stretch>
+            <a:fillRect/>
+          </a:stretch>
+        </p:blipFill>
+        <p:spPr>
+          <a:xfrm>
+            <a:off x="117317" y="2602528"/>
+            <a:ext cx="6491694" cy="2540985"/>
+          </a:xfrm>
+          <a:prstGeom prst="rect">
+            <a:avLst/>
+          </a:prstGeom>
+          <a:ln w="12700">
+            <a:miter lim="400000"/>
+          </a:ln>
+        </p:spPr>
+      </p:pic>
+      <p:sp>
+        <p:nvSpPr>
+          <p:cNvPr id="321" name="https://r4ds.had.co.nz/tidy-data.html"/>
           <p:cNvSpPr txBox="1"/>
           <p:nvPr/>
         </p:nvSpPr>
         <p:spPr>
           <a:xfrm>
-            <a:off x="742760" y="2007347"/>
-            <a:ext cx="10419968" cy="1287532"/>
+            <a:off x="9346138" y="6221681"/>
+            <a:ext cx="1812997" cy="189796"/>
           </a:xfrm>
           <a:prstGeom prst="rect">
             <a:avLst/>
@@ -11592,7 +11843,7 @@
           </a:ln>
           <a:extLst>
             <a:ext uri="{C572A759-6A51-4108-AA02-DFA0A04FC94B}">
-              <ma14:wrappingTextBoxFlag xmlns:ma14="http://schemas.microsoft.com/office/mac/drawingml/2011/main" xmlns:a14="http://schemas.microsoft.com/office/drawing/2010/main" xmlns:m="http://schemas.openxmlformats.org/officeDocument/2006/math" xmlns="" val="1"/>
+              <ma14:wrappingTextBoxFlag xmlns="" xmlns:m="http://schemas.openxmlformats.org/officeDocument/2006/math" xmlns:a14="http://schemas.microsoft.com/office/drawing/2010/main" xmlns:ma14="http://schemas.microsoft.com/office/mac/drawingml/2011/main" val="1"/>
             </a:ext>
           </a:extLst>
         </p:spPr>
@@ -11602,75 +11853,28 @@
           </a:bodyPr>
           <a:lstStyle/>
           <a:p>
-            <a:pPr marL="152400" indent="-152400">
-              <a:spcBef>
-                <a:spcPts val="500"/>
-              </a:spcBef>
-              <a:buSzPct val="123000"/>
-              <a:buChar char="•"/>
-              <a:defRPr sz="3600"/>
-            </a:pPr>
-            <a:r>
-              <a:rPr sz="2400" dirty="0"/>
-              <a:t>Consistency - easier if you always know how the data should be represented</a:t>
-            </a:r>
-          </a:p>
-          <a:p>
-            <a:pPr marL="152400" indent="-152400">
-              <a:spcBef>
-                <a:spcPts val="500"/>
-              </a:spcBef>
-              <a:buSzPct val="123000"/>
-              <a:buChar char="•"/>
-              <a:defRPr sz="3600"/>
-            </a:pPr>
-            <a:r>
-              <a:rPr sz="2400" dirty="0"/>
-              <a:t>Ease - Works seamlessly with tools in the </a:t>
-            </a:r>
-            <a:r>
-              <a:rPr sz="2400" dirty="0" err="1"/>
-              <a:t>tidyverse</a:t>
-            </a:r>
-            <a:r>
-              <a:rPr sz="2400" dirty="0"/>
-              <a:t> (like </a:t>
-            </a:r>
-            <a:r>
-              <a:rPr sz="2400" dirty="0" err="1"/>
-              <a:t>ggplot</a:t>
-            </a:r>
-            <a:r>
-              <a:rPr sz="2400" dirty="0"/>
-              <a:t>)</a:t>
-            </a:r>
-          </a:p>
-          <a:p>
-            <a:pPr marL="152400" indent="-152400">
-              <a:spcBef>
-                <a:spcPts val="500"/>
-              </a:spcBef>
-              <a:buSzPct val="123000"/>
-              <a:buChar char="•"/>
-              <a:defRPr sz="3600"/>
-            </a:pPr>
-            <a:r>
-              <a:rPr sz="2400" dirty="0"/>
-              <a:t>Speed - Having variables in columns lets R work more quickly (using vectorization)</a:t>
-            </a:r>
-          </a:p>
-        </p:txBody>
-      </p:sp>
-      <p:sp>
-        <p:nvSpPr>
-          <p:cNvPr id="329" name="Not all data need to be in this format"/>
+            <a:r>
+              <a:rPr sz="900" dirty="0"/>
+              <a:t>https://r4ds.had.co.nz/tidy-</a:t>
+            </a:r>
+            <a:r>
+              <a:rPr sz="900" dirty="0" err="1"/>
+              <a:t>data.html</a:t>
+            </a:r>
+            <a:endParaRPr sz="900" dirty="0"/>
+          </a:p>
+        </p:txBody>
+      </p:sp>
+      <p:sp>
+        <p:nvSpPr>
+          <p:cNvPr id="322" name="Not Tidy - wide"/>
           <p:cNvSpPr txBox="1"/>
           <p:nvPr/>
         </p:nvSpPr>
         <p:spPr>
           <a:xfrm>
-            <a:off x="3366515" y="3442304"/>
-            <a:ext cx="4768485" cy="420628"/>
+            <a:off x="8432134" y="1102077"/>
+            <a:ext cx="1505220" cy="328295"/>
           </a:xfrm>
           <a:prstGeom prst="rect">
             <a:avLst/>
@@ -11680,7 +11884,7 @@
           </a:ln>
           <a:extLst>
             <a:ext uri="{C572A759-6A51-4108-AA02-DFA0A04FC94B}">
-              <ma14:wrappingTextBoxFlag xmlns:ma14="http://schemas.microsoft.com/office/mac/drawingml/2011/main" xmlns:a14="http://schemas.microsoft.com/office/drawing/2010/main" xmlns:m="http://schemas.openxmlformats.org/officeDocument/2006/math" xmlns="" val="1"/>
+              <ma14:wrappingTextBoxFlag xmlns="" xmlns:m="http://schemas.openxmlformats.org/officeDocument/2006/math" xmlns:a14="http://schemas.microsoft.com/office/drawing/2010/main" xmlns:ma14="http://schemas.microsoft.com/office/mac/drawingml/2011/main" val="1"/>
             </a:ext>
           </a:extLst>
         </p:spPr>
@@ -11689,28 +11893,28 @@
             <a:spAutoFit/>
           </a:bodyPr>
           <a:lstStyle>
-            <a:lvl1pPr algn="l">
-              <a:defRPr sz="4800" b="1"/>
+            <a:lvl1pPr>
+              <a:defRPr sz="3600" b="1"/>
             </a:lvl1pPr>
           </a:lstStyle>
           <a:p>
             <a:r>
-              <a:rPr sz="2400"/>
-              <a:t>Not all data need to be in this format</a:t>
-            </a:r>
-          </a:p>
-        </p:txBody>
-      </p:sp>
-      <p:sp>
-        <p:nvSpPr>
-          <p:cNvPr id="331" name="From JT Leek https://simplystatistics.org/2016/02/17/non-tidy-data/"/>
+              <a:rPr sz="1800"/>
+              <a:t>Not Tidy - wide</a:t>
+            </a:r>
+          </a:p>
+        </p:txBody>
+      </p:sp>
+      <p:sp>
+        <p:nvSpPr>
+          <p:cNvPr id="323" name="Tidy - long"/>
           <p:cNvSpPr txBox="1"/>
           <p:nvPr/>
         </p:nvSpPr>
         <p:spPr>
           <a:xfrm>
-            <a:off x="7300568" y="6163346"/>
-            <a:ext cx="3273332" cy="189796"/>
+            <a:off x="9825690" y="4412340"/>
+            <a:ext cx="1041952" cy="328295"/>
           </a:xfrm>
           <a:prstGeom prst="rect">
             <a:avLst/>
@@ -11720,7 +11924,7 @@
           </a:ln>
           <a:extLst>
             <a:ext uri="{C572A759-6A51-4108-AA02-DFA0A04FC94B}">
-              <ma14:wrappingTextBoxFlag xmlns:ma14="http://schemas.microsoft.com/office/mac/drawingml/2011/main" xmlns:a14="http://schemas.microsoft.com/office/drawing/2010/main" xmlns:m="http://schemas.openxmlformats.org/officeDocument/2006/math" xmlns="" val="1"/>
+              <ma14:wrappingTextBoxFlag xmlns="" xmlns:m="http://schemas.openxmlformats.org/officeDocument/2006/math" xmlns:a14="http://schemas.microsoft.com/office/drawing/2010/main" xmlns:ma14="http://schemas.microsoft.com/office/mac/drawingml/2011/main" val="1"/>
             </a:ext>
           </a:extLst>
         </p:spPr>
@@ -11728,15 +11932,73 @@
           <a:bodyPr wrap="none" lIns="25400" tIns="25400" rIns="25400" bIns="25400" anchor="ctr">
             <a:spAutoFit/>
           </a:bodyPr>
-          <a:lstStyle/>
-          <a:p>
-            <a:r>
-              <a:rPr sz="900"/>
-              <a:t>From JT Leek https://simplystatistics.org/2016/02/17/non-tidy-data/</a:t>
-            </a:r>
-          </a:p>
-        </p:txBody>
-      </p:sp>
+          <a:lstStyle>
+            <a:lvl1pPr>
+              <a:defRPr sz="3600" b="1"/>
+            </a:lvl1pPr>
+          </a:lstStyle>
+          <a:p>
+            <a:r>
+              <a:rPr sz="1800"/>
+              <a:t>Tidy - long</a:t>
+            </a:r>
+          </a:p>
+        </p:txBody>
+      </p:sp>
+      <p:pic>
+        <p:nvPicPr>
+          <p:cNvPr id="324" name="Image" descr="Image"/>
+          <p:cNvPicPr>
+            <a:picLocks noChangeAspect="1"/>
+          </p:cNvPicPr>
+          <p:nvPr/>
+        </p:nvPicPr>
+        <p:blipFill>
+          <a:blip r:embed="rId4"/>
+          <a:stretch>
+            <a:fillRect/>
+          </a:stretch>
+        </p:blipFill>
+        <p:spPr>
+          <a:xfrm>
+            <a:off x="7617571" y="1455154"/>
+            <a:ext cx="3452745" cy="1496583"/>
+          </a:xfrm>
+          <a:prstGeom prst="rect">
+            <a:avLst/>
+          </a:prstGeom>
+          <a:ln w="12700">
+            <a:miter lim="400000"/>
+          </a:ln>
+        </p:spPr>
+      </p:pic>
+      <p:pic>
+        <p:nvPicPr>
+          <p:cNvPr id="325" name="Image" descr="Image"/>
+          <p:cNvPicPr>
+            <a:picLocks noChangeAspect="1"/>
+          </p:cNvPicPr>
+          <p:nvPr/>
+        </p:nvPicPr>
+        <p:blipFill>
+          <a:blip r:embed="rId5"/>
+          <a:stretch>
+            <a:fillRect/>
+          </a:stretch>
+        </p:blipFill>
+        <p:spPr>
+          <a:xfrm>
+            <a:off x="7562460" y="3109826"/>
+            <a:ext cx="2068241" cy="2933323"/>
+          </a:xfrm>
+          <a:prstGeom prst="rect">
+            <a:avLst/>
+          </a:prstGeom>
+          <a:ln w="12700">
+            <a:miter lim="400000"/>
+          </a:ln>
+        </p:spPr>
+      </p:pic>
     </p:spTree>
   </p:cSld>
   <p:clrMapOvr>
@@ -11764,123 +12026,209 @@
       </p:grpSpPr>
       <p:sp>
         <p:nvSpPr>
-          <p:cNvPr id="3" name="TextBox 2">
-            <a:extLst>
-              <a:ext uri="{FF2B5EF4-FFF2-40B4-BE49-F238E27FC236}">
-                <a16:creationId xmlns:a16="http://schemas.microsoft.com/office/drawing/2014/main" id="{81C7A794-25EC-952E-3459-951B43C9BD05}"/>
-              </a:ext>
-            </a:extLst>
-          </p:cNvPr>
+          <p:cNvPr id="327" name="Why should data be Tidy"/>
           <p:cNvSpPr txBox="1"/>
           <p:nvPr/>
         </p:nvSpPr>
         <p:spPr>
           <a:xfrm>
-            <a:off x="1746569" y="2362937"/>
-            <a:ext cx="8949937" cy="2308324"/>
-          </a:xfrm>
-          <a:prstGeom prst="rect">
-            <a:avLst/>
-          </a:prstGeom>
-          <a:noFill/>
-        </p:spPr>
-        <p:txBody>
-          <a:bodyPr wrap="square">
+            <a:off x="4162500" y="895012"/>
+            <a:ext cx="3200941" cy="420628"/>
+          </a:xfrm>
+          <a:prstGeom prst="rect">
+            <a:avLst/>
+          </a:prstGeom>
+          <a:ln w="12700">
+            <a:miter lim="400000"/>
+          </a:ln>
+          <a:extLst>
+            <a:ext uri="{C572A759-6A51-4108-AA02-DFA0A04FC94B}">
+              <ma14:wrappingTextBoxFlag xmlns="" xmlns:m="http://schemas.openxmlformats.org/officeDocument/2006/math" xmlns:a14="http://schemas.microsoft.com/office/drawing/2010/main" xmlns:ma14="http://schemas.microsoft.com/office/mac/drawingml/2011/main" val="1"/>
+            </a:ext>
+          </a:extLst>
+        </p:spPr>
+        <p:txBody>
+          <a:bodyPr wrap="none" lIns="25400" tIns="25400" rIns="25400" bIns="25400" anchor="ctr">
+            <a:spAutoFit/>
+          </a:bodyPr>
+          <a:lstStyle>
+            <a:lvl1pPr algn="l">
+              <a:defRPr sz="4800" b="1"/>
+            </a:lvl1pPr>
+          </a:lstStyle>
+          <a:p>
+            <a:r>
+              <a:rPr sz="2400" dirty="0"/>
+              <a:t>Why should data be Tidy</a:t>
+            </a:r>
+          </a:p>
+        </p:txBody>
+      </p:sp>
+      <p:sp>
+        <p:nvSpPr>
+          <p:cNvPr id="328" name="Consistency - easier if you always know how the data should be represented…"/>
+          <p:cNvSpPr txBox="1"/>
+          <p:nvPr/>
+        </p:nvSpPr>
+        <p:spPr>
+          <a:xfrm>
+            <a:off x="742760" y="2007347"/>
+            <a:ext cx="10419968" cy="1287532"/>
+          </a:xfrm>
+          <a:prstGeom prst="rect">
+            <a:avLst/>
+          </a:prstGeom>
+          <a:ln w="12700">
+            <a:miter lim="400000"/>
+          </a:ln>
+          <a:extLst>
+            <a:ext uri="{C572A759-6A51-4108-AA02-DFA0A04FC94B}">
+              <ma14:wrappingTextBoxFlag xmlns="" xmlns:m="http://schemas.openxmlformats.org/officeDocument/2006/math" xmlns:a14="http://schemas.microsoft.com/office/drawing/2010/main" xmlns:ma14="http://schemas.microsoft.com/office/mac/drawingml/2011/main" val="1"/>
+            </a:ext>
+          </a:extLst>
+        </p:spPr>
+        <p:txBody>
+          <a:bodyPr wrap="none" lIns="25400" tIns="25400" rIns="25400" bIns="25400" anchor="ctr">
             <a:spAutoFit/>
           </a:bodyPr>
           <a:lstStyle/>
           <a:p>
             <a:pPr marL="152400" indent="-152400">
+              <a:spcBef>
+                <a:spcPts val="500"/>
+              </a:spcBef>
               <a:buSzPct val="123000"/>
               <a:buChar char="•"/>
               <a:defRPr sz="3600"/>
             </a:pPr>
             <a:r>
-              <a:rPr lang="en-US" sz="2400" dirty="0"/>
-              <a:t>Speed  - Some specialized data formats can be faster for specific problems/computations (gene expression matrices are an example of this) </a:t>
+              <a:rPr sz="2400" dirty="0"/>
+              <a:t>Consistency - easier if you always know how the data should be represented</a:t>
             </a:r>
           </a:p>
           <a:p>
             <a:pPr marL="152400" indent="-152400">
+              <a:spcBef>
+                <a:spcPts val="500"/>
+              </a:spcBef>
               <a:buSzPct val="123000"/>
               <a:buChar char="•"/>
               <a:defRPr sz="3600"/>
             </a:pPr>
             <a:r>
-              <a:rPr lang="en-US" sz="2400" dirty="0"/>
-              <a:t>Field norms - some fields are used to storing data in a </a:t>
-            </a:r>
-            <a:r>
-              <a:rPr lang="en-US" sz="2400" dirty="0" err="1"/>
-              <a:t>specfic</a:t>
-            </a:r>
-            <a:r>
-              <a:rPr lang="en-US" sz="2400" dirty="0"/>
-              <a:t> way (</a:t>
-            </a:r>
-            <a:r>
-              <a:rPr lang="en-US" sz="2400" dirty="0" err="1"/>
-              <a:t>summarizedExperiment</a:t>
-            </a:r>
-            <a:r>
-              <a:rPr lang="en-US" sz="2400" dirty="0"/>
-              <a:t> in R )</a:t>
+              <a:rPr sz="2400" dirty="0"/>
+              <a:t>Ease - Works seamlessly with tools in the </a:t>
+            </a:r>
+            <a:r>
+              <a:rPr sz="2400" dirty="0" err="1"/>
+              <a:t>tidyverse</a:t>
+            </a:r>
+            <a:r>
+              <a:rPr sz="2400" dirty="0"/>
+              <a:t> (like </a:t>
+            </a:r>
+            <a:r>
+              <a:rPr sz="2400" dirty="0" err="1"/>
+              <a:t>ggplot</a:t>
+            </a:r>
+            <a:r>
+              <a:rPr sz="2400" dirty="0"/>
+              <a:t>)</a:t>
             </a:r>
           </a:p>
           <a:p>
             <a:pPr marL="152400" indent="-152400">
+              <a:spcBef>
+                <a:spcPts val="500"/>
+              </a:spcBef>
               <a:buSzPct val="123000"/>
               <a:buChar char="•"/>
               <a:defRPr sz="3600"/>
             </a:pPr>
             <a:r>
-              <a:rPr lang="en-US" sz="2400" dirty="0"/>
-              <a:t>Some tools work more easily on matrices - Heatmaps </a:t>
-            </a:r>
-          </a:p>
-        </p:txBody>
-      </p:sp>
-      <p:sp>
-        <p:nvSpPr>
-          <p:cNvPr id="4" name="TextBox 3">
-            <a:extLst>
-              <a:ext uri="{FF2B5EF4-FFF2-40B4-BE49-F238E27FC236}">
-                <a16:creationId xmlns:a16="http://schemas.microsoft.com/office/drawing/2014/main" id="{04116BB3-6CD9-6461-C172-252D8F54FFC2}"/>
-              </a:ext>
-            </a:extLst>
-          </p:cNvPr>
+              <a:rPr sz="2400" dirty="0"/>
+              <a:t>Speed - Having variables in columns lets R work more quickly (using vectorization)</a:t>
+            </a:r>
+          </a:p>
+        </p:txBody>
+      </p:sp>
+      <p:sp>
+        <p:nvSpPr>
+          <p:cNvPr id="329" name="Not all data need to be in this format"/>
           <p:cNvSpPr txBox="1"/>
           <p:nvPr/>
         </p:nvSpPr>
         <p:spPr>
           <a:xfrm>
-            <a:off x="3111591" y="467069"/>
-            <a:ext cx="6690251" cy="584775"/>
-          </a:xfrm>
-          <a:prstGeom prst="rect">
-            <a:avLst/>
-          </a:prstGeom>
-          <a:noFill/>
-        </p:spPr>
-        <p:txBody>
-          <a:bodyPr wrap="square" rtlCol="0">
+            <a:off x="3366515" y="3442304"/>
+            <a:ext cx="4768485" cy="420628"/>
+          </a:xfrm>
+          <a:prstGeom prst="rect">
+            <a:avLst/>
+          </a:prstGeom>
+          <a:ln w="12700">
+            <a:miter lim="400000"/>
+          </a:ln>
+          <a:extLst>
+            <a:ext uri="{C572A759-6A51-4108-AA02-DFA0A04FC94B}">
+              <ma14:wrappingTextBoxFlag xmlns="" xmlns:m="http://schemas.openxmlformats.org/officeDocument/2006/math" xmlns:a14="http://schemas.microsoft.com/office/drawing/2010/main" xmlns:ma14="http://schemas.microsoft.com/office/mac/drawingml/2011/main" val="1"/>
+            </a:ext>
+          </a:extLst>
+        </p:spPr>
+        <p:txBody>
+          <a:bodyPr wrap="none" lIns="25400" tIns="25400" rIns="25400" bIns="25400" anchor="ctr">
+            <a:spAutoFit/>
+          </a:bodyPr>
+          <a:lstStyle>
+            <a:lvl1pPr algn="l">
+              <a:defRPr sz="4800" b="1"/>
+            </a:lvl1pPr>
+          </a:lstStyle>
+          <a:p>
+            <a:r>
+              <a:rPr sz="2400"/>
+              <a:t>Not all data need to be in this format</a:t>
+            </a:r>
+          </a:p>
+        </p:txBody>
+      </p:sp>
+      <p:sp>
+        <p:nvSpPr>
+          <p:cNvPr id="331" name="From JT Leek https://simplystatistics.org/2016/02/17/non-tidy-data/"/>
+          <p:cNvSpPr txBox="1"/>
+          <p:nvPr/>
+        </p:nvSpPr>
+        <p:spPr>
+          <a:xfrm>
+            <a:off x="7300568" y="6163346"/>
+            <a:ext cx="3273332" cy="189796"/>
+          </a:xfrm>
+          <a:prstGeom prst="rect">
+            <a:avLst/>
+          </a:prstGeom>
+          <a:ln w="12700">
+            <a:miter lim="400000"/>
+          </a:ln>
+          <a:extLst>
+            <a:ext uri="{C572A759-6A51-4108-AA02-DFA0A04FC94B}">
+              <ma14:wrappingTextBoxFlag xmlns="" xmlns:m="http://schemas.openxmlformats.org/officeDocument/2006/math" xmlns:a14="http://schemas.microsoft.com/office/drawing/2010/main" xmlns:ma14="http://schemas.microsoft.com/office/mac/drawingml/2011/main" val="1"/>
+            </a:ext>
+          </a:extLst>
+        </p:spPr>
+        <p:txBody>
+          <a:bodyPr wrap="none" lIns="25400" tIns="25400" rIns="25400" bIns="25400" anchor="ctr">
             <a:spAutoFit/>
           </a:bodyPr>
           <a:lstStyle/>
           <a:p>
             <a:r>
-              <a:rPr lang="en-US" sz="3200" dirty="0"/>
-              <a:t>Why might data NOT need to be tidy</a:t>
+              <a:rPr sz="900"/>
+              <a:t>From JT Leek https://simplystatistics.org/2016/02/17/non-tidy-data/</a:t>
             </a:r>
           </a:p>
         </p:txBody>
       </p:sp>
     </p:spTree>
-    <p:extLst>
-      <p:ext uri="{BB962C8B-B14F-4D97-AF65-F5344CB8AC3E}">
-        <p14:creationId xmlns:p14="http://schemas.microsoft.com/office/powerpoint/2010/main" val="369776918"/>
-      </p:ext>
-    </p:extLst>
   </p:cSld>
   <p:clrMapOvr>
     <a:masterClrMapping/>
@@ -11907,10 +12255,10 @@
       </p:grpSpPr>
       <p:sp>
         <p:nvSpPr>
-          <p:cNvPr id="2" name="TextBox 1">
-            <a:extLst>
-              <a:ext uri="{FF2B5EF4-FFF2-40B4-BE49-F238E27FC236}">
-                <a16:creationId xmlns:a16="http://schemas.microsoft.com/office/drawing/2014/main" id="{EE808F59-D6A1-6EC7-8215-A1414DD3D939}"/>
+          <p:cNvPr id="3" name="TextBox 2">
+            <a:extLst>
+              <a:ext uri="{FF2B5EF4-FFF2-40B4-BE49-F238E27FC236}">
+                <a16:creationId xmlns:a16="http://schemas.microsoft.com/office/drawing/2014/main" id="{81C7A794-25EC-952E-3459-951B43C9BD05}"/>
               </a:ext>
             </a:extLst>
           </p:cNvPr>
@@ -11919,82 +12267,8 @@
         </p:nvSpPr>
         <p:spPr>
           <a:xfrm>
-            <a:off x="4008329" y="294362"/>
-            <a:ext cx="4416274" cy="369332"/>
-          </a:xfrm>
-          <a:prstGeom prst="rect">
-            <a:avLst/>
-          </a:prstGeom>
-          <a:noFill/>
-        </p:spPr>
-        <p:txBody>
-          <a:bodyPr wrap="none" rtlCol="0">
-            <a:spAutoFit/>
-          </a:bodyPr>
-          <a:lstStyle/>
-          <a:p>
-            <a:r>
-              <a:rPr lang="en-US" dirty="0"/>
-              <a:t>Converting between wide and long formats </a:t>
-            </a:r>
-          </a:p>
-        </p:txBody>
-      </p:sp>
-      <p:sp>
-        <p:nvSpPr>
-          <p:cNvPr id="5" name="TextBox 4">
-            <a:extLst>
-              <a:ext uri="{FF2B5EF4-FFF2-40B4-BE49-F238E27FC236}">
-                <a16:creationId xmlns:a16="http://schemas.microsoft.com/office/drawing/2014/main" id="{B79559C3-A22F-1230-70F5-89B6E2C4E39A}"/>
-              </a:ext>
-            </a:extLst>
-          </p:cNvPr>
-          <p:cNvSpPr txBox="1"/>
-          <p:nvPr/>
-        </p:nvSpPr>
-        <p:spPr>
-          <a:xfrm>
-            <a:off x="753650" y="1054274"/>
-            <a:ext cx="1515928" cy="369332"/>
-          </a:xfrm>
-          <a:prstGeom prst="rect">
-            <a:avLst/>
-          </a:prstGeom>
-          <a:noFill/>
-        </p:spPr>
-        <p:txBody>
-          <a:bodyPr wrap="none" rtlCol="0">
-            <a:spAutoFit/>
-          </a:bodyPr>
-          <a:lstStyle/>
-          <a:p>
-            <a:r>
-              <a:rPr lang="en-US" dirty="0" err="1"/>
-              <a:t>pivot_longer</a:t>
-            </a:r>
-            <a:r>
-              <a:rPr lang="en-US" dirty="0"/>
-              <a:t>()</a:t>
-            </a:r>
-          </a:p>
-        </p:txBody>
-      </p:sp>
-      <p:sp>
-        <p:nvSpPr>
-          <p:cNvPr id="7" name="TextBox 6">
-            <a:extLst>
-              <a:ext uri="{FF2B5EF4-FFF2-40B4-BE49-F238E27FC236}">
-                <a16:creationId xmlns:a16="http://schemas.microsoft.com/office/drawing/2014/main" id="{D45D8B8A-91FB-510E-E86D-3BBB80461A55}"/>
-              </a:ext>
-            </a:extLst>
-          </p:cNvPr>
-          <p:cNvSpPr txBox="1"/>
-          <p:nvPr/>
-        </p:nvSpPr>
-        <p:spPr>
-          <a:xfrm>
-            <a:off x="7733257" y="6194306"/>
-            <a:ext cx="6097044" cy="369332"/>
+            <a:off x="1746569" y="2362937"/>
+            <a:ext cx="8949937" cy="2308324"/>
           </a:xfrm>
           <a:prstGeom prst="rect">
             <a:avLst/>
@@ -12007,90 +12281,87 @@
           </a:bodyPr>
           <a:lstStyle/>
           <a:p>
-            <a:r>
-              <a:rPr lang="en-US" dirty="0"/>
-              <a:t>https://</a:t>
-            </a:r>
-            <a:r>
-              <a:rPr lang="en-US" dirty="0" err="1"/>
-              <a:t>tidyr.tidyverse.org</a:t>
-            </a:r>
-            <a:r>
-              <a:rPr lang="en-US" dirty="0"/>
-              <a:t>/articles/</a:t>
-            </a:r>
-            <a:r>
-              <a:rPr lang="en-US" dirty="0" err="1"/>
-              <a:t>pivot.html</a:t>
-            </a:r>
-            <a:endParaRPr lang="en-US" dirty="0"/>
-          </a:p>
-        </p:txBody>
-      </p:sp>
-      <p:pic>
-        <p:nvPicPr>
-          <p:cNvPr id="8" name="Picture 7">
-            <a:extLst>
-              <a:ext uri="{FF2B5EF4-FFF2-40B4-BE49-F238E27FC236}">
-                <a16:creationId xmlns:a16="http://schemas.microsoft.com/office/drawing/2014/main" id="{127BA8B8-06AE-6E6A-8720-78F1858E5025}"/>
-              </a:ext>
-            </a:extLst>
-          </p:cNvPr>
-          <p:cNvPicPr>
-            <a:picLocks noChangeAspect="1"/>
-          </p:cNvPicPr>
-          <p:nvPr/>
-        </p:nvPicPr>
-        <p:blipFill>
-          <a:blip r:embed="rId2"/>
-          <a:stretch>
-            <a:fillRect/>
-          </a:stretch>
-        </p:blipFill>
-        <p:spPr>
-          <a:xfrm>
-            <a:off x="2591844" y="1100513"/>
-            <a:ext cx="7772400" cy="276853"/>
-          </a:xfrm>
-          <a:prstGeom prst="rect">
-            <a:avLst/>
-          </a:prstGeom>
-        </p:spPr>
-      </p:pic>
-      <p:pic>
-        <p:nvPicPr>
-          <p:cNvPr id="9" name="Picture 8">
-            <a:extLst>
-              <a:ext uri="{FF2B5EF4-FFF2-40B4-BE49-F238E27FC236}">
-                <a16:creationId xmlns:a16="http://schemas.microsoft.com/office/drawing/2014/main" id="{6E2F069F-068C-300C-AF56-3432AF4D767F}"/>
-              </a:ext>
-            </a:extLst>
-          </p:cNvPr>
-          <p:cNvPicPr>
-            <a:picLocks noChangeAspect="1"/>
-          </p:cNvPicPr>
-          <p:nvPr/>
-        </p:nvPicPr>
-        <p:blipFill>
-          <a:blip r:embed="rId3"/>
-          <a:stretch>
-            <a:fillRect/>
-          </a:stretch>
-        </p:blipFill>
-        <p:spPr>
-          <a:xfrm>
-            <a:off x="697108" y="1745292"/>
-            <a:ext cx="4612017" cy="2181618"/>
-          </a:xfrm>
-          <a:prstGeom prst="rect">
-            <a:avLst/>
-          </a:prstGeom>
-        </p:spPr>
-      </p:pic>
+            <a:pPr marL="152400" indent="-152400">
+              <a:buSzPct val="123000"/>
+              <a:buChar char="•"/>
+              <a:defRPr sz="3600"/>
+            </a:pPr>
+            <a:r>
+              <a:rPr lang="en-US" sz="2400" dirty="0"/>
+              <a:t>Speed  - Some specialized data formats can be faster for specific problems/computations (gene expression matrices are an example of this) </a:t>
+            </a:r>
+          </a:p>
+          <a:p>
+            <a:pPr marL="152400" indent="-152400">
+              <a:buSzPct val="123000"/>
+              <a:buChar char="•"/>
+              <a:defRPr sz="3600"/>
+            </a:pPr>
+            <a:r>
+              <a:rPr lang="en-US" sz="2400" dirty="0"/>
+              <a:t>Field norms - some fields are used to storing data in a specific way (</a:t>
+            </a:r>
+            <a:r>
+              <a:rPr lang="en-US" sz="2400" dirty="0" err="1"/>
+              <a:t>summarizedExperiment</a:t>
+            </a:r>
+            <a:r>
+              <a:rPr lang="en-US" sz="2400" dirty="0"/>
+              <a:t> in R )</a:t>
+            </a:r>
+          </a:p>
+          <a:p>
+            <a:pPr marL="152400" indent="-152400">
+              <a:buSzPct val="123000"/>
+              <a:buChar char="•"/>
+              <a:defRPr sz="3600"/>
+            </a:pPr>
+            <a:r>
+              <a:rPr lang="en-US" sz="2400" dirty="0"/>
+              <a:t>Some tools work more easily on matrices - Heatmaps </a:t>
+            </a:r>
+          </a:p>
+        </p:txBody>
+      </p:sp>
+      <p:sp>
+        <p:nvSpPr>
+          <p:cNvPr id="4" name="TextBox 3">
+            <a:extLst>
+              <a:ext uri="{FF2B5EF4-FFF2-40B4-BE49-F238E27FC236}">
+                <a16:creationId xmlns:a16="http://schemas.microsoft.com/office/drawing/2014/main" id="{04116BB3-6CD9-6461-C172-252D8F54FFC2}"/>
+              </a:ext>
+            </a:extLst>
+          </p:cNvPr>
+          <p:cNvSpPr txBox="1"/>
+          <p:nvPr/>
+        </p:nvSpPr>
+        <p:spPr>
+          <a:xfrm>
+            <a:off x="3111591" y="467069"/>
+            <a:ext cx="6690251" cy="584775"/>
+          </a:xfrm>
+          <a:prstGeom prst="rect">
+            <a:avLst/>
+          </a:prstGeom>
+          <a:noFill/>
+        </p:spPr>
+        <p:txBody>
+          <a:bodyPr wrap="square" rtlCol="0">
+            <a:spAutoFit/>
+          </a:bodyPr>
+          <a:lstStyle/>
+          <a:p>
+            <a:r>
+              <a:rPr lang="en-US" sz="3200" dirty="0"/>
+              <a:t>Why might data NOT need to be tidy</a:t>
+            </a:r>
+          </a:p>
+        </p:txBody>
+      </p:sp>
     </p:spTree>
     <p:extLst>
       <p:ext uri="{BB962C8B-B14F-4D97-AF65-F5344CB8AC3E}">
-        <p14:creationId xmlns:p14="http://schemas.microsoft.com/office/powerpoint/2010/main" val="2028895342"/>
+        <p14:creationId xmlns:p14="http://schemas.microsoft.com/office/powerpoint/2010/main" val="369776918"/>
       </p:ext>
     </p:extLst>
   </p:cSld>
@@ -12299,170 +12570,10 @@
           </a:prstGeom>
         </p:spPr>
       </p:pic>
-      <p:pic>
-        <p:nvPicPr>
-          <p:cNvPr id="10" name="Picture 9">
-            <a:extLst>
-              <a:ext uri="{FF2B5EF4-FFF2-40B4-BE49-F238E27FC236}">
-                <a16:creationId xmlns:a16="http://schemas.microsoft.com/office/drawing/2014/main" id="{489A0044-0EA4-60BE-B9E6-980517DA0E47}"/>
-              </a:ext>
-            </a:extLst>
-          </p:cNvPr>
-          <p:cNvPicPr>
-            <a:picLocks noChangeAspect="1"/>
-          </p:cNvPicPr>
-          <p:nvPr/>
-        </p:nvPicPr>
-        <p:blipFill>
-          <a:blip r:embed="rId4"/>
-          <a:stretch>
-            <a:fillRect/>
-          </a:stretch>
-        </p:blipFill>
-        <p:spPr>
-          <a:xfrm>
-            <a:off x="6568858" y="1704419"/>
-            <a:ext cx="2080364" cy="2220706"/>
-          </a:xfrm>
-          <a:prstGeom prst="rect">
-            <a:avLst/>
-          </a:prstGeom>
-        </p:spPr>
-      </p:pic>
-      <p:sp>
-        <p:nvSpPr>
-          <p:cNvPr id="11" name="TextBox 10">
-            <a:extLst>
-              <a:ext uri="{FF2B5EF4-FFF2-40B4-BE49-F238E27FC236}">
-                <a16:creationId xmlns:a16="http://schemas.microsoft.com/office/drawing/2014/main" id="{E6A912FF-30D2-79B4-01F1-07C981BE9D8E}"/>
-              </a:ext>
-            </a:extLst>
-          </p:cNvPr>
-          <p:cNvSpPr txBox="1"/>
-          <p:nvPr/>
-        </p:nvSpPr>
-        <p:spPr>
-          <a:xfrm>
-            <a:off x="594986" y="4294836"/>
-            <a:ext cx="4576959" cy="369332"/>
-          </a:xfrm>
-          <a:prstGeom prst="rect">
-            <a:avLst/>
-          </a:prstGeom>
-          <a:noFill/>
-        </p:spPr>
-        <p:txBody>
-          <a:bodyPr wrap="none" rtlCol="0">
-            <a:spAutoFit/>
-          </a:bodyPr>
-          <a:lstStyle/>
-          <a:p>
-            <a:r>
-              <a:rPr lang="en-US" dirty="0"/>
-              <a:t>More useful if you want to plot length vs width</a:t>
-            </a:r>
-          </a:p>
-        </p:txBody>
-      </p:sp>
-      <p:sp>
-        <p:nvSpPr>
-          <p:cNvPr id="13" name="TextBox 12">
-            <a:extLst>
-              <a:ext uri="{FF2B5EF4-FFF2-40B4-BE49-F238E27FC236}">
-                <a16:creationId xmlns:a16="http://schemas.microsoft.com/office/drawing/2014/main" id="{5E2DCCF8-1717-F444-955C-F62097346BEF}"/>
-              </a:ext>
-            </a:extLst>
-          </p:cNvPr>
-          <p:cNvSpPr txBox="1"/>
-          <p:nvPr/>
-        </p:nvSpPr>
-        <p:spPr>
-          <a:xfrm>
-            <a:off x="6330864" y="3981046"/>
-            <a:ext cx="5194948" cy="369332"/>
-          </a:xfrm>
-          <a:prstGeom prst="rect">
-            <a:avLst/>
-          </a:prstGeom>
-          <a:noFill/>
-        </p:spPr>
-        <p:txBody>
-          <a:bodyPr wrap="none" rtlCol="0">
-            <a:spAutoFit/>
-          </a:bodyPr>
-          <a:lstStyle/>
-          <a:p>
-            <a:r>
-              <a:rPr lang="en-US" dirty="0"/>
-              <a:t>More useful if you want to plot all attributes together</a:t>
-            </a:r>
-          </a:p>
-        </p:txBody>
-      </p:sp>
-      <p:pic>
-        <p:nvPicPr>
-          <p:cNvPr id="14" name="Picture 13">
-            <a:extLst>
-              <a:ext uri="{FF2B5EF4-FFF2-40B4-BE49-F238E27FC236}">
-                <a16:creationId xmlns:a16="http://schemas.microsoft.com/office/drawing/2014/main" id="{F9D1E1A7-24D9-1564-6745-23EBC52DBF63}"/>
-              </a:ext>
-            </a:extLst>
-          </p:cNvPr>
-          <p:cNvPicPr>
-            <a:picLocks noChangeAspect="1"/>
-          </p:cNvPicPr>
-          <p:nvPr/>
-        </p:nvPicPr>
-        <p:blipFill>
-          <a:blip r:embed="rId5"/>
-          <a:stretch>
-            <a:fillRect/>
-          </a:stretch>
-        </p:blipFill>
-        <p:spPr>
-          <a:xfrm>
-            <a:off x="1429340" y="4766961"/>
-            <a:ext cx="1797778" cy="1997136"/>
-          </a:xfrm>
-          <a:prstGeom prst="rect">
-            <a:avLst/>
-          </a:prstGeom>
-        </p:spPr>
-      </p:pic>
-      <p:pic>
-        <p:nvPicPr>
-          <p:cNvPr id="15" name="Picture 14">
-            <a:extLst>
-              <a:ext uri="{FF2B5EF4-FFF2-40B4-BE49-F238E27FC236}">
-                <a16:creationId xmlns:a16="http://schemas.microsoft.com/office/drawing/2014/main" id="{37AABA38-6352-FF7A-A86F-B49D58CF2110}"/>
-              </a:ext>
-            </a:extLst>
-          </p:cNvPr>
-          <p:cNvPicPr>
-            <a:picLocks noChangeAspect="1"/>
-          </p:cNvPicPr>
-          <p:nvPr/>
-        </p:nvPicPr>
-        <p:blipFill>
-          <a:blip r:embed="rId6"/>
-          <a:stretch>
-            <a:fillRect/>
-          </a:stretch>
-        </p:blipFill>
-        <p:spPr>
-          <a:xfrm>
-            <a:off x="5840849" y="4406299"/>
-            <a:ext cx="1892408" cy="2095279"/>
-          </a:xfrm>
-          <a:prstGeom prst="rect">
-            <a:avLst/>
-          </a:prstGeom>
-        </p:spPr>
-      </p:pic>
     </p:spTree>
     <p:extLst>
       <p:ext uri="{BB962C8B-B14F-4D97-AF65-F5344CB8AC3E}">
-        <p14:creationId xmlns:p14="http://schemas.microsoft.com/office/powerpoint/2010/main" val="1766242288"/>
+        <p14:creationId xmlns:p14="http://schemas.microsoft.com/office/powerpoint/2010/main" val="2028895342"/>
       </p:ext>
     </p:extLst>
   </p:cSld>
